--- a/en/files/slides/Session_2_EN.pptx
+++ b/en/files/slides/Session_2_EN.pptx
@@ -743,7 +743,7 @@
           <a:p>
             <a:r>
               <a:rPr lang="en-US" sz="1400" b="0" dirty="0"/>
-              <a:t>Teaching point: yesterday each group wrote a question; today we find out what is already known about it, keep the references safely, and read papers efficiently.</a:t>
+              <a:t>Teaching point: last Saturday each group wrote a question; today we find out what is already known about it, keep the references safely, and read papers efficiently.</a:t>
             </a:r>
           </a:p>
           <a:p>
@@ -1886,7 +1886,7 @@
           <a:p>
             <a:r>
               <a:rPr lang="en-US" sz="1400" b="0" dirty="0"/>
-              <a:t>This also re-activates yesterday's vocabulary for today's search.</a:t>
+              <a:t>This also re-activates last Saturday's vocabulary for today's search.</a:t>
             </a:r>
           </a:p>
           <a:p>
@@ -3962,7 +3962,7 @@
           <a:p>
             <a:r>
               <a:rPr lang="en-US" sz="1400" b="0" dirty="0"/>
-              <a:t>Teaching point: everything taught today is applied to the group's own question from yesterday. By 2:55 each group has a documented search, at least 3-5 references in the matrix, a draft problem statement and a working title.</a:t>
+              <a:t>Teaching point: everything taught today is applied to the group's own question from last Saturday. By 2:55 each group has a documented search, at least 3-5 references in the matrix, a draft problem statement and a working title.</a:t>
             </a:r>
           </a:p>
           <a:p>
@@ -4370,7 +4370,7 @@
           <a:p>
             <a:r>
               <a:rPr lang="en-US" sz="1400" b="0" dirty="0"/>
-              <a:t>Link forward: next weekend (Sessions 3 and 4) we choose the right DESIGN to answer each group's question - and meet bias, confounding and measures of effect using the two fluid papers.</a:t>
+              <a:t>Link forward: over the next two Saturdays (Sessions 3 and 4) we choose the right DESIGN to answer each group's question - and meet bias, confounding and measures of effect using the two fluid papers.</a:t>
             </a:r>
           </a:p>
           <a:p>
@@ -4562,7 +4562,7 @@
           <a:p>
             <a:r>
               <a:rPr lang="en-US" sz="1400" b="0" dirty="0"/>
-              <a:t>Remind groups to send their Part 1 to the trainers if you offer written feedback between weekends.</a:t>
+              <a:t>Remind groups to send their Part 1 to the trainers if you offer written feedback between sessions.</a:t>
             </a:r>
           </a:p>
           <a:p>
@@ -8830,7 +8830,7 @@
                 <a:latin typeface="Century Gothic"/>
                 <a:cs typeface="Century Gothic"/>
               </a:rPr>
-              <a:t>Weekend 1 · Sunday</a:t>
+              <a:t>Week 2 · Saturday</a:t>
             </a:r>
           </a:p>
           <a:p>
@@ -23583,7 +23583,7 @@
                 <a:latin typeface="Century Gothic"/>
                 <a:cs typeface="Century Gothic"/>
               </a:rPr>
-              <a:t>Weekend 1 is done: your group has a question, five papers and a title.</a:t>
+              <a:t>Weeks 1-2 are done: your group has a question, five papers and a title.</a:t>
             </a:r>
           </a:p>
         </p:txBody>
@@ -24164,7 +24164,7 @@
                 <a:latin typeface="Century Gothic"/>
                 <a:cs typeface="Century Gothic"/>
               </a:rPr>
-              <a:t>Homework before Session 3 (next weekend)</a:t>
+              <a:t>Homework before Session 3 (next Saturday)</a:t>
             </a:r>
           </a:p>
         </p:txBody>
@@ -24459,7 +24459,7 @@
                 <a:latin typeface="Century Gothic"/>
                 <a:cs typeface="Century Gothic"/>
               </a:rPr>
-              <a:t>Bring next weekend</a:t>
+              <a:t>Bring next Saturday</a:t>
             </a:r>
           </a:p>
           <a:p>

--- a/en/files/slides/Session_2_EN.pptx
+++ b/en/files/slides/Session_2_EN.pptx
@@ -749,7 +749,7 @@
           <a:p>
             <a:r>
               <a:rPr lang="en-US" sz="1400" b="0" dirty="0"/>
-              <a:t>Pace: slower than it looks. Every block has a demo or a task. Use the 'Check your understanding' slides - they are where you find out who is lost.</a:t>
+              <a:t>Pace: slower than it looks. Every block has a demo or a task. Use the 'Check your understanding' slides: they show you who is lost.</a:t>
             </a:r>
           </a:p>
           <a:p>
@@ -848,7 +848,7 @@
           <a:p>
             <a:r>
               <a:rPr lang="en-US" sz="1400" b="0" dirty="0"/>
-              <a:t>Searching a MeSH term includes the narrower terms below it ('explode') - Sepsis[MeSH] includes Shock, Septic.</a:t>
+              <a:t>Searching a MeSH term includes the narrower terms below it ('explode'). For example, Sepsis[MeSH] includes Shock, Septic.</a:t>
             </a:r>
           </a:p>
           <a:p>
@@ -860,7 +860,7 @@
           <a:p>
             <a:r>
               <a:rPr lang="en-US" sz="1400" b="0" dirty="0"/>
-              <a:t>Ask the room: 'Why does MeSH help a nurse searching for pressure injury?' Expected: authors write pressure ulcer, bedsore, decubitus ulcer - MeSH collects them under one heading.</a:t>
+              <a:t>Ask the room: 'Why does MeSH help a nurse searching for pressure injury?' Expected: authors write pressure ulcer, bedsore, decubitus ulcer, and MeSH collects them under one heading.</a:t>
             </a:r>
           </a:p>
           <a:p>
@@ -947,7 +947,7 @@
           <a:p>
             <a:r>
               <a:rPr lang="en-US" sz="1400" b="0" dirty="0"/>
-              <a:t>Quotes keep a phrase together. Truncation finds all endings - but too short a stem (flu*) finds influenza and fluoride too.</a:t>
+              <a:t>Quotes keep a phrase together. Truncation finds all endings, but too short a stem (flu*) finds influenza and fluoride too.</a:t>
             </a:r>
           </a:p>
           <a:p>
@@ -1058,13 +1058,13 @@
           <a:p>
             <a:r>
               <a:rPr lang="en-US" sz="1400" b="0" dirty="0"/>
-              <a:t>Other databases exist (Embase, CINAHL for nursing, Cochrane Library) - not needed for Level 1.</a:t>
+              <a:t>Other databases exist (Embase, CINAHL for nursing, Cochrane Library), but they are not needed for Level 1.</a:t>
             </a:r>
           </a:p>
           <a:p>
             <a:r>
               <a:rPr lang="en-US" sz="1400" b="0" dirty="0"/>
-              <a:t>Ask the room: 'A colleague found a perfect paper in Google Scholar - what should you check?' Expected: peer-reviewed or preprint? legitimate journal? (predatory journals - Session 8).</a:t>
+              <a:t>Ask the room: 'A colleague found a perfect paper in Google Scholar. What should you check?' Expected: peer-reviewed or preprint? Legitimate journal? (Predatory journals: Session 8.)</a:t>
             </a:r>
           </a:p>
           <a:p>
@@ -1151,7 +1151,7 @@
           <a:p>
             <a:r>
               <a:rPr lang="en-US" sz="1400" b="0" dirty="0"/>
-              <a:t>Follow Course/Demos/s2_demo.md, Part A (PubMed) - exact strings, where to click, and the offline fallback.</a:t>
+              <a:t>Follow Course/Demos/s2_demo.md, Part A (PubMed): exact strings, where to click, and the offline fallback.</a:t>
             </a:r>
           </a:p>
           <a:p>
@@ -1169,7 +1169,7 @@
           <a:p>
             <a:r>
               <a:rPr lang="en-US" sz="1400" b="0" dirty="0"/>
-              <a:t>If the internet fails, switch to the screenshots - do not troubleshoot in front of the room.</a:t>
+              <a:t>If the internet fails, switch to the screenshots. Do not troubleshoot in front of the room.</a:t>
             </a:r>
           </a:p>
           <a:p>
@@ -1256,7 +1256,7 @@
           <a:p>
             <a:r>
               <a:rPr lang="en-US" sz="1400" b="0" dirty="0"/>
-              <a:t>No computers needed - a paper exercise with the Boolean search builder.</a:t>
+              <a:t>No computers needed: it is a paper exercise with the Boolean search builder.</a:t>
             </a:r>
           </a:p>
           <a:p>
@@ -1361,7 +1361,7 @@
           <a:p>
             <a:r>
               <a:rPr lang="en-US" sz="1400" b="0" dirty="0"/>
-              <a:t>Teaching point: two habits protect every proposal and paper - save references in a reference manager from day one, and never copy wording from a source.</a:t>
+              <a:t>Teaching point: two habits protect every proposal and paper: save references in a reference manager from day one, and never copy wording from a source.</a:t>
             </a:r>
           </a:p>
           <a:p>
@@ -1769,31 +1769,31 @@
           <a:p>
             <a:r>
               <a:rPr lang="en-US" sz="1400" b="0" dirty="0"/>
-              <a:t>Left: 'patchwriting' - the same sentence with a few words swapped. Even with a reference this is plagiarism, because the structure and most of the wording are copied. Similarity checkers used by journals detect it easily.</a:t>
+              <a:t>Left: 'patchwriting', the same sentence with a few words swapped. Even with a reference this is plagiarism, because the structure and most of the wording are copied. Similarity checkers used by journals detect it easily.</a:t>
             </a:r>
           </a:p>
           <a:p>
             <a:r>
               <a:rPr lang="en-US" sz="1400" b="0" dirty="0"/>
-              <a:t>Right: a real paraphrase - new structure, extra context from the paper (pilot, 48 patients, which fluids), and a citation.</a:t>
+              <a:t>Right: a real paraphrase, with a new structure, extra context from the paper (pilot, 48 patients, which fluids), and a citation.</a:t>
             </a:r>
           </a:p>
           <a:p>
             <a:r>
               <a:rPr lang="en-US" sz="1400" b="0" dirty="0"/>
-              <a:t>Method: read, close the paper, write from memory, check the facts, cite. If you need the exact words, use quotation marks and a citation - but quotes are rare in medical writing.</a:t>
+              <a:t>Method: read, close the paper, write from memory, check the facts, cite. If you need the exact words, use quotation marks and a citation. Quotes are rare in medical writing.</a:t>
             </a:r>
           </a:p>
           <a:p>
             <a:r>
               <a:rPr lang="en-US" sz="1400" b="0" dirty="0"/>
-              <a:t>Misconception: 'if I cite it, I can copy it'. Citation credits the idea; it does not license copying the wording. AI rewording tools do not solve this either - you remain responsible (Session 7).</a:t>
+              <a:t>Misconception: 'if I cite it, I can copy it'. Citation credits the idea; it does not license copying the wording. AI rewording tools do not solve this either. You remain responsible (Session 7).</a:t>
             </a:r>
           </a:p>
           <a:p>
             <a:r>
               <a:rPr lang="en-US" sz="1400" b="0" dirty="0"/>
-              <a:t>Ask the room: 'Is copying the Methods wording from your own earlier paper allowed?' Expected: it is text recycling - check the journal policy; usually rewrite or cite.</a:t>
+              <a:t>Ask the room: 'Is copying the Methods wording from your own earlier paper allowed?' Expected: it is text recycling. Check the journal policy, and usually rewrite or cite.</a:t>
             </a:r>
           </a:p>
           <a:p>
@@ -1985,7 +1985,7 @@
           <a:p>
             <a:r>
               <a:rPr lang="en-US" sz="1400" b="0" dirty="0"/>
-              <a:t>Citing a paper you have only seen quoted elsewhere spreads errors - check the original.</a:t>
+              <a:t>Citing a paper you have only seen quoted elsewhere spreads errors. Check the original.</a:t>
             </a:r>
           </a:p>
           <a:p>
@@ -2078,7 +2078,7 @@
           <a:p>
             <a:r>
               <a:rPr lang="en-US" sz="1400" b="0" dirty="0"/>
-              <a:t>Answers: 1 Not OK - patchwriting is plagiarism even with a citation. 2 OK (but rare in medical writing). 3 Not OK - someone else's finding needs a citation. 4 Not OK - you may repeat an error; read and cite the original.</a:t>
+              <a:t>Answers: 1 Not OK: patchwriting is plagiarism even with a citation. 2 OK (but rare in medical writing). 3 Not OK: someone else's finding needs a citation. 4 Not OK: you may repeat an error, so read and cite the original.</a:t>
             </a:r>
           </a:p>
           <a:p>
@@ -2177,7 +2177,7 @@
           <a:p>
             <a:r>
               <a:rPr lang="en-US" sz="1400" b="0" dirty="0"/>
-              <a:t>Trial registries - ClinicalTrials.gov and the WHO International Clinical Trials Registry Platform (ICTRP) - list ongoing and completed trials with their PLANNED primary outcome. Compare it with the published paper: a switched outcome is a warning sign.</a:t>
+              <a:t>Trial registries (ClinicalTrials.gov and the WHO International Clinical Trials Registry Platform, ICTRP) list ongoing and completed trials with their PLANNED primary outcome. Compare it with the published paper: a switched outcome is a warning sign.</a:t>
             </a:r>
           </a:p>
           <a:p>
@@ -2189,7 +2189,7 @@
           <a:p>
             <a:r>
               <a:rPr lang="en-US" sz="1400" b="0" dirty="0"/>
-              <a:t>Preprints (e.g. medRxiv) are not peer reviewed - read them with extra care.</a:t>
+              <a:t>Preprints (e.g. medRxiv) are not peer reviewed. Read them with extra care.</a:t>
             </a:r>
           </a:p>
           <a:p>
@@ -2201,7 +2201,7 @@
           <a:p>
             <a:r>
               <a:rPr lang="en-US" sz="1400" b="0" dirty="0"/>
-              <a:t>Timing: 3 minutes. Segment 2.2 ends at 1:10 - break.</a:t>
+              <a:t>Timing: 3 minutes. Segment 2.2 ends at 1:10, then the break.</a:t>
             </a:r>
           </a:p>
         </p:txBody>
@@ -2294,7 +2294,7 @@
           <a:p>
             <a:r>
               <a:rPr lang="en-US" sz="1400" b="0" dirty="0"/>
-              <a:t>Restart on time - say clearly what time you will begin again.</a:t>
+              <a:t>Restart on time. Say clearly what time you will begin again.</a:t>
             </a:r>
           </a:p>
         </p:txBody>
@@ -2474,7 +2474,7 @@
           <a:p>
             <a:r>
               <a:rPr lang="en-US" sz="1400" b="0" dirty="0"/>
-              <a:t>IMRaD = Introduction, Methods, Results and Discussion - the standard structure of an original research paper, with a title and an abstract on top.</a:t>
+              <a:t>IMRaD = Introduction, Methods, Results and Discussion: the standard structure of an original research paper, with a title and an abstract on top.</a:t>
             </a:r>
           </a:p>
           <a:p>
@@ -2708,13 +2708,13 @@
           <a:p>
             <a:r>
               <a:rPr lang="en-US" sz="1400" b="0" dirty="0"/>
-              <a:t>Results must give the numbers screened and analysed and the primary result as an effect size with its 95% confidence interval - not just a p-value or 'significant'.</a:t>
+              <a:t>Results must give the numbers screened and analysed and the primary result as an effect size with its 95% confidence interval, not only a p-value or 'significant'.</a:t>
             </a:r>
           </a:p>
           <a:p>
             <a:r>
               <a:rPr lang="en-US" sz="1400" b="0" dirty="0"/>
-              <a:t>Conclusions answer the primary question - no more, no less. Reporting guidelines have abstract checklists (CONSORT for Abstracts, STROBE) - Session 8.</a:t>
+              <a:t>Conclusions answer the primary question, no more and no less. Reporting guidelines have abstract checklists (CONSORT for Abstracts, STROBE), covered in Session 8.</a:t>
             </a:r>
           </a:p>
           <a:p>
@@ -2825,13 +2825,13 @@
           <a:p>
             <a:r>
               <a:rPr lang="en-US" sz="1400" b="0" dirty="0"/>
-              <a:t>Teaching point: 'how big, how sure, by when?' - ask these three questions of every result you read. Confidence intervals are explained properly in Session 6.</a:t>
+              <a:t>Teaching point: ask 'how big, how sure, by when?' of every result you read. Confidence intervals are explained properly in Session 6.</a:t>
             </a:r>
           </a:p>
           <a:p>
             <a:r>
               <a:rPr lang="en-US" sz="1400" b="0" dirty="0"/>
-              <a:t>Ask the room: 'Which sentence would you trust to change practice?' Expected: the right one - you can see the size and the uncertainty.</a:t>
+              <a:t>Ask the room: 'Which sentence would you trust to change practice?' Expected: the right one, because you can see the size and the uncertainty.</a:t>
             </a:r>
           </a:p>
           <a:p>
@@ -2936,7 +2936,7 @@
           <a:p>
             <a:r>
               <a:rPr lang="en-US" sz="1400" b="0" dirty="0"/>
-              <a:t>Row 3: causal words for observational data - Paper 2's title says 'Impact of...' although a cohort can only show association (its abstract conclusion correctly says 'associated').</a:t>
+              <a:t>Row 3: causal words for observational data. Paper 2's title says 'Impact of...' although a cohort can only show association (its abstract conclusion correctly says 'associated').</a:t>
             </a:r>
           </a:p>
           <a:p>
@@ -3128,7 +3128,7 @@
           <a:p>
             <a:r>
               <a:rPr lang="en-US" sz="1400" b="0" dirty="0"/>
-              <a:t>Answers: 1 causal word for an observational design - write 'was associated with lower pneumonia'. 2 p = 0.31 is no evidence of a difference - write 'no significant difference; the CI was wide'. 3 headline is a secondary outcome - lead with the primary result. 4 before-after change without a comparison - other things may have changed; write 'mortality was lower after implementation; without a control group we cannot attribute this to the protocol'.</a:t>
+              <a:t>Answers: 1 Causal word for an observational design: write 'was associated with lower pneumonia'. 2 p = 0.31 is no evidence of a difference: write 'no significant difference; the CI was wide'. 3 The headline is a secondary outcome: lead with the primary result. 4 Before-after change without a comparison, and other things may have changed: write 'mortality was lower after implementation; without a control group we cannot attribute this to the protocol'.</a:t>
             </a:r>
           </a:p>
           <a:p>
@@ -3215,19 +3215,19 @@
           <a:p>
             <a:r>
               <a:rPr lang="en-US" sz="1400" b="0" dirty="0"/>
-              <a:t>Individual work, silently for 8 minutes, then 4 minutes comparing with a neighbour. Beginners need the extra time - do not rush it.</a:t>
+              <a:t>Individual work, silently for 8 minutes, then 4 minutes comparing with a neighbour. Beginners need the extra time. Do not rush it.</a:t>
             </a:r>
           </a:p>
           <a:p>
             <a:r>
               <a:rPr lang="en-US" sz="1400" b="0" dirty="0"/>
-              <a:t>Participants read the real abstract from the handout (Course/Papers - annotated versions exist in English and Vietnamese, but use the clean abstract for this task).</a:t>
+              <a:t>Participants read the real abstract from the handout (Course/Papers has annotated versions in English and Vietnamese, but use the clean abstract for this task).</a:t>
             </a:r>
           </a:p>
           <a:p>
             <a:r>
               <a:rPr lang="en-US" sz="1400" b="0" dirty="0"/>
-              <a:t>Circulate. The hardest cells: the primary outcome (many write 'mortality' - it is cumulative fluid balance at day 5) and the main result (they should copy the difference with its 95% CI, -15.2 to 41.6, which crosses zero).</a:t>
+              <a:t>Circulate. The hardest cells: the primary outcome (many write 'mortality', but it is cumulative fluid balance at day 5) and the main result (they should copy the difference with its 95% CI, -15.2 to 41.6, which crosses zero).</a:t>
             </a:r>
           </a:p>
           <a:p>
@@ -3326,25 +3326,25 @@
           <a:p>
             <a:r>
               <a:rPr lang="en-US" sz="1400" b="0" dirty="0"/>
-              <a:t>Key points: (1) a PILOT trial with 48 analysed patients; (2) the primary outcome is cumulative fluid balance at day 5, not mortality; (3) the confidence interval for the difference (-15.2 to 41.6 ml/kg) includes zero, so no evidence of a difference; (4) the abstract conclusion matches the result - good practice; (5) the trial was registered.</a:t>
+              <a:t>Key points: (1) a PILOT trial with 48 analysed patients; (2) the primary outcome is cumulative fluid balance at day 5, not mortality; (3) the confidence interval for the difference (-15.2 to 41.6 ml/kg) includes zero, so no evidence of a difference; (4) the abstract conclusion matches the result (good practice); (5) the trial was registered.</a:t>
             </a:r>
           </a:p>
           <a:p>
             <a:r>
               <a:rPr lang="en-US" sz="1400" b="0" dirty="0"/>
-              <a:t>If a sharp participant asks: the medians (6.9 vs 35.0 ml/kg) differ by more than the reported difference of 13.2 because the difference is estimated differently from the medians - the course annotations flag this mismatch. Park it for Sessions 6-8.</a:t>
+              <a:t>If a sharp participant asks: the medians (6.9 vs 35.0 ml/kg) differ by more than the reported difference of 13.2 because the difference is estimated differently from the medians. The course annotations flag this mismatch. Park it for Sessions 6-8.</a:t>
             </a:r>
           </a:p>
           <a:p>
             <a:r>
               <a:rPr lang="en-US" sz="1400" b="0" dirty="0"/>
-              <a:t>Link to our question: this trial does NOT answer the 28-day mortality question - it answers a feasibility-type question about fluid balance. That is exactly the 'feasible rewrite' from the FINER slide.</a:t>
+              <a:t>Link to our question: this trial does NOT answer the 28-day mortality question. It answers a feasibility-type question about fluid balance. That is exactly the 'feasible rewrite' from the FINER slide.</a:t>
             </a:r>
           </a:p>
           <a:p>
             <a:r>
               <a:rPr lang="en-US" sz="1400" b="0" dirty="0"/>
-              <a:t>Timing: 5 minutes - go row by row. Segment 2.3 ends at 2:05.</a:t>
+              <a:t>Timing: 5 minutes, row by row. Segment 2.3 ends at 2:05.</a:t>
             </a:r>
           </a:p>
         </p:txBody>
@@ -3524,19 +3524,19 @@
           <a:p>
             <a:r>
               <a:rPr lang="en-US" sz="1400" b="0" dirty="0"/>
-              <a:t>Rows 1-3 show the course papers: Paper 1 (Boulet 2024, pilot RCT - fluid balance, no significant difference), Paper 2 (Hyun 2023, matched cohort - positive balance on days 2-3 associated with higher 28-day mortality), and CLASSIC (Meyhoff 2022 - no difference in 90-day mortality).</a:t>
+              <a:t>Rows 1-3 show the course papers: Paper 1 (Boulet 2024, pilot RCT: fluid balance, no significant difference), Paper 2 (Hyun 2023, matched cohort: positive balance on days 2-3 associated with higher 28-day mortality), and CLASSIC (Meyhoff 2022: no difference in 90-day mortality).</a:t>
             </a:r>
           </a:p>
           <a:p>
             <a:r>
               <a:rPr lang="en-US" sz="1400" b="0" dirty="0"/>
-              <a:t>Notice: the three papers measure different outcomes at different times - a matrix makes that visible at once.</a:t>
+              <a:t>Notice: the three papers measure different outcomes at different times. A matrix makes that visible at once.</a:t>
             </a:r>
           </a:p>
           <a:p>
             <a:r>
               <a:rPr lang="en-US" sz="1400" b="0" dirty="0"/>
-              <a:t>Teaching point: the 'key limitation' column is where the gap - and your study's justification - comes from.</a:t>
+              <a:t>Teaching point: the 'key limitation' column is where the gap, and your study's justification, comes from.</a:t>
             </a:r>
           </a:p>
           <a:p>
@@ -3623,7 +3623,7 @@
           <a:p>
             <a:r>
               <a:rPr lang="en-US" sz="1400" b="0" dirty="0"/>
-              <a:t>The papers you read become the Introduction of your proposal - the same funnel as the top of the IMRaD hourglass.</a:t>
+              <a:t>The papers you read become the Introduction of your proposal. It is the same funnel as the top of the IMRaD hourglass.</a:t>
             </a:r>
           </a:p>
           <a:p>
@@ -3635,7 +3635,7 @@
           <a:p>
             <a:r>
               <a:rPr lang="en-US" sz="1400" b="0" dirty="0"/>
-              <a:t>Paragraph 2, what is not known: the gap - conflicting studies, no studies in patients like ours, outcomes not measured. Your literature matrix's 'limitation' column feeds this paragraph.</a:t>
+              <a:t>Paragraph 2, what is not known: the gap (conflicting studies, no studies in patients like ours, outcomes not measured). Your literature matrix's 'limitation' column feeds this paragraph.</a:t>
             </a:r>
           </a:p>
           <a:p>
@@ -3740,7 +3740,7 @@
           <a:p>
             <a:r>
               <a:rPr lang="en-US" sz="1400" b="0" dirty="0"/>
-              <a:t>Paragraph 1 (known) cites Paper 2. Paragraph 2 (not known) cites CLASSIC, CLOVERS and Paper 1 and ends with the gap. Paragraph 3 (why here) uses LOCAL data - replace the audit statement with your own numbers - and ends with the question.</a:t>
+              <a:t>Paragraph 1 (known) cites Paper 2. Paragraph 2 (not known) cites CLASSIC, CLOVERS and Paper 1 and ends with the gap. Paragraph 3 (why here) uses LOCAL data (replace the audit statement with your own numbers) and ends with the question.</a:t>
             </a:r>
           </a:p>
           <a:p>
@@ -3845,7 +3845,7 @@
           <a:p>
             <a:r>
               <a:rPr lang="en-US" sz="1400" b="0" dirty="0"/>
-              <a:t>A good title names the population, the intervention and comparison (or exposure), and the design - about 10 to 16 words.</a:t>
+              <a:t>A good title names the population, the intervention and comparison (or exposure), and the design, in about 10 to 16 words.</a:t>
             </a:r>
           </a:p>
           <a:p>
@@ -3857,7 +3857,7 @@
           <a:p>
             <a:r>
               <a:rPr lang="en-US" sz="1400" b="0" dirty="0"/>
-              <a:t>Avoid abbreviations and promotional or causal words ('impact', 'novel', 'effect of') - especially for observational designs (compare Paper 2's title).</a:t>
+              <a:t>Avoid abbreviations and promotional or causal words ('impact', 'novel', 'effect of'), especially for observational designs (compare Paper 2's title).</a:t>
             </a:r>
           </a:p>
           <a:p>
@@ -3869,7 +3869,7 @@
           <a:p>
             <a:r>
               <a:rPr lang="en-US" sz="1400" b="0" dirty="0"/>
-              <a:t>Ask the room: 'Is Fluids in the ICU a good title?' Expected: no - no population, no comparison, no design.</a:t>
+              <a:t>Ask the room: 'Is Fluids in the ICU a good title?' Expected: no. It has no population, no comparison and no design.</a:t>
             </a:r>
           </a:p>
           <a:p>
@@ -4061,7 +4061,7 @@
           <a:p>
             <a:r>
               <a:rPr lang="en-US" sz="1400" b="0" dirty="0"/>
-              <a:t>Trainers circulate. First visit: is the string sensible (brackets, OR inside, AND between, no comparison block)? Too many hits - add a block or a filter; too few - add synonyms.</a:t>
+              <a:t>Trainers circulate. First visit: is the string sensible (brackets, OR inside, AND between, no comparison block)? Too many hits: add a block or a filter. Too few: add synonyms.</a:t>
             </a:r>
           </a:p>
           <a:p>
@@ -4184,7 +4184,7 @@
           <a:p>
             <a:r>
               <a:rPr lang="en-US" sz="1400" b="0" dirty="0"/>
-              <a:t>Ask the room: 'What do you usually do when you need evidence quickly?' Honest answers: Google, a colleague, UpToDate, a guideline. All fine for care - but a proposal needs a documented search.</a:t>
+              <a:t>Ask the room: 'What do you usually do when you need evidence quickly?' Honest answers: Google, a colleague, UpToDate, a guideline. All fine for care, but a proposal needs a documented search.</a:t>
             </a:r>
           </a:p>
           <a:p>
@@ -4370,7 +4370,7 @@
           <a:p>
             <a:r>
               <a:rPr lang="en-US" sz="1400" b="0" dirty="0"/>
-              <a:t>Link forward: over the next two Saturdays (Sessions 3 and 4) we choose the right DESIGN to answer each group's question - and meet bias, confounding and measures of effect using the two fluid papers.</a:t>
+              <a:t>Link forward: over the next two Saturdays (Sessions 3 and 4) we choose the right DESIGN to answer each group's question, and meet bias, confounding and measures of effect using the two fluid papers.</a:t>
             </a:r>
           </a:p>
           <a:p>
@@ -4457,7 +4457,7 @@
           <a:p>
             <a:r>
               <a:rPr lang="en-US" sz="1400" b="0" dirty="0"/>
-              <a:t>Answers: question 1 - OR (either term). Question 2 - cumulative fluid balance at day 5 (ml/kg), not mortality.</a:t>
+              <a:t>Answers: (1) OR (either term). (2) Cumulative fluid balance at day 5 (ml/kg), not mortality.</a:t>
             </a:r>
           </a:p>
           <a:p>
@@ -4754,7 +4754,7 @@
           <a:p>
             <a:r>
               <a:rPr lang="en-US" sz="1400" b="0" dirty="0"/>
-              <a:t>Cochrane Library: start here for treatment questions - a good systematic review may already answer yours.</a:t>
+              <a:t>Cochrane Library: start here for treatment questions. A good systematic review may already answer yours.</a:t>
             </a:r>
           </a:p>
           <a:p>
@@ -4871,7 +4871,7 @@
           <a:p>
             <a:r>
               <a:rPr lang="en-US" sz="1400" b="0" dirty="0"/>
-              <a:t>The interface changes from time to time - check it before showing it live.</a:t>
+              <a:t>The interface changes from time to time. Check it before showing it live.</a:t>
             </a:r>
           </a:p>
           <a:p>
@@ -5162,7 +5162,7 @@
           <a:p>
             <a:r>
               <a:rPr lang="en-US" sz="1400" b="0" dirty="0"/>
-              <a:t>Copyright slide - leave on screen while participants leave.</a:t>
+              <a:t>Copyright slide. Leave on screen while participants leave.</a:t>
             </a:r>
           </a:p>
         </p:txBody>
@@ -5249,7 +5249,7 @@
           <a:p>
             <a:r>
               <a:rPr lang="en-US" sz="1400" b="0" dirty="0"/>
-              <a:t>The numbers are orders of magnitude only - they change every day.</a:t>
+              <a:t>The numbers are orders of magnitude only. They change every day.</a:t>
             </a:r>
           </a:p>
           <a:p>
@@ -5261,7 +5261,7 @@
           <a:p>
             <a:r>
               <a:rPr lang="en-US" sz="1400" b="0" dirty="0"/>
-              <a:t>Ask the room: 'Why write down the date and the search string?' Expected: so it can be repeated - journals and reviewers ask for it.</a:t>
+              <a:t>Ask the room: 'Why write down the date and the search string?' Expected: so it can be repeated. Journals and reviewers ask for it.</a:t>
             </a:r>
           </a:p>
           <a:p>
@@ -5360,7 +5360,7 @@
           <a:p>
             <a:r>
               <a:rPr lang="en-US" sz="1400" b="0" dirty="0"/>
-              <a:t>The comparison (usual care) is normally left out - the words vary too much.</a:t>
+              <a:t>The comparison (usual care) is normally left out because the words vary too much.</a:t>
             </a:r>
           </a:p>
           <a:p>
@@ -5471,13 +5471,13 @@
           <a:p>
             <a:r>
               <a:rPr lang="en-US" sz="1400" b="0" dirty="0"/>
-              <a:t>Here P and O share the same idea - pressure injury - so one block carries both. The second block is the intervention.</a:t>
+              <a:t>Here P and O share the same idea (pressure injury), so one block carries both. The second block is the intervention.</a:t>
             </a:r>
           </a:p>
           <a:p>
             <a:r>
               <a:rPr lang="en-US" sz="1400" b="0" dirty="0"/>
-              <a:t>MeSH: authors write pressure ulcer, pressure injury, bedsore, decubitus - the MeSH heading 'Pressure Ulcer' collects them.</a:t>
+              <a:t>MeSH: authors write pressure ulcer, pressure injury, bedsore, decubitus. The MeSH heading 'Pressure Ulcer' collects them.</a:t>
             </a:r>
           </a:p>
           <a:p>
@@ -5570,13 +5570,13 @@
           <a:p>
             <a:r>
               <a:rPr lang="en-US" sz="1400" b="0" dirty="0"/>
-              <a:t>AND: only papers with both concepts - fewer hits. OR: either word - more hits; use for synonyms.</a:t>
+              <a:t>AND: only papers with both concepts, so fewer hits. OR: either word, so more hits. Use OR for synonyms.</a:t>
             </a:r>
           </a:p>
           <a:p>
             <a:r>
               <a:rPr lang="en-US" sz="1400" b="0" dirty="0"/>
-              <a:t>NOT removes every paper that mentions the second term - even good papers that mention neonates once. That is why NOT is risky.</a:t>
+              <a:t>NOT removes every paper that mentions the second term, even good papers that mention neonates once. That is why NOT is risky.</a:t>
             </a:r>
           </a:p>
           <a:p>
@@ -5588,7 +5588,7 @@
           <a:p>
             <a:r>
               <a:rPr lang="en-US" sz="1400" b="0" dirty="0"/>
-              <a:t>Ask the room: 'septic shock AND fluids vs septic shock OR fluids - which gives more hits?' Expected: OR.</a:t>
+              <a:t>Ask the room: 'septic shock AND fluids vs septic shock OR fluids: which gives more hits?' Expected: OR.</a:t>
             </a:r>
           </a:p>
           <a:p>
@@ -5675,7 +5675,7 @@
           <a:p>
             <a:r>
               <a:rPr lang="en-US" sz="1400" b="0" dirty="0"/>
-              <a:t>Answers: 1 AND. 2 OR. 3 Fewer (AND narrows). 4 It removes every paper that mentions children anywhere - including good adult studies that mention children once.</a:t>
+              <a:t>Answers: 1 AND. 2 OR. 3 Fewer (AND narrows). 4 It removes every paper that mentions children anywhere, including good adult studies that mention children once.</a:t>
             </a:r>
           </a:p>
           <a:p>
@@ -8931,7 +8931,7 @@
                 <a:latin typeface="Century Gothic"/>
                 <a:cs typeface="Century Gothic"/>
               </a:rPr>
-              <a:t>2.3  Reading a paper in 15 minutes - and 2.4 from literature to introduction</a:t>
+              <a:t>2.3  Reading a paper in 15 minutes and 2.4 from literature to introduction</a:t>
             </a:r>
           </a:p>
           <a:p>
@@ -10581,7 +10581,7 @@
                 <a:latin typeface="Century Gothic"/>
                 <a:cs typeface="Century Gothic"/>
               </a:rPr>
-              <a:t>Search one keyword: septic shock - note the number of hits</a:t>
+              <a:t>Search one keyword, septic shock, and note the number of hits</a:t>
             </a:r>
           </a:p>
           <a:p>
@@ -10736,7 +10736,7 @@
                 <a:latin typeface="Century Gothic"/>
                 <a:cs typeface="Century Gothic"/>
               </a:rPr>
-              <a:t>Send to - Citation manager (we import it in 2.2)</a:t>
+              <a:t>Send to: Citation manager (we import it in 2.2)</a:t>
             </a:r>
           </a:p>
         </p:txBody>
@@ -11379,7 +11379,7 @@
                 <a:latin typeface="Century Gothic"/>
                 <a:cs typeface="Century Gothic"/>
               </a:rPr>
-              <a:t>One search string on paper - your group runs it in Proposal builder 2</a:t>
+              <a:t>One search string on paper, for your group to run in Proposal builder 2</a:t>
             </a:r>
           </a:p>
         </p:txBody>
@@ -11617,7 +11617,7 @@
                 <a:latin typeface="Century Gothic"/>
                 <a:cs typeface="Century Gothic"/>
               </a:rPr>
-              <a:t>Keep every reference you find - and use other people's work honestly.</a:t>
+              <a:t>Keep every reference you find, and use other people's work honestly.</a:t>
             </a:r>
           </a:p>
           <a:p>
@@ -12891,7 +12891,7 @@
                 <a:latin typeface="Century Gothic"/>
                 <a:cs typeface="Century Gothic"/>
               </a:rPr>
-              <a:t>Look: authors, title, journal, year, DOI - nothing typed by hand</a:t>
+              <a:t>Look: authors, title, journal, year, DOI, with nothing typed by hand</a:t>
             </a:r>
           </a:p>
           <a:p>
@@ -12922,7 +12922,7 @@
                 <a:latin typeface="Century Gothic"/>
                 <a:cs typeface="Century Gothic"/>
               </a:rPr>
-              <a:t>In Word: Zotero tab - Add/Edit Citation - type 'Meyhoff'</a:t>
+              <a:t>In Word: Zotero tab, Add/Edit Citation, type 'Meyhoff'</a:t>
             </a:r>
           </a:p>
           <a:p>
@@ -12953,7 +12953,7 @@
                 <a:latin typeface="Century Gothic"/>
                 <a:cs typeface="Century Gothic"/>
               </a:rPr>
-              <a:t>Add/Edit Bibliography - the reference list appears</a:t>
+              <a:t>Add/Edit Bibliography: the reference list appears</a:t>
             </a:r>
           </a:p>
           <a:p>
@@ -13130,7 +13130,7 @@
                 <a:latin typeface="Century Gothic"/>
                 <a:cs typeface="Century Gothic"/>
               </a:rPr>
-              <a:t>Everyone has seen the full collect - cite - list cycle</a:t>
+              <a:t>Everyone has seen the full collect → cite → list cycle</a:t>
             </a:r>
           </a:p>
         </p:txBody>
@@ -13680,7 +13680,7 @@
                 <a:latin typeface="Century Gothic"/>
                 <a:cs typeface="Century Gothic"/>
               </a:rPr>
-              <a:t>Change the structure, not just the words - and always cite the source.</a:t>
+              <a:t>Change the structure as well as the words, and always cite the source.</a:t>
             </a:r>
           </a:p>
         </p:txBody>
@@ -14155,7 +14155,7 @@
                 <a:latin typeface="Century Gothic"/>
                 <a:cs typeface="Century Gothic"/>
               </a:rPr>
-              <a:t>Answers on paper - check with the next slide</a:t>
+              <a:t>Answers on paper, checked against the next slide</a:t>
             </a:r>
           </a:p>
         </p:txBody>
@@ -16224,7 +16224,7 @@
                 <a:latin typeface="Century Gothic"/>
                 <a:cs typeface="Century Gothic"/>
               </a:rPr>
-              <a:t>You do not have to read every word - you have to read the right words in the right order.</a:t>
+              <a:t>You do not have to read every word. Read the right words in the right order.</a:t>
             </a:r>
           </a:p>
           <a:p>
@@ -16242,7 +16242,7 @@
                 <a:latin typeface="Century Gothic"/>
                 <a:cs typeface="Century Gothic"/>
               </a:rPr>
-              <a:t>40 minutes: anatomy of a paper, reading order, the abstract, spin - and a reading task on Paper 1</a:t>
+              <a:t>40 minutes: anatomy of a paper, reading order, the abstract, spin, and a reading task on Paper 1</a:t>
             </a:r>
           </a:p>
         </p:txBody>
@@ -16792,7 +16792,7 @@
                 <a:latin typeface="Century Gothic"/>
                 <a:cs typeface="Century Gothic"/>
               </a:rPr>
-              <a:t>Title, abstract, figures and tables, methods - stop early if it is not relevant.</a:t>
+              <a:t>Title, abstract, figures and tables, methods. Stop early if it is not relevant.</a:t>
             </a:r>
           </a:p>
         </p:txBody>
@@ -19829,7 +19829,7 @@
                 <a:latin typeface="Century Gothic"/>
                 <a:cs typeface="Century Gothic"/>
               </a:rPr>
-              <a:t>Primary outcome: fluid balance, not mortality - read what the study actually measured.</a:t>
+              <a:t>Primary outcome: fluid balance, not mortality. Read what the study actually measured.</a:t>
             </a:r>
           </a:p>
         </p:txBody>
@@ -20635,7 +20635,7 @@
                 <a:latin typeface="Century Gothic"/>
                 <a:cs typeface="Century Gothic"/>
               </a:rPr>
-              <a:t>Known, not known, why here - and the question follows naturally.</a:t>
+              <a:t>Known, not known, why here: the question then follows naturally.</a:t>
             </a:r>
           </a:p>
         </p:txBody>
@@ -20910,7 +20910,7 @@
                 <a:latin typeface="Century Gothic"/>
                 <a:cs typeface="Century Gothic"/>
               </a:rPr>
-              <a:t>Three short paragraphs, each with its job - and references in brackets.</a:t>
+              <a:t>Three short paragraphs, each with its own job, and references in brackets.</a:t>
             </a:r>
           </a:p>
         </p:txBody>
@@ -21441,7 +21441,7 @@
                 <a:latin typeface="Century Gothic"/>
                 <a:cs typeface="Century Gothic"/>
               </a:rPr>
-              <a:t>35 minutes of group work - completing Part 1 of your research proposal</a:t>
+              <a:t>35 minutes of group work to complete Part 1 of your research proposal</a:t>
             </a:r>
           </a:p>
         </p:txBody>
@@ -21828,7 +21828,7 @@
                 <a:latin typeface="Century Gothic"/>
                 <a:cs typeface="Century Gothic"/>
               </a:rPr>
-              <a:t>Draft the problem statement: known - not known - why here</a:t>
+              <a:t>Draft the problem statement: known, not known, why here</a:t>
             </a:r>
           </a:p>
           <a:p>
@@ -22374,7 +22374,7 @@
                 <a:latin typeface="Century Gothic"/>
                 <a:cs typeface="Century Gothic"/>
               </a:rPr>
-              <a:t>40 minutes: the search funnel, PICO to search blocks, Boolean, MeSH, search tools - and a live PubMed demo</a:t>
+              <a:t>40 minutes: the search funnel, PICO to search blocks, Boolean, MeSH, search tools and a live PubMed demo</a:t>
             </a:r>
           </a:p>
         </p:txBody>
@@ -22728,7 +22728,7 @@
                           </a:solidFill>
                           <a:latin typeface="Century Gothic"/>
                         </a:rPr>
-                        <a:t>Narrows / widens / removes - OR inside a block, AND between blocks</a:t>
+                        <a:t>Narrows / widens / removes. OR inside a block, AND between blocks</a:t>
                       </a:r>
                     </a:p>
                   </a:txBody>
@@ -22824,7 +22824,7 @@
                           </a:solidFill>
                           <a:latin typeface="Century Gothic"/>
                         </a:rPr>
-                        <a:t>Copying with a few words swapped - plagiarism even if cited</a:t>
+                        <a:t>Copying with a few words swapped: plagiarism even if cited</a:t>
                       </a:r>
                     </a:p>
                   </a:txBody>
@@ -24731,7 +24731,7 @@
                 <a:latin typeface="Century Gothic"/>
                 <a:cs typeface="Century Gothic"/>
               </a:rPr>
-              <a:t>Extra slides — Session 2</a:t>
+              <a:t>Extra slides: Session 2</a:t>
             </a:r>
           </a:p>
           <a:p>
@@ -26331,7 +26331,7 @@
                 <a:latin typeface="Century Gothic"/>
                 <a:cs typeface="Century Gothic"/>
               </a:rPr>
-              <a:t>A quick shortcut for 'is there good evidence?' - not a replacement for your own search.</a:t>
+              <a:t>A quick shortcut for 'is there good evidence?', not a replacement for your own search.</a:t>
             </a:r>
           </a:p>
         </p:txBody>
@@ -26656,7 +26656,7 @@
                 <a:latin typeface="Century Gothic"/>
                 <a:cs typeface="Century Gothic"/>
               </a:rPr>
-              <a:t>Look: journals, theses, preprints - ranked by a hidden algorithm</a:t>
+              <a:t>Look: journals, theses, preprints, ranked by a hidden algorithm</a:t>
             </a:r>
           </a:p>
           <a:p>
@@ -26687,7 +26687,7 @@
                 <a:latin typeface="Century Gothic"/>
                 <a:cs typeface="Century Gothic"/>
               </a:rPr>
-              <a:t>Under a key trial, click 'Cited by' - search within citing articles</a:t>
+              <a:t>Under a key trial, click 'Cited by', then search within citing articles</a:t>
             </a:r>
           </a:p>
           <a:p>
@@ -26775,7 +26775,7 @@
                 <a:latin typeface="Century Gothic"/>
                 <a:cs typeface="Century Gothic"/>
               </a:rPr>
-              <a:t>Participants see what Scholar adds - and what it lacks</a:t>
+              <a:t>Participants see what Scholar adds and what it lacks</a:t>
             </a:r>
           </a:p>
         </p:txBody>
@@ -28938,7 +28938,7 @@
                 <a:latin typeface="Century Gothic"/>
                 <a:cs typeface="Century Gothic"/>
               </a:rPr>
-              <a:t>AND narrows, OR widens, NOT removes - use NOT sparingly.</a:t>
+              <a:t>AND narrows, OR widens, NOT removes. Use NOT sparingly.</a:t>
             </a:r>
           </a:p>
         </p:txBody>

--- a/en/files/slides/Session_2_EN.pptx
+++ b/en/files/slides/Session_2_EN.pptx
@@ -3332,7 +3332,7 @@
           <a:p>
             <a:r>
               <a:rPr lang="en-US" sz="1400" b="0" dirty="0"/>
-              <a:t>If a sharp participant asks: the medians (6.9 vs 35.0 ml/kg) differ by more than the reported difference of 13.2 because the difference is estimated differently from the medians. The course annotations flag this mismatch. Park it for Sessions 6-8.</a:t>
+              <a:t>If a sharp participant asks: the medians (6.9 vs 35.0 ml/kg) differ by more than the reported difference of 13.2 because the 13.2 is a difference in means (the Methods report the mean difference with its 95% CI), not a difference in medians. The course annotations flag this mismatch. Park it for Sessions 6-8.</a:t>
             </a:r>
           </a:p>
           <a:p>
@@ -8759,8 +8759,8 @@
                 <a:solidFill>
                   <a:srgbClr val="0D7377"/>
                 </a:solidFill>
-                <a:latin typeface="Century Gothic"/>
-                <a:cs typeface="Century Gothic"/>
+                <a:latin typeface="Arial"/>
+                <a:cs typeface="Arial"/>
               </a:rPr>
               <a:t>Session 2 · Find &amp; read: the evidence</a:t>
             </a:r>
@@ -8827,8 +8827,8 @@
                 <a:solidFill>
                   <a:srgbClr val="0070C0"/>
                 </a:solidFill>
-                <a:latin typeface="Century Gothic"/>
-                <a:cs typeface="Century Gothic"/>
+                <a:latin typeface="Arial"/>
+                <a:cs typeface="Arial"/>
               </a:rPr>
               <a:t>Week 2 · Saturday</a:t>
             </a:r>
@@ -8852,8 +8852,8 @@
                 <a:solidFill>
                   <a:srgbClr val="000000"/>
                 </a:solidFill>
-                <a:latin typeface="Century Gothic"/>
-                <a:cs typeface="Century Gothic"/>
+                <a:latin typeface="Arial"/>
+                <a:cs typeface="Arial"/>
               </a:rPr>
               <a:t>Recap quiz on Session 1</a:t>
             </a:r>
@@ -8871,8 +8871,8 @@
                 <a:solidFill>
                   <a:srgbClr val="000000"/>
                 </a:solidFill>
-                <a:latin typeface="Century Gothic"/>
-                <a:cs typeface="Century Gothic"/>
+                <a:latin typeface="Arial"/>
+                <a:cs typeface="Arial"/>
               </a:rPr>
               <a:t>2.1  Finding the evidence: PICO to search, Boolean, MeSH, live PubMed demo</a:t>
             </a:r>
@@ -8890,8 +8890,8 @@
                 <a:solidFill>
                   <a:srgbClr val="000000"/>
                 </a:solidFill>
-                <a:latin typeface="Century Gothic"/>
-                <a:cs typeface="Century Gothic"/>
+                <a:latin typeface="Arial"/>
+                <a:cs typeface="Arial"/>
               </a:rPr>
               <a:t>2.2  Managing and citing: Zotero demo, citation styles, paraphrasing, grey literature</a:t>
             </a:r>
@@ -8909,8 +8909,8 @@
                 <a:solidFill>
                   <a:srgbClr val="000000"/>
                 </a:solidFill>
-                <a:latin typeface="Century Gothic"/>
-                <a:cs typeface="Century Gothic"/>
+                <a:latin typeface="Arial"/>
+                <a:cs typeface="Arial"/>
               </a:rPr>
               <a:t>Break</a:t>
             </a:r>
@@ -8928,8 +8928,8 @@
                 <a:solidFill>
                   <a:srgbClr val="000000"/>
                 </a:solidFill>
-                <a:latin typeface="Century Gothic"/>
-                <a:cs typeface="Century Gothic"/>
+                <a:latin typeface="Arial"/>
+                <a:cs typeface="Arial"/>
               </a:rPr>
               <a:t>2.3  Reading a paper in 15 minutes and 2.4 from literature to introduction</a:t>
             </a:r>
@@ -8947,8 +8947,8 @@
                 <a:solidFill>
                   <a:srgbClr val="000000"/>
                 </a:solidFill>
-                <a:latin typeface="Century Gothic"/>
-                <a:cs typeface="Century Gothic"/>
+                <a:latin typeface="Arial"/>
+                <a:cs typeface="Arial"/>
               </a:rPr>
               <a:t>Proposal builder 2: search string, 5 references, problem statement, working title</a:t>
             </a:r>
@@ -8985,7 +8985,7 @@
                     <a:lumMod val="50000"/>
                   </a:schemeClr>
                 </a:solidFill>
-                <a:latin typeface="Verdana"/>
+                <a:latin typeface="Arial"/>
               </a:rPr>
               <a:t>Neudata | #ClearDataClearImpact</a:t>
             </a:r>
@@ -9115,8 +9115,8 @@
                 <a:solidFill>
                   <a:srgbClr val="0D7377"/>
                 </a:solidFill>
-                <a:latin typeface="Century Gothic"/>
-                <a:cs typeface="Century Gothic"/>
+                <a:latin typeface="Arial"/>
+                <a:cs typeface="Arial"/>
               </a:rPr>
               <a:t>MeSH: the shared label behind many words</a:t>
             </a:r>
@@ -9212,8 +9212,8 @@
                 <a:solidFill>
                   <a:srgbClr val="FFFFFF"/>
                 </a:solidFill>
-                <a:latin typeface="Century Gothic"/>
-                <a:cs typeface="Century Gothic"/>
+                <a:latin typeface="Arial"/>
+                <a:cs typeface="Arial"/>
               </a:rPr>
               <a:t>KEY MESSAGE   </a:t>
             </a:r>
@@ -9222,8 +9222,8 @@
                 <a:solidFill>
                   <a:srgbClr val="FFFFFF"/>
                 </a:solidFill>
-                <a:latin typeface="Century Gothic"/>
-                <a:cs typeface="Century Gothic"/>
+                <a:latin typeface="Arial"/>
+                <a:cs typeface="Arial"/>
               </a:rPr>
               <a:t>Search the MeSH term AND the free-text words, joined with OR.</a:t>
             </a:r>
@@ -9260,7 +9260,7 @@
                     <a:lumMod val="50000"/>
                   </a:schemeClr>
                 </a:solidFill>
-                <a:latin typeface="Verdana"/>
+                <a:latin typeface="Arial"/>
               </a:rPr>
               <a:t>Neudata | #ClearDataClearImpact</a:t>
             </a:r>
@@ -9390,8 +9390,8 @@
                 <a:solidFill>
                   <a:srgbClr val="0D7377"/>
                 </a:solidFill>
-                <a:latin typeface="Century Gothic"/>
-                <a:cs typeface="Century Gothic"/>
+                <a:latin typeface="Arial"/>
+                <a:cs typeface="Arial"/>
               </a:rPr>
               <a:t>Four tools that sharpen a search</a:t>
             </a:r>
@@ -9461,8 +9461,8 @@
                 <a:solidFill>
                   <a:srgbClr val="FFFFFF"/>
                 </a:solidFill>
-                <a:latin typeface="Century Gothic"/>
-                <a:cs typeface="Century Gothic"/>
+                <a:latin typeface="Arial"/>
+                <a:cs typeface="Arial"/>
               </a:rPr>
               <a:t>"Quotes"</a:t>
             </a:r>
@@ -9510,8 +9510,8 @@
                 <a:solidFill>
                   <a:srgbClr val="000000"/>
                 </a:solidFill>
-                <a:latin typeface="Century Gothic"/>
-                <a:cs typeface="Century Gothic"/>
+                <a:latin typeface="Arial"/>
+                <a:cs typeface="Arial"/>
               </a:rPr>
               <a:t>"septic shock"</a:t>
             </a:r>
@@ -9531,8 +9531,8 @@
                 <a:solidFill>
                   <a:srgbClr val="000000"/>
                 </a:solidFill>
-                <a:latin typeface="Century Gothic"/>
-                <a:cs typeface="Century Gothic"/>
+                <a:latin typeface="Arial"/>
+                <a:cs typeface="Arial"/>
               </a:rPr>
               <a:t>= exact phrase</a:t>
             </a:r>
@@ -9552,8 +9552,8 @@
                 <a:solidFill>
                   <a:srgbClr val="000000"/>
                 </a:solidFill>
-                <a:latin typeface="Century Gothic"/>
-                <a:cs typeface="Century Gothic"/>
+                <a:latin typeface="Arial"/>
+                <a:cs typeface="Arial"/>
               </a:rPr>
               <a:t>not two loose words</a:t>
             </a:r>
@@ -9595,8 +9595,8 @@
                 <a:solidFill>
                   <a:srgbClr val="FFFFFF"/>
                 </a:solidFill>
-                <a:latin typeface="Century Gothic"/>
-                <a:cs typeface="Century Gothic"/>
+                <a:latin typeface="Arial"/>
+                <a:cs typeface="Arial"/>
               </a:rPr>
               <a:t>Truncation *</a:t>
             </a:r>
@@ -9644,8 +9644,8 @@
                 <a:solidFill>
                   <a:srgbClr val="000000"/>
                 </a:solidFill>
-                <a:latin typeface="Century Gothic"/>
-                <a:cs typeface="Century Gothic"/>
+                <a:latin typeface="Arial"/>
+                <a:cs typeface="Arial"/>
               </a:rPr>
               <a:t>restrict*</a:t>
             </a:r>
@@ -9665,8 +9665,8 @@
                 <a:solidFill>
                   <a:srgbClr val="000000"/>
                 </a:solidFill>
-                <a:latin typeface="Century Gothic"/>
-                <a:cs typeface="Century Gothic"/>
+                <a:latin typeface="Arial"/>
+                <a:cs typeface="Arial"/>
               </a:rPr>
               <a:t>= restrict, restricted,</a:t>
             </a:r>
@@ -9686,8 +9686,8 @@
                 <a:solidFill>
                   <a:srgbClr val="000000"/>
                 </a:solidFill>
-                <a:latin typeface="Century Gothic"/>
-                <a:cs typeface="Century Gothic"/>
+                <a:latin typeface="Arial"/>
+                <a:cs typeface="Arial"/>
               </a:rPr>
               <a:t>restriction, restrictive</a:t>
             </a:r>
@@ -9729,8 +9729,8 @@
                 <a:solidFill>
                   <a:srgbClr val="FFFFFF"/>
                 </a:solidFill>
-                <a:latin typeface="Century Gothic"/>
-                <a:cs typeface="Century Gothic"/>
+                <a:latin typeface="Arial"/>
+                <a:cs typeface="Arial"/>
               </a:rPr>
               <a:t>Field tags</a:t>
             </a:r>
@@ -9778,8 +9778,8 @@
                 <a:solidFill>
                   <a:srgbClr val="000000"/>
                 </a:solidFill>
-                <a:latin typeface="Century Gothic"/>
-                <a:cs typeface="Century Gothic"/>
+                <a:latin typeface="Arial"/>
+                <a:cs typeface="Arial"/>
               </a:rPr>
               <a:t>[tiab] title/abstract</a:t>
             </a:r>
@@ -9799,8 +9799,8 @@
                 <a:solidFill>
                   <a:srgbClr val="000000"/>
                 </a:solidFill>
-                <a:latin typeface="Century Gothic"/>
-                <a:cs typeface="Century Gothic"/>
+                <a:latin typeface="Arial"/>
+                <a:cs typeface="Arial"/>
               </a:rPr>
               <a:t>[mh] MeSH term</a:t>
             </a:r>
@@ -9820,8 +9820,8 @@
                 <a:solidFill>
                   <a:srgbClr val="000000"/>
                 </a:solidFill>
-                <a:latin typeface="Century Gothic"/>
-                <a:cs typeface="Century Gothic"/>
+                <a:latin typeface="Arial"/>
+                <a:cs typeface="Arial"/>
               </a:rPr>
               <a:t>[pt] article type</a:t>
             </a:r>
@@ -9863,8 +9863,8 @@
                 <a:solidFill>
                   <a:srgbClr val="FFFFFF"/>
                 </a:solidFill>
-                <a:latin typeface="Century Gothic"/>
-                <a:cs typeface="Century Gothic"/>
+                <a:latin typeface="Arial"/>
+                <a:cs typeface="Arial"/>
               </a:rPr>
               <a:t>Filters</a:t>
             </a:r>
@@ -9912,8 +9912,8 @@
                 <a:solidFill>
                   <a:srgbClr val="000000"/>
                 </a:solidFill>
-                <a:latin typeface="Century Gothic"/>
-                <a:cs typeface="Century Gothic"/>
+                <a:latin typeface="Arial"/>
+                <a:cs typeface="Arial"/>
               </a:rPr>
               <a:t>Article type (RCT,</a:t>
             </a:r>
@@ -9933,8 +9933,8 @@
                 <a:solidFill>
                   <a:srgbClr val="000000"/>
                 </a:solidFill>
-                <a:latin typeface="Century Gothic"/>
-                <a:cs typeface="Century Gothic"/>
+                <a:latin typeface="Arial"/>
+                <a:cs typeface="Arial"/>
               </a:rPr>
               <a:t>systematic review)</a:t>
             </a:r>
@@ -9954,8 +9954,8 @@
                 <a:solidFill>
                   <a:srgbClr val="000000"/>
                 </a:solidFill>
-                <a:latin typeface="Century Gothic"/>
-                <a:cs typeface="Century Gothic"/>
+                <a:latin typeface="Arial"/>
+                <a:cs typeface="Arial"/>
               </a:rPr>
               <a:t>Date, age, humans</a:t>
             </a:r>
@@ -9999,8 +9999,8 @@
                 <a:solidFill>
                   <a:srgbClr val="FFFFFF"/>
                 </a:solidFill>
-                <a:latin typeface="Century Gothic"/>
-                <a:cs typeface="Century Gothic"/>
+                <a:latin typeface="Arial"/>
+                <a:cs typeface="Arial"/>
               </a:rPr>
               <a:t>KEY MESSAGE   </a:t>
             </a:r>
@@ -10009,8 +10009,8 @@
                 <a:solidFill>
                   <a:srgbClr val="FFFFFF"/>
                 </a:solidFill>
-                <a:latin typeface="Century Gothic"/>
-                <a:cs typeface="Century Gothic"/>
+                <a:latin typeface="Arial"/>
+                <a:cs typeface="Arial"/>
               </a:rPr>
               <a:t>Check 'Search details' to see exactly what PubMed searched.</a:t>
             </a:r>
@@ -10047,7 +10047,7 @@
                     <a:lumMod val="50000"/>
                   </a:schemeClr>
                 </a:solidFill>
-                <a:latin typeface="Verdana"/>
+                <a:latin typeface="Arial"/>
               </a:rPr>
               <a:t>Neudata | #ClearDataClearImpact</a:t>
             </a:r>
@@ -10177,8 +10177,8 @@
                 <a:solidFill>
                   <a:srgbClr val="0D7377"/>
                 </a:solidFill>
-                <a:latin typeface="Century Gothic"/>
-                <a:cs typeface="Century Gothic"/>
+                <a:latin typeface="Arial"/>
+                <a:cs typeface="Arial"/>
               </a:rPr>
               <a:t>PubMed vs Google Scholar</a:t>
             </a:r>
@@ -10274,8 +10274,8 @@
                 <a:solidFill>
                   <a:srgbClr val="FFFFFF"/>
                 </a:solidFill>
-                <a:latin typeface="Century Gothic"/>
-                <a:cs typeface="Century Gothic"/>
+                <a:latin typeface="Arial"/>
+                <a:cs typeface="Arial"/>
               </a:rPr>
               <a:t>KEY MESSAGE   </a:t>
             </a:r>
@@ -10284,8 +10284,8 @@
                 <a:solidFill>
                   <a:srgbClr val="FFFFFF"/>
                 </a:solidFill>
-                <a:latin typeface="Century Gothic"/>
-                <a:cs typeface="Century Gothic"/>
+                <a:latin typeface="Arial"/>
+                <a:cs typeface="Arial"/>
               </a:rPr>
               <a:t>PubMed for the main search; Google Scholar to check and to follow citations.</a:t>
             </a:r>
@@ -10322,7 +10322,7 @@
                     <a:lumMod val="50000"/>
                   </a:schemeClr>
                 </a:solidFill>
-                <a:latin typeface="Verdana"/>
+                <a:latin typeface="Arial"/>
               </a:rPr>
               <a:t>Neudata | #ClearDataClearImpact</a:t>
             </a:r>
@@ -10452,8 +10452,8 @@
                 <a:solidFill>
                   <a:srgbClr val="0D7377"/>
                 </a:solidFill>
-                <a:latin typeface="Century Gothic"/>
-                <a:cs typeface="Century Gothic"/>
+                <a:latin typeface="Arial"/>
+                <a:cs typeface="Arial"/>
               </a:rPr>
               <a:t>Live demo: searching PubMed for our question</a:t>
             </a:r>
@@ -10523,8 +10523,8 @@
                 <a:solidFill>
                   <a:srgbClr val="FFFFFF"/>
                 </a:solidFill>
-                <a:latin typeface="Century Gothic"/>
-                <a:cs typeface="Century Gothic"/>
+                <a:latin typeface="Arial"/>
+                <a:cs typeface="Arial"/>
               </a:rPr>
               <a:t>LIVE DEMO   |   10 min</a:t>
             </a:r>
@@ -10561,25 +10561,19 @@
               <a:spcBef>
                 <a:spcPts val="450"/>
               </a:spcBef>
-              <a:buNone/>
-            </a:pPr>
-            <a:r>
-              <a:rPr lang="en-US" sz="1650" b="1" dirty="0">
-                <a:solidFill>
-                  <a:srgbClr val="B5651D"/>
-                </a:solidFill>
-                <a:latin typeface="Century Gothic"/>
-                <a:cs typeface="Century Gothic"/>
-              </a:rPr>
-              <a:t>1.  </a:t>
-            </a:r>
+              <a:buClr>
+                <a:srgbClr val="B5651D"/>
+              </a:buClr>
+              <a:buFont typeface="Arial"/>
+              <a:buChar char="•"/>
+            </a:pPr>
             <a:r>
               <a:rPr lang="en-US" sz="1650" dirty="0">
                 <a:solidFill>
                   <a:srgbClr val="000000"/>
                 </a:solidFill>
-                <a:latin typeface="Century Gothic"/>
-                <a:cs typeface="Century Gothic"/>
+                <a:latin typeface="Arial"/>
+                <a:cs typeface="Arial"/>
               </a:rPr>
               <a:t>Search one keyword, septic shock, and note the number of hits</a:t>
             </a:r>
@@ -10592,25 +10586,19 @@
               <a:spcBef>
                 <a:spcPts val="450"/>
               </a:spcBef>
-              <a:buNone/>
-            </a:pPr>
-            <a:r>
-              <a:rPr lang="en-US" sz="1650" b="1" dirty="0">
-                <a:solidFill>
-                  <a:srgbClr val="B5651D"/>
-                </a:solidFill>
-                <a:latin typeface="Century Gothic"/>
-                <a:cs typeface="Century Gothic"/>
-              </a:rPr>
-              <a:t>2.  </a:t>
-            </a:r>
+              <a:buClr>
+                <a:srgbClr val="B5651D"/>
+              </a:buClr>
+              <a:buFont typeface="Arial"/>
+              <a:buChar char="•"/>
+            </a:pPr>
             <a:r>
               <a:rPr lang="en-US" sz="1650" dirty="0">
                 <a:solidFill>
                   <a:srgbClr val="000000"/>
                 </a:solidFill>
-                <a:latin typeface="Century Gothic"/>
-                <a:cs typeface="Century Gothic"/>
+                <a:latin typeface="Arial"/>
+                <a:cs typeface="Arial"/>
               </a:rPr>
               <a:t>Paste the full PICO string: P, I and O blocks joined with AND</a:t>
             </a:r>
@@ -10623,25 +10611,19 @@
               <a:spcBef>
                 <a:spcPts val="450"/>
               </a:spcBef>
-              <a:buNone/>
-            </a:pPr>
-            <a:r>
-              <a:rPr lang="en-US" sz="1650" b="1" dirty="0">
-                <a:solidFill>
-                  <a:srgbClr val="B5651D"/>
-                </a:solidFill>
-                <a:latin typeface="Century Gothic"/>
-                <a:cs typeface="Century Gothic"/>
-              </a:rPr>
-              <a:t>3.  </a:t>
-            </a:r>
+              <a:buClr>
+                <a:srgbClr val="B5651D"/>
+              </a:buClr>
+              <a:buFont typeface="Arial"/>
+              <a:buChar char="•"/>
+            </a:pPr>
             <a:r>
               <a:rPr lang="en-US" sz="1650" dirty="0">
                 <a:solidFill>
                   <a:srgbClr val="000000"/>
                 </a:solidFill>
-                <a:latin typeface="Century Gothic"/>
-                <a:cs typeface="Century Gothic"/>
+                <a:latin typeface="Arial"/>
+                <a:cs typeface="Arial"/>
               </a:rPr>
               <a:t>Look at 'Search details': what did PubMed really search?</a:t>
             </a:r>
@@ -10654,25 +10636,19 @@
               <a:spcBef>
                 <a:spcPts val="450"/>
               </a:spcBef>
-              <a:buNone/>
-            </a:pPr>
-            <a:r>
-              <a:rPr lang="en-US" sz="1650" b="1" dirty="0">
-                <a:solidFill>
-                  <a:srgbClr val="B5651D"/>
-                </a:solidFill>
-                <a:latin typeface="Century Gothic"/>
-                <a:cs typeface="Century Gothic"/>
-              </a:rPr>
-              <a:t>4.  </a:t>
-            </a:r>
+              <a:buClr>
+                <a:srgbClr val="B5651D"/>
+              </a:buClr>
+              <a:buFont typeface="Arial"/>
+              <a:buChar char="•"/>
+            </a:pPr>
             <a:r>
               <a:rPr lang="en-US" sz="1650" dirty="0">
                 <a:solidFill>
                   <a:srgbClr val="000000"/>
                 </a:solidFill>
-                <a:latin typeface="Century Gothic"/>
-                <a:cs typeface="Century Gothic"/>
+                <a:latin typeface="Arial"/>
+                <a:cs typeface="Arial"/>
               </a:rPr>
               <a:t>Add filters: RCT and systematic review, adults, last 10 years</a:t>
             </a:r>
@@ -10685,25 +10661,19 @@
               <a:spcBef>
                 <a:spcPts val="450"/>
               </a:spcBef>
-              <a:buNone/>
-            </a:pPr>
-            <a:r>
-              <a:rPr lang="en-US" sz="1650" b="1" dirty="0">
-                <a:solidFill>
-                  <a:srgbClr val="B5651D"/>
-                </a:solidFill>
-                <a:latin typeface="Century Gothic"/>
-                <a:cs typeface="Century Gothic"/>
-              </a:rPr>
-              <a:t>5.  </a:t>
-            </a:r>
+              <a:buClr>
+                <a:srgbClr val="B5651D"/>
+              </a:buClr>
+              <a:buFont typeface="Arial"/>
+              <a:buChar char="•"/>
+            </a:pPr>
             <a:r>
               <a:rPr lang="en-US" sz="1650" dirty="0">
                 <a:solidFill>
                   <a:srgbClr val="000000"/>
                 </a:solidFill>
-                <a:latin typeface="Century Gothic"/>
-                <a:cs typeface="Century Gothic"/>
+                <a:latin typeface="Arial"/>
+                <a:cs typeface="Arial"/>
               </a:rPr>
               <a:t>Open one result: abstract, MeSH terms, 'Similar articles', 'Cited by'</a:t>
             </a:r>
@@ -10716,25 +10686,19 @@
               <a:spcBef>
                 <a:spcPts val="450"/>
               </a:spcBef>
-              <a:buNone/>
-            </a:pPr>
-            <a:r>
-              <a:rPr lang="en-US" sz="1650" b="1" dirty="0">
-                <a:solidFill>
-                  <a:srgbClr val="B5651D"/>
-                </a:solidFill>
-                <a:latin typeface="Century Gothic"/>
-                <a:cs typeface="Century Gothic"/>
-              </a:rPr>
-              <a:t>6.  </a:t>
-            </a:r>
+              <a:buClr>
+                <a:srgbClr val="B5651D"/>
+              </a:buClr>
+              <a:buFont typeface="Arial"/>
+              <a:buChar char="•"/>
+            </a:pPr>
             <a:r>
               <a:rPr lang="en-US" sz="1650" dirty="0">
                 <a:solidFill>
                   <a:srgbClr val="000000"/>
                 </a:solidFill>
-                <a:latin typeface="Century Gothic"/>
-                <a:cs typeface="Century Gothic"/>
+                <a:latin typeface="Arial"/>
+                <a:cs typeface="Arial"/>
               </a:rPr>
               <a:t>Send to: Citation manager (we import it in 2.2)</a:t>
             </a:r>
@@ -10778,8 +10742,8 @@
                 <a:solidFill>
                   <a:srgbClr val="B5651D"/>
                 </a:solidFill>
-                <a:latin typeface="Century Gothic"/>
-                <a:cs typeface="Century Gothic"/>
+                <a:latin typeface="Arial"/>
+                <a:cs typeface="Arial"/>
               </a:rPr>
               <a:t>Watch for</a:t>
             </a:r>
@@ -10800,8 +10764,8 @@
                 <a:solidFill>
                   <a:srgbClr val="000000"/>
                 </a:solidFill>
-                <a:latin typeface="Century Gothic"/>
-                <a:cs typeface="Century Gothic"/>
+                <a:latin typeface="Arial"/>
+                <a:cs typeface="Arial"/>
               </a:rPr>
               <a:t>How the hits fall at each step</a:t>
             </a:r>
@@ -10822,8 +10786,8 @@
                 <a:solidFill>
                   <a:srgbClr val="000000"/>
                 </a:solidFill>
-                <a:latin typeface="Century Gothic"/>
-                <a:cs typeface="Century Gothic"/>
+                <a:latin typeface="Arial"/>
+                <a:cs typeface="Arial"/>
               </a:rPr>
               <a:t>Which papers keep appearing</a:t>
             </a:r>
@@ -10844,8 +10808,8 @@
                 <a:solidFill>
                   <a:srgbClr val="000000"/>
                 </a:solidFill>
-                <a:latin typeface="Century Gothic"/>
-                <a:cs typeface="Century Gothic"/>
+                <a:latin typeface="Arial"/>
+                <a:cs typeface="Arial"/>
               </a:rPr>
               <a:t>Can you find Paper 1 and CLASSIC?</a:t>
             </a:r>
@@ -10891,8 +10855,8 @@
                 <a:solidFill>
                   <a:srgbClr val="B5651D"/>
                 </a:solidFill>
-                <a:latin typeface="Century Gothic"/>
-                <a:cs typeface="Century Gothic"/>
+                <a:latin typeface="Arial"/>
+                <a:cs typeface="Arial"/>
               </a:rPr>
               <a:t>OUTPUT   </a:t>
             </a:r>
@@ -10901,8 +10865,8 @@
                 <a:solidFill>
                   <a:srgbClr val="000000"/>
                 </a:solidFill>
-                <a:latin typeface="Century Gothic"/>
-                <a:cs typeface="Century Gothic"/>
+                <a:latin typeface="Arial"/>
+                <a:cs typeface="Arial"/>
               </a:rPr>
               <a:t>A search string we can all copy (Exercise 1 on the sheet)</a:t>
             </a:r>
@@ -10939,7 +10903,7 @@
                     <a:lumMod val="50000"/>
                   </a:schemeClr>
                 </a:solidFill>
-                <a:latin typeface="Verdana"/>
+                <a:latin typeface="Arial"/>
               </a:rPr>
               <a:t>Neudata | #ClearDataClearImpact</a:t>
             </a:r>
@@ -11069,8 +11033,8 @@
                 <a:solidFill>
                   <a:srgbClr val="0D7377"/>
                 </a:solidFill>
-                <a:latin typeface="Century Gothic"/>
-                <a:cs typeface="Century Gothic"/>
+                <a:latin typeface="Arial"/>
+                <a:cs typeface="Arial"/>
               </a:rPr>
               <a:t>Your turn: build a Boolean search</a:t>
             </a:r>
@@ -11140,8 +11104,8 @@
                 <a:solidFill>
                   <a:srgbClr val="FFFFFF"/>
                 </a:solidFill>
-                <a:latin typeface="Century Gothic"/>
-                <a:cs typeface="Century Gothic"/>
+                <a:latin typeface="Arial"/>
+                <a:cs typeface="Arial"/>
               </a:rPr>
               <a:t>INDIVIDUAL TASK   |   5 min</a:t>
             </a:r>
@@ -11178,25 +11142,19 @@
               <a:spcBef>
                 <a:spcPts val="450"/>
               </a:spcBef>
-              <a:buNone/>
-            </a:pPr>
-            <a:r>
-              <a:rPr lang="en-US" sz="1650" b="1" dirty="0">
-                <a:solidFill>
-                  <a:srgbClr val="0B376C"/>
-                </a:solidFill>
-                <a:latin typeface="Century Gothic"/>
-                <a:cs typeface="Century Gothic"/>
-              </a:rPr>
-              <a:t>1.  </a:t>
-            </a:r>
+              <a:buClr>
+                <a:srgbClr val="0B376C"/>
+              </a:buClr>
+              <a:buFont typeface="Arial"/>
+              <a:buChar char="•"/>
+            </a:pPr>
             <a:r>
               <a:rPr lang="en-US" sz="1650" dirty="0">
                 <a:solidFill>
                   <a:srgbClr val="000000"/>
                 </a:solidFill>
-                <a:latin typeface="Century Gothic"/>
-                <a:cs typeface="Century Gothic"/>
+                <a:latin typeface="Arial"/>
+                <a:cs typeface="Arial"/>
               </a:rPr>
               <a:t>Take your group's PICO question and your synonym list</a:t>
             </a:r>
@@ -11209,25 +11167,19 @@
               <a:spcBef>
                 <a:spcPts val="450"/>
               </a:spcBef>
-              <a:buNone/>
-            </a:pPr>
-            <a:r>
-              <a:rPr lang="en-US" sz="1650" b="1" dirty="0">
-                <a:solidFill>
-                  <a:srgbClr val="0B376C"/>
-                </a:solidFill>
-                <a:latin typeface="Century Gothic"/>
-                <a:cs typeface="Century Gothic"/>
-              </a:rPr>
-              <a:t>2.  </a:t>
-            </a:r>
+              <a:buClr>
+                <a:srgbClr val="0B376C"/>
+              </a:buClr>
+              <a:buFont typeface="Arial"/>
+              <a:buChar char="•"/>
+            </a:pPr>
             <a:r>
               <a:rPr lang="en-US" sz="1650" dirty="0">
                 <a:solidFill>
                   <a:srgbClr val="000000"/>
                 </a:solidFill>
-                <a:latin typeface="Century Gothic"/>
-                <a:cs typeface="Century Gothic"/>
+                <a:latin typeface="Arial"/>
+                <a:cs typeface="Arial"/>
               </a:rPr>
               <a:t>Exercise 1: write 2-4 synonyms for P, for I (or E) and for O</a:t>
             </a:r>
@@ -11240,25 +11192,19 @@
               <a:spcBef>
                 <a:spcPts val="450"/>
               </a:spcBef>
-              <a:buNone/>
-            </a:pPr>
-            <a:r>
-              <a:rPr lang="en-US" sz="1650" b="1" dirty="0">
-                <a:solidFill>
-                  <a:srgbClr val="0B376C"/>
-                </a:solidFill>
-                <a:latin typeface="Century Gothic"/>
-                <a:cs typeface="Century Gothic"/>
-              </a:rPr>
-              <a:t>3.  </a:t>
-            </a:r>
+              <a:buClr>
+                <a:srgbClr val="0B376C"/>
+              </a:buClr>
+              <a:buFont typeface="Arial"/>
+              <a:buChar char="•"/>
+            </a:pPr>
             <a:r>
               <a:rPr lang="en-US" sz="1650" dirty="0">
                 <a:solidFill>
                   <a:srgbClr val="000000"/>
                 </a:solidFill>
-                <a:latin typeface="Century Gothic"/>
-                <a:cs typeface="Century Gothic"/>
+                <a:latin typeface="Arial"/>
+                <a:cs typeface="Arial"/>
               </a:rPr>
               <a:t>Join synonyms with OR in brackets, and the blocks with AND</a:t>
             </a:r>
@@ -11271,25 +11217,19 @@
               <a:spcBef>
                 <a:spcPts val="450"/>
               </a:spcBef>
-              <a:buNone/>
-            </a:pPr>
-            <a:r>
-              <a:rPr lang="en-US" sz="1650" b="1" dirty="0">
-                <a:solidFill>
-                  <a:srgbClr val="0B376C"/>
-                </a:solidFill>
-                <a:latin typeface="Century Gothic"/>
-                <a:cs typeface="Century Gothic"/>
-              </a:rPr>
-              <a:t>4.  </a:t>
-            </a:r>
+              <a:buClr>
+                <a:srgbClr val="0B376C"/>
+              </a:buClr>
+              <a:buFont typeface="Arial"/>
+              <a:buChar char="•"/>
+            </a:pPr>
             <a:r>
               <a:rPr lang="en-US" sz="1650" dirty="0">
                 <a:solidFill>
                   <a:srgbClr val="000000"/>
                 </a:solidFill>
-                <a:latin typeface="Century Gothic"/>
-                <a:cs typeface="Century Gothic"/>
+                <a:latin typeface="Arial"/>
+                <a:cs typeface="Arial"/>
               </a:rPr>
               <a:t>Mark which words could be MeSH terms</a:t>
             </a:r>
@@ -11302,25 +11242,19 @@
               <a:spcBef>
                 <a:spcPts val="450"/>
               </a:spcBef>
-              <a:buNone/>
-            </a:pPr>
-            <a:r>
-              <a:rPr lang="en-US" sz="1650" b="1" dirty="0">
-                <a:solidFill>
-                  <a:srgbClr val="0B376C"/>
-                </a:solidFill>
-                <a:latin typeface="Century Gothic"/>
-                <a:cs typeface="Century Gothic"/>
-              </a:rPr>
-              <a:t>5.  </a:t>
-            </a:r>
+              <a:buClr>
+                <a:srgbClr val="0B376C"/>
+              </a:buClr>
+              <a:buFont typeface="Arial"/>
+              <a:buChar char="•"/>
+            </a:pPr>
             <a:r>
               <a:rPr lang="en-US" sz="1650" dirty="0">
                 <a:solidFill>
                   <a:srgbClr val="000000"/>
                 </a:solidFill>
-                <a:latin typeface="Century Gothic"/>
-                <a:cs typeface="Century Gothic"/>
+                <a:latin typeface="Arial"/>
+                <a:cs typeface="Arial"/>
               </a:rPr>
               <a:t>Swap with your neighbour: spot one missing synonym</a:t>
             </a:r>
@@ -11366,8 +11300,8 @@
                 <a:solidFill>
                   <a:srgbClr val="0B376C"/>
                 </a:solidFill>
-                <a:latin typeface="Century Gothic"/>
-                <a:cs typeface="Century Gothic"/>
+                <a:latin typeface="Arial"/>
+                <a:cs typeface="Arial"/>
               </a:rPr>
               <a:t>OUTPUT   </a:t>
             </a:r>
@@ -11376,8 +11310,8 @@
                 <a:solidFill>
                   <a:srgbClr val="000000"/>
                 </a:solidFill>
-                <a:latin typeface="Century Gothic"/>
-                <a:cs typeface="Century Gothic"/>
+                <a:latin typeface="Arial"/>
+                <a:cs typeface="Arial"/>
               </a:rPr>
               <a:t>One search string on paper, for your group to run in Proposal builder 2</a:t>
             </a:r>
@@ -11414,7 +11348,7 @@
                     <a:lumMod val="50000"/>
                   </a:schemeClr>
                 </a:solidFill>
-                <a:latin typeface="Verdana"/>
+                <a:latin typeface="Arial"/>
               </a:rPr>
               <a:t>Neudata | #ClearDataClearImpact</a:t>
             </a:r>
@@ -11544,8 +11478,8 @@
                 <a:solidFill>
                   <a:srgbClr val="0D7377"/>
                 </a:solidFill>
-                <a:latin typeface="Century Gothic"/>
-                <a:cs typeface="Century Gothic"/>
+                <a:latin typeface="Arial"/>
+                <a:cs typeface="Arial"/>
               </a:rPr>
               <a:t>2.2  Managing and citing</a:t>
             </a:r>
@@ -11614,8 +11548,8 @@
                 <a:solidFill>
                   <a:srgbClr val="0D7377"/>
                 </a:solidFill>
-                <a:latin typeface="Century Gothic"/>
-                <a:cs typeface="Century Gothic"/>
+                <a:latin typeface="Arial"/>
+                <a:cs typeface="Arial"/>
               </a:rPr>
               <a:t>Keep every reference you find, and use other people's work honestly.</a:t>
             </a:r>
@@ -11632,8 +11566,8 @@
                 <a:solidFill>
                   <a:srgbClr val="595959"/>
                 </a:solidFill>
-                <a:latin typeface="Century Gothic"/>
-                <a:cs typeface="Century Gothic"/>
+                <a:latin typeface="Arial"/>
+                <a:cs typeface="Arial"/>
               </a:rPr>
               <a:t>20 minutes: reference managers (Zotero demo), citation styles, paraphrasing safely, grey literature</a:t>
             </a:r>
@@ -11670,7 +11604,7 @@
                     <a:lumMod val="50000"/>
                   </a:schemeClr>
                 </a:solidFill>
-                <a:latin typeface="Verdana"/>
+                <a:latin typeface="Arial"/>
               </a:rPr>
               <a:t>Neudata | #ClearDataClearImpact</a:t>
             </a:r>
@@ -11800,8 +11734,8 @@
                 <a:solidFill>
                   <a:srgbClr val="0D7377"/>
                 </a:solidFill>
-                <a:latin typeface="Century Gothic"/>
-                <a:cs typeface="Century Gothic"/>
+                <a:latin typeface="Arial"/>
+                <a:cs typeface="Arial"/>
               </a:rPr>
               <a:t>Reference managers: save as you go</a:t>
             </a:r>
@@ -11873,8 +11807,8 @@
                 <a:solidFill>
                   <a:srgbClr val="FFFFFF"/>
                 </a:solidFill>
-                <a:latin typeface="Century Gothic"/>
-                <a:cs typeface="Century Gothic"/>
+                <a:latin typeface="Arial"/>
+                <a:cs typeface="Arial"/>
               </a:rPr>
               <a:t>Collect</a:t>
             </a:r>
@@ -11922,8 +11856,8 @@
                 <a:solidFill>
                   <a:srgbClr val="000000"/>
                 </a:solidFill>
-                <a:latin typeface="Century Gothic"/>
-                <a:cs typeface="Century Gothic"/>
+                <a:latin typeface="Arial"/>
+                <a:cs typeface="Arial"/>
               </a:rPr>
               <a:t>Tick papers in PubMed</a:t>
             </a:r>
@@ -11943,8 +11877,8 @@
                 <a:solidFill>
                   <a:srgbClr val="000000"/>
                 </a:solidFill>
-                <a:latin typeface="Century Gothic"/>
-                <a:cs typeface="Century Gothic"/>
+                <a:latin typeface="Arial"/>
+                <a:cs typeface="Arial"/>
               </a:rPr>
               <a:t>Clipboard or</a:t>
             </a:r>
@@ -11964,8 +11898,8 @@
                 <a:solidFill>
                   <a:srgbClr val="000000"/>
                 </a:solidFill>
-                <a:latin typeface="Century Gothic"/>
-                <a:cs typeface="Century Gothic"/>
+                <a:latin typeface="Arial"/>
+                <a:cs typeface="Arial"/>
               </a:rPr>
               <a:t>Collections (My NCBI)</a:t>
             </a:r>
@@ -12009,8 +11943,8 @@
                 <a:solidFill>
                   <a:srgbClr val="FFFFFF"/>
                 </a:solidFill>
-                <a:latin typeface="Century Gothic"/>
-                <a:cs typeface="Century Gothic"/>
+                <a:latin typeface="Arial"/>
+                <a:cs typeface="Arial"/>
               </a:rPr>
               <a:t>Export</a:t>
             </a:r>
@@ -12058,8 +11992,8 @@
                 <a:solidFill>
                   <a:srgbClr val="000000"/>
                 </a:solidFill>
-                <a:latin typeface="Century Gothic"/>
-                <a:cs typeface="Century Gothic"/>
+                <a:latin typeface="Arial"/>
+                <a:cs typeface="Arial"/>
               </a:rPr>
               <a:t>Send to:</a:t>
             </a:r>
@@ -12079,8 +12013,8 @@
                 <a:solidFill>
                   <a:srgbClr val="000000"/>
                 </a:solidFill>
-                <a:latin typeface="Century Gothic"/>
-                <a:cs typeface="Century Gothic"/>
+                <a:latin typeface="Arial"/>
+                <a:cs typeface="Arial"/>
               </a:rPr>
               <a:t>Citation manager</a:t>
             </a:r>
@@ -12100,8 +12034,8 @@
                 <a:solidFill>
                   <a:srgbClr val="000000"/>
                 </a:solidFill>
-                <a:latin typeface="Century Gothic"/>
-                <a:cs typeface="Century Gothic"/>
+                <a:latin typeface="Arial"/>
+                <a:cs typeface="Arial"/>
               </a:rPr>
               <a:t>(.nbib file)</a:t>
             </a:r>
@@ -12145,8 +12079,8 @@
                 <a:solidFill>
                   <a:srgbClr val="FFFFFF"/>
                 </a:solidFill>
-                <a:latin typeface="Century Gothic"/>
-                <a:cs typeface="Century Gothic"/>
+                <a:latin typeface="Arial"/>
+                <a:cs typeface="Arial"/>
               </a:rPr>
               <a:t>Import</a:t>
             </a:r>
@@ -12194,8 +12128,8 @@
                 <a:solidFill>
                   <a:srgbClr val="000000"/>
                 </a:solidFill>
-                <a:latin typeface="Century Gothic"/>
-                <a:cs typeface="Century Gothic"/>
+                <a:latin typeface="Arial"/>
+                <a:cs typeface="Arial"/>
               </a:rPr>
               <a:t>Zotero or Mendeley</a:t>
             </a:r>
@@ -12215,8 +12149,8 @@
                 <a:solidFill>
                   <a:srgbClr val="000000"/>
                 </a:solidFill>
-                <a:latin typeface="Century Gothic"/>
-                <a:cs typeface="Century Gothic"/>
+                <a:latin typeface="Arial"/>
+                <a:cs typeface="Arial"/>
               </a:rPr>
               <a:t>(free), EndNote</a:t>
             </a:r>
@@ -12236,8 +12170,8 @@
                 <a:solidFill>
                   <a:srgbClr val="000000"/>
                 </a:solidFill>
-                <a:latin typeface="Century Gothic"/>
-                <a:cs typeface="Century Gothic"/>
+                <a:latin typeface="Arial"/>
+                <a:cs typeface="Arial"/>
               </a:rPr>
               <a:t>(paid)</a:t>
             </a:r>
@@ -12281,8 +12215,8 @@
                 <a:solidFill>
                   <a:srgbClr val="FFFFFF"/>
                 </a:solidFill>
-                <a:latin typeface="Century Gothic"/>
-                <a:cs typeface="Century Gothic"/>
+                <a:latin typeface="Arial"/>
+                <a:cs typeface="Arial"/>
               </a:rPr>
               <a:t>Cite</a:t>
             </a:r>
@@ -12330,8 +12264,8 @@
                 <a:solidFill>
                   <a:srgbClr val="000000"/>
                 </a:solidFill>
-                <a:latin typeface="Century Gothic"/>
-                <a:cs typeface="Century Gothic"/>
+                <a:latin typeface="Arial"/>
+                <a:cs typeface="Arial"/>
               </a:rPr>
               <a:t>Insert citations</a:t>
             </a:r>
@@ -12351,8 +12285,8 @@
                 <a:solidFill>
                   <a:srgbClr val="000000"/>
                 </a:solidFill>
-                <a:latin typeface="Century Gothic"/>
-                <a:cs typeface="Century Gothic"/>
+                <a:latin typeface="Arial"/>
+                <a:cs typeface="Arial"/>
               </a:rPr>
               <a:t>in Word with</a:t>
             </a:r>
@@ -12372,8 +12306,8 @@
                 <a:solidFill>
                   <a:srgbClr val="000000"/>
                 </a:solidFill>
-                <a:latin typeface="Century Gothic"/>
-                <a:cs typeface="Century Gothic"/>
+                <a:latin typeface="Arial"/>
+                <a:cs typeface="Arial"/>
               </a:rPr>
               <a:t>the plug-in</a:t>
             </a:r>
@@ -12417,8 +12351,8 @@
                 <a:solidFill>
                   <a:srgbClr val="FFFFFF"/>
                 </a:solidFill>
-                <a:latin typeface="Century Gothic"/>
-                <a:cs typeface="Century Gothic"/>
+                <a:latin typeface="Arial"/>
+                <a:cs typeface="Arial"/>
               </a:rPr>
               <a:t>List</a:t>
             </a:r>
@@ -12466,8 +12400,8 @@
                 <a:solidFill>
                   <a:srgbClr val="000000"/>
                 </a:solidFill>
-                <a:latin typeface="Century Gothic"/>
-                <a:cs typeface="Century Gothic"/>
+                <a:latin typeface="Arial"/>
+                <a:cs typeface="Arial"/>
               </a:rPr>
               <a:t>Reference list</a:t>
             </a:r>
@@ -12487,8 +12421,8 @@
                 <a:solidFill>
                   <a:srgbClr val="000000"/>
                 </a:solidFill>
-                <a:latin typeface="Century Gothic"/>
-                <a:cs typeface="Century Gothic"/>
+                <a:latin typeface="Arial"/>
+                <a:cs typeface="Arial"/>
               </a:rPr>
               <a:t>built for you</a:t>
             </a:r>
@@ -12508,8 +12442,8 @@
                 <a:solidFill>
                   <a:srgbClr val="000000"/>
                 </a:solidFill>
-                <a:latin typeface="Century Gothic"/>
-                <a:cs typeface="Century Gothic"/>
+                <a:latin typeface="Arial"/>
+                <a:cs typeface="Arial"/>
               </a:rPr>
               <a:t>in any style</a:t>
             </a:r>
@@ -12553,8 +12487,8 @@
                 <a:solidFill>
                   <a:srgbClr val="FFFFFF"/>
                 </a:solidFill>
-                <a:latin typeface="Century Gothic"/>
-                <a:cs typeface="Century Gothic"/>
+                <a:latin typeface="Arial"/>
+                <a:cs typeface="Arial"/>
               </a:rPr>
               <a:t>KEY MESSAGE   </a:t>
             </a:r>
@@ -12563,8 +12497,8 @@
                 <a:solidFill>
                   <a:srgbClr val="FFFFFF"/>
                 </a:solidFill>
-                <a:latin typeface="Century Gothic"/>
-                <a:cs typeface="Century Gothic"/>
+                <a:latin typeface="Arial"/>
+                <a:cs typeface="Arial"/>
               </a:rPr>
               <a:t>A reference manager prevents the commonest error in proposals: wrong references.</a:t>
             </a:r>
@@ -12601,7 +12535,7 @@
                     <a:lumMod val="50000"/>
                   </a:schemeClr>
                 </a:solidFill>
-                <a:latin typeface="Verdana"/>
+                <a:latin typeface="Arial"/>
               </a:rPr>
               <a:t>Neudata | #ClearDataClearImpact</a:t>
             </a:r>
@@ -12731,8 +12665,8 @@
                 <a:solidFill>
                   <a:srgbClr val="0D7377"/>
                 </a:solidFill>
-                <a:latin typeface="Century Gothic"/>
-                <a:cs typeface="Century Gothic"/>
+                <a:latin typeface="Arial"/>
+                <a:cs typeface="Arial"/>
               </a:rPr>
               <a:t>Live demo: from PubMed to Zotero to Word</a:t>
             </a:r>
@@ -12802,8 +12736,8 @@
                 <a:solidFill>
                   <a:srgbClr val="FFFFFF"/>
                 </a:solidFill>
-                <a:latin typeface="Century Gothic"/>
-                <a:cs typeface="Century Gothic"/>
+                <a:latin typeface="Arial"/>
+                <a:cs typeface="Arial"/>
               </a:rPr>
               <a:t>LIVE DEMO   |   5 min</a:t>
             </a:r>
@@ -12840,25 +12774,19 @@
               <a:spcBef>
                 <a:spcPts val="450"/>
               </a:spcBef>
-              <a:buNone/>
-            </a:pPr>
-            <a:r>
-              <a:rPr lang="en-US" sz="1650" b="1" dirty="0">
-                <a:solidFill>
-                  <a:srgbClr val="B5651D"/>
-                </a:solidFill>
-                <a:latin typeface="Century Gothic"/>
-                <a:cs typeface="Century Gothic"/>
-              </a:rPr>
-              <a:t>1.  </a:t>
-            </a:r>
+              <a:buClr>
+                <a:srgbClr val="B5651D"/>
+              </a:buClr>
+              <a:buFont typeface="Arial"/>
+              <a:buChar char="•"/>
+            </a:pPr>
             <a:r>
               <a:rPr lang="en-US" sz="1650" dirty="0">
                 <a:solidFill>
                   <a:srgbClr val="000000"/>
                 </a:solidFill>
-                <a:latin typeface="Century Gothic"/>
-                <a:cs typeface="Century Gothic"/>
+                <a:latin typeface="Arial"/>
+                <a:cs typeface="Arial"/>
               </a:rPr>
               <a:t>Import the .nbib file from the PubMed demo into Zotero</a:t>
             </a:r>
@@ -12871,25 +12799,19 @@
               <a:spcBef>
                 <a:spcPts val="450"/>
               </a:spcBef>
-              <a:buNone/>
-            </a:pPr>
-            <a:r>
-              <a:rPr lang="en-US" sz="1650" b="1" dirty="0">
-                <a:solidFill>
-                  <a:srgbClr val="B5651D"/>
-                </a:solidFill>
-                <a:latin typeface="Century Gothic"/>
-                <a:cs typeface="Century Gothic"/>
-              </a:rPr>
-              <a:t>2.  </a:t>
-            </a:r>
+              <a:buClr>
+                <a:srgbClr val="B5651D"/>
+              </a:buClr>
+              <a:buFont typeface="Arial"/>
+              <a:buChar char="•"/>
+            </a:pPr>
             <a:r>
               <a:rPr lang="en-US" sz="1650" dirty="0">
                 <a:solidFill>
                   <a:srgbClr val="000000"/>
                 </a:solidFill>
-                <a:latin typeface="Century Gothic"/>
-                <a:cs typeface="Century Gothic"/>
+                <a:latin typeface="Arial"/>
+                <a:cs typeface="Arial"/>
               </a:rPr>
               <a:t>Look: authors, title, journal, year, DOI, with nothing typed by hand</a:t>
             </a:r>
@@ -12902,25 +12824,19 @@
               <a:spcBef>
                 <a:spcPts val="450"/>
               </a:spcBef>
-              <a:buNone/>
-            </a:pPr>
-            <a:r>
-              <a:rPr lang="en-US" sz="1650" b="1" dirty="0">
-                <a:solidFill>
-                  <a:srgbClr val="B5651D"/>
-                </a:solidFill>
-                <a:latin typeface="Century Gothic"/>
-                <a:cs typeface="Century Gothic"/>
-              </a:rPr>
-              <a:t>3.  </a:t>
-            </a:r>
+              <a:buClr>
+                <a:srgbClr val="B5651D"/>
+              </a:buClr>
+              <a:buFont typeface="Arial"/>
+              <a:buChar char="•"/>
+            </a:pPr>
             <a:r>
               <a:rPr lang="en-US" sz="1650" dirty="0">
                 <a:solidFill>
                   <a:srgbClr val="000000"/>
                 </a:solidFill>
-                <a:latin typeface="Century Gothic"/>
-                <a:cs typeface="Century Gothic"/>
+                <a:latin typeface="Arial"/>
+                <a:cs typeface="Arial"/>
               </a:rPr>
               <a:t>In Word: Zotero tab, Add/Edit Citation, type 'Meyhoff'</a:t>
             </a:r>
@@ -12933,25 +12849,19 @@
               <a:spcBef>
                 <a:spcPts val="450"/>
               </a:spcBef>
-              <a:buNone/>
-            </a:pPr>
-            <a:r>
-              <a:rPr lang="en-US" sz="1650" b="1" dirty="0">
-                <a:solidFill>
-                  <a:srgbClr val="B5651D"/>
-                </a:solidFill>
-                <a:latin typeface="Century Gothic"/>
-                <a:cs typeface="Century Gothic"/>
-              </a:rPr>
-              <a:t>4.  </a:t>
-            </a:r>
+              <a:buClr>
+                <a:srgbClr val="B5651D"/>
+              </a:buClr>
+              <a:buFont typeface="Arial"/>
+              <a:buChar char="•"/>
+            </a:pPr>
             <a:r>
               <a:rPr lang="en-US" sz="1650" dirty="0">
                 <a:solidFill>
                   <a:srgbClr val="000000"/>
                 </a:solidFill>
-                <a:latin typeface="Century Gothic"/>
-                <a:cs typeface="Century Gothic"/>
+                <a:latin typeface="Arial"/>
+                <a:cs typeface="Arial"/>
               </a:rPr>
               <a:t>Add/Edit Bibliography: the reference list appears</a:t>
             </a:r>
@@ -12964,25 +12874,19 @@
               <a:spcBef>
                 <a:spcPts val="450"/>
               </a:spcBef>
-              <a:buNone/>
-            </a:pPr>
-            <a:r>
-              <a:rPr lang="en-US" sz="1650" b="1" dirty="0">
-                <a:solidFill>
-                  <a:srgbClr val="B5651D"/>
-                </a:solidFill>
-                <a:latin typeface="Century Gothic"/>
-                <a:cs typeface="Century Gothic"/>
-              </a:rPr>
-              <a:t>5.  </a:t>
-            </a:r>
+              <a:buClr>
+                <a:srgbClr val="B5651D"/>
+              </a:buClr>
+              <a:buFont typeface="Arial"/>
+              <a:buChar char="•"/>
+            </a:pPr>
             <a:r>
               <a:rPr lang="en-US" sz="1650" dirty="0">
                 <a:solidFill>
                   <a:srgbClr val="000000"/>
                 </a:solidFill>
-                <a:latin typeface="Century Gothic"/>
-                <a:cs typeface="Century Gothic"/>
+                <a:latin typeface="Arial"/>
+                <a:cs typeface="Arial"/>
               </a:rPr>
               <a:t>Document Preferences: switch Vancouver to APA and back</a:t>
             </a:r>
@@ -13026,8 +12930,8 @@
                 <a:solidFill>
                   <a:srgbClr val="B5651D"/>
                 </a:solidFill>
-                <a:latin typeface="Century Gothic"/>
-                <a:cs typeface="Century Gothic"/>
+                <a:latin typeface="Arial"/>
+                <a:cs typeface="Arial"/>
               </a:rPr>
               <a:t>Watch for</a:t>
             </a:r>
@@ -13048,8 +12952,8 @@
                 <a:solidFill>
                   <a:srgbClr val="000000"/>
                 </a:solidFill>
-                <a:latin typeface="Century Gothic"/>
-                <a:cs typeface="Century Gothic"/>
+                <a:latin typeface="Arial"/>
+                <a:cs typeface="Arial"/>
               </a:rPr>
               <a:t>[1] becomes (Meyhoff et al., 2022)</a:t>
             </a:r>
@@ -13070,8 +12974,8 @@
                 <a:solidFill>
                   <a:srgbClr val="000000"/>
                 </a:solidFill>
-                <a:latin typeface="Century Gothic"/>
-                <a:cs typeface="Century Gothic"/>
+                <a:latin typeface="Arial"/>
+                <a:cs typeface="Arial"/>
               </a:rPr>
               <a:t>The list reformats itself</a:t>
             </a:r>
@@ -13117,8 +13021,8 @@
                 <a:solidFill>
                   <a:srgbClr val="B5651D"/>
                 </a:solidFill>
-                <a:latin typeface="Century Gothic"/>
-                <a:cs typeface="Century Gothic"/>
+                <a:latin typeface="Arial"/>
+                <a:cs typeface="Arial"/>
               </a:rPr>
               <a:t>OUTPUT   </a:t>
             </a:r>
@@ -13127,8 +13031,8 @@
                 <a:solidFill>
                   <a:srgbClr val="000000"/>
                 </a:solidFill>
-                <a:latin typeface="Century Gothic"/>
-                <a:cs typeface="Century Gothic"/>
+                <a:latin typeface="Arial"/>
+                <a:cs typeface="Arial"/>
               </a:rPr>
               <a:t>Everyone has seen the full collect → cite → list cycle</a:t>
             </a:r>
@@ -13165,7 +13069,7 @@
                     <a:lumMod val="50000"/>
                   </a:schemeClr>
                 </a:solidFill>
-                <a:latin typeface="Verdana"/>
+                <a:latin typeface="Arial"/>
               </a:rPr>
               <a:t>Neudata | #ClearDataClearImpact</a:t>
             </a:r>
@@ -13295,8 +13199,8 @@
                 <a:solidFill>
                   <a:srgbClr val="0D7377"/>
                 </a:solidFill>
-                <a:latin typeface="Century Gothic"/>
-                <a:cs typeface="Century Gothic"/>
+                <a:latin typeface="Arial"/>
+                <a:cs typeface="Arial"/>
               </a:rPr>
               <a:t>Citation styles: same paper, two looks</a:t>
             </a:r>
@@ -13392,8 +13296,8 @@
                 <a:solidFill>
                   <a:srgbClr val="FFFFFF"/>
                 </a:solidFill>
-                <a:latin typeface="Century Gothic"/>
-                <a:cs typeface="Century Gothic"/>
+                <a:latin typeface="Arial"/>
+                <a:cs typeface="Arial"/>
               </a:rPr>
               <a:t>KEY MESSAGE   </a:t>
             </a:r>
@@ -13402,8 +13306,8 @@
                 <a:solidFill>
                   <a:srgbClr val="FFFFFF"/>
                 </a:solidFill>
-                <a:latin typeface="Century Gothic"/>
-                <a:cs typeface="Century Gothic"/>
+                <a:latin typeface="Arial"/>
+                <a:cs typeface="Arial"/>
               </a:rPr>
               <a:t>Pick the style your target journal uses; let the software do the formatting.</a:t>
             </a:r>
@@ -13440,7 +13344,7 @@
                     <a:lumMod val="50000"/>
                   </a:schemeClr>
                 </a:solidFill>
-                <a:latin typeface="Verdana"/>
+                <a:latin typeface="Arial"/>
               </a:rPr>
               <a:t>Neudata | #ClearDataClearImpact</a:t>
             </a:r>
@@ -13570,8 +13474,8 @@
                 <a:solidFill>
                   <a:srgbClr val="0D7377"/>
                 </a:solidFill>
-                <a:latin typeface="Century Gothic"/>
-                <a:cs typeface="Century Gothic"/>
+                <a:latin typeface="Arial"/>
+                <a:cs typeface="Arial"/>
               </a:rPr>
               <a:t>Citing vs copying: paraphrase safely</a:t>
             </a:r>
@@ -13667,8 +13571,8 @@
                 <a:solidFill>
                   <a:srgbClr val="FFFFFF"/>
                 </a:solidFill>
-                <a:latin typeface="Century Gothic"/>
-                <a:cs typeface="Century Gothic"/>
+                <a:latin typeface="Arial"/>
+                <a:cs typeface="Arial"/>
               </a:rPr>
               <a:t>KEY MESSAGE   </a:t>
             </a:r>
@@ -13677,8 +13581,8 @@
                 <a:solidFill>
                   <a:srgbClr val="FFFFFF"/>
                 </a:solidFill>
-                <a:latin typeface="Century Gothic"/>
-                <a:cs typeface="Century Gothic"/>
+                <a:latin typeface="Arial"/>
+                <a:cs typeface="Arial"/>
               </a:rPr>
               <a:t>Change the structure as well as the words, and always cite the source.</a:t>
             </a:r>
@@ -13715,7 +13619,7 @@
                     <a:lumMod val="50000"/>
                   </a:schemeClr>
                 </a:solidFill>
-                <a:latin typeface="Verdana"/>
+                <a:latin typeface="Arial"/>
               </a:rPr>
               <a:t>Neudata | #ClearDataClearImpact</a:t>
             </a:r>
@@ -13845,8 +13749,8 @@
                 <a:solidFill>
                   <a:srgbClr val="0D7377"/>
                 </a:solidFill>
-                <a:latin typeface="Century Gothic"/>
-                <a:cs typeface="Century Gothic"/>
+                <a:latin typeface="Arial"/>
+                <a:cs typeface="Arial"/>
               </a:rPr>
               <a:t>Recap quiz: Session 1</a:t>
             </a:r>
@@ -13916,8 +13820,8 @@
                 <a:solidFill>
                   <a:srgbClr val="FFFFFF"/>
                 </a:solidFill>
-                <a:latin typeface="Century Gothic"/>
-                <a:cs typeface="Century Gothic"/>
+                <a:latin typeface="Arial"/>
+                <a:cs typeface="Arial"/>
               </a:rPr>
               <a:t>QUICK QUIZ   |   8 min</a:t>
             </a:r>
@@ -13954,25 +13858,19 @@
               <a:spcBef>
                 <a:spcPts val="450"/>
               </a:spcBef>
-              <a:buNone/>
-            </a:pPr>
-            <a:r>
-              <a:rPr lang="en-US" sz="1650" b="1" dirty="0">
-                <a:solidFill>
-                  <a:srgbClr val="6C3483"/>
-                </a:solidFill>
-                <a:latin typeface="Century Gothic"/>
-                <a:cs typeface="Century Gothic"/>
-              </a:rPr>
-              <a:t>1.  </a:t>
-            </a:r>
+              <a:buClr>
+                <a:srgbClr val="6C3483"/>
+              </a:buClr>
+              <a:buFont typeface="Arial"/>
+              <a:buChar char="•"/>
+            </a:pPr>
             <a:r>
               <a:rPr lang="en-US" sz="1650" dirty="0">
                 <a:solidFill>
                   <a:srgbClr val="000000"/>
                 </a:solidFill>
-                <a:latin typeface="Century Gothic"/>
-                <a:cs typeface="Century Gothic"/>
+                <a:latin typeface="Arial"/>
+                <a:cs typeface="Arial"/>
               </a:rPr>
               <a:t>Checking whether fluid balance is charted daily as the protocol says: research, audit or QI?</a:t>
             </a:r>
@@ -13985,25 +13883,19 @@
               <a:spcBef>
                 <a:spcPts val="450"/>
               </a:spcBef>
-              <a:buNone/>
-            </a:pPr>
-            <a:r>
-              <a:rPr lang="en-US" sz="1650" b="1" dirty="0">
-                <a:solidFill>
-                  <a:srgbClr val="6C3483"/>
-                </a:solidFill>
-                <a:latin typeface="Century Gothic"/>
-                <a:cs typeface="Century Gothic"/>
-              </a:rPr>
-              <a:t>2.  </a:t>
-            </a:r>
+              <a:buClr>
+                <a:srgbClr val="6C3483"/>
+              </a:buClr>
+              <a:buFont typeface="Arial"/>
+              <a:buChar char="•"/>
+            </a:pPr>
             <a:r>
               <a:rPr lang="en-US" sz="1650" dirty="0">
                 <a:solidFill>
                   <a:srgbClr val="000000"/>
                 </a:solidFill>
-                <a:latin typeface="Century Gothic"/>
-                <a:cs typeface="Century Gothic"/>
+                <a:latin typeface="Arial"/>
+                <a:cs typeface="Arial"/>
               </a:rPr>
               <a:t>'In ICU staff, does hand-hygiene feedback vs none increase compliance at 3 months?' Name P, I, C, O, T</a:t>
             </a:r>
@@ -14016,25 +13908,19 @@
               <a:spcBef>
                 <a:spcPts val="450"/>
               </a:spcBef>
-              <a:buNone/>
-            </a:pPr>
-            <a:r>
-              <a:rPr lang="en-US" sz="1650" b="1" dirty="0">
-                <a:solidFill>
-                  <a:srgbClr val="6C3483"/>
-                </a:solidFill>
-                <a:latin typeface="Century Gothic"/>
-                <a:cs typeface="Century Gothic"/>
-              </a:rPr>
-              <a:t>3.  </a:t>
-            </a:r>
+              <a:buClr>
+                <a:srgbClr val="6C3483"/>
+              </a:buClr>
+              <a:buFont typeface="Arial"/>
+              <a:buChar char="•"/>
+            </a:pPr>
             <a:r>
               <a:rPr lang="en-US" sz="1650" dirty="0">
                 <a:solidFill>
                   <a:srgbClr val="000000"/>
                 </a:solidFill>
-                <a:latin typeface="Century Gothic"/>
-                <a:cs typeface="Century Gothic"/>
+                <a:latin typeface="Arial"/>
+                <a:cs typeface="Arial"/>
               </a:rPr>
               <a:t>Which FINER letter did our running example fail?</a:t>
             </a:r>
@@ -14047,25 +13933,19 @@
               <a:spcBef>
                 <a:spcPts val="450"/>
               </a:spcBef>
-              <a:buNone/>
-            </a:pPr>
-            <a:r>
-              <a:rPr lang="en-US" sz="1650" b="1" dirty="0">
-                <a:solidFill>
-                  <a:srgbClr val="6C3483"/>
-                </a:solidFill>
-                <a:latin typeface="Century Gothic"/>
-                <a:cs typeface="Century Gothic"/>
-              </a:rPr>
-              <a:t>4.  </a:t>
-            </a:r>
+              <a:buClr>
+                <a:srgbClr val="6C3483"/>
+              </a:buClr>
+              <a:buFont typeface="Arial"/>
+              <a:buChar char="•"/>
+            </a:pPr>
             <a:r>
               <a:rPr lang="en-US" sz="1650" dirty="0">
                 <a:solidFill>
                   <a:srgbClr val="000000"/>
                 </a:solidFill>
-                <a:latin typeface="Century Gothic"/>
-                <a:cs typeface="Century Gothic"/>
+                <a:latin typeface="Arial"/>
+                <a:cs typeface="Arial"/>
               </a:rPr>
               <a:t>Which is an objective: 'to understand delirium' or 'to estimate the proportion with delirium'?</a:t>
             </a:r>
@@ -14078,25 +13958,19 @@
               <a:spcBef>
                 <a:spcPts val="450"/>
               </a:spcBef>
-              <a:buNone/>
-            </a:pPr>
-            <a:r>
-              <a:rPr lang="en-US" sz="1650" b="1" dirty="0">
-                <a:solidFill>
-                  <a:srgbClr val="6C3483"/>
-                </a:solidFill>
-                <a:latin typeface="Century Gothic"/>
-                <a:cs typeface="Century Gothic"/>
-              </a:rPr>
-              <a:t>5.  </a:t>
-            </a:r>
+              <a:buClr>
+                <a:srgbClr val="6C3483"/>
+              </a:buClr>
+              <a:buFont typeface="Arial"/>
+              <a:buChar char="•"/>
+            </a:pPr>
             <a:r>
               <a:rPr lang="en-US" sz="1650" dirty="0">
                 <a:solidFill>
                   <a:srgbClr val="000000"/>
                 </a:solidFill>
-                <a:latin typeface="Century Gothic"/>
-                <a:cs typeface="Century Gothic"/>
+                <a:latin typeface="Arial"/>
+                <a:cs typeface="Arial"/>
               </a:rPr>
               <a:t>Write H0 for: does early mobilisation shorten ICU stay?</a:t>
             </a:r>
@@ -14142,8 +14016,8 @@
                 <a:solidFill>
                   <a:srgbClr val="6C3483"/>
                 </a:solidFill>
-                <a:latin typeface="Century Gothic"/>
-                <a:cs typeface="Century Gothic"/>
+                <a:latin typeface="Arial"/>
+                <a:cs typeface="Arial"/>
               </a:rPr>
               <a:t>OUTPUT   </a:t>
             </a:r>
@@ -14152,8 +14026,8 @@
                 <a:solidFill>
                   <a:srgbClr val="000000"/>
                 </a:solidFill>
-                <a:latin typeface="Century Gothic"/>
-                <a:cs typeface="Century Gothic"/>
+                <a:latin typeface="Arial"/>
+                <a:cs typeface="Arial"/>
               </a:rPr>
               <a:t>Answers on paper, checked against the next slide</a:t>
             </a:r>
@@ -14190,7 +14064,7 @@
                     <a:lumMod val="50000"/>
                   </a:schemeClr>
                 </a:solidFill>
-                <a:latin typeface="Verdana"/>
+                <a:latin typeface="Arial"/>
               </a:rPr>
               <a:t>Neudata | #ClearDataClearImpact</a:t>
             </a:r>
@@ -14320,8 +14194,8 @@
                 <a:solidFill>
                   <a:srgbClr val="0D7377"/>
                 </a:solidFill>
-                <a:latin typeface="Century Gothic"/>
-                <a:cs typeface="Century Gothic"/>
+                <a:latin typeface="Arial"/>
+                <a:cs typeface="Arial"/>
               </a:rPr>
               <a:t>Four rules for citing safely</a:t>
             </a:r>
@@ -14391,8 +14265,8 @@
                 <a:solidFill>
                   <a:srgbClr val="FFFFFF"/>
                 </a:solidFill>
-                <a:latin typeface="Century Gothic"/>
-                <a:cs typeface="Century Gothic"/>
+                <a:latin typeface="Arial"/>
+                <a:cs typeface="Arial"/>
               </a:rPr>
               <a:t>Cite facts</a:t>
             </a:r>
@@ -14440,8 +14314,8 @@
                 <a:solidFill>
                   <a:srgbClr val="000000"/>
                 </a:solidFill>
-                <a:latin typeface="Century Gothic"/>
-                <a:cs typeface="Century Gothic"/>
+                <a:latin typeface="Arial"/>
+                <a:cs typeface="Arial"/>
               </a:rPr>
               <a:t>Numbers, findings</a:t>
             </a:r>
@@ -14461,8 +14335,8 @@
                 <a:solidFill>
                   <a:srgbClr val="000000"/>
                 </a:solidFill>
-                <a:latin typeface="Century Gothic"/>
-                <a:cs typeface="Century Gothic"/>
+                <a:latin typeface="Arial"/>
+                <a:cs typeface="Arial"/>
               </a:rPr>
               <a:t>and others' ideas</a:t>
             </a:r>
@@ -14482,8 +14356,8 @@
                 <a:solidFill>
                   <a:srgbClr val="000000"/>
                 </a:solidFill>
-                <a:latin typeface="Century Gothic"/>
-                <a:cs typeface="Century Gothic"/>
+                <a:latin typeface="Arial"/>
+                <a:cs typeface="Arial"/>
               </a:rPr>
               <a:t>need a citation</a:t>
             </a:r>
@@ -14525,8 +14399,8 @@
                 <a:solidFill>
                   <a:srgbClr val="FFFFFF"/>
                 </a:solidFill>
-                <a:latin typeface="Century Gothic"/>
-                <a:cs typeface="Century Gothic"/>
+                <a:latin typeface="Arial"/>
+                <a:cs typeface="Arial"/>
               </a:rPr>
               <a:t>Cite sources</a:t>
             </a:r>
@@ -14574,8 +14448,8 @@
                 <a:solidFill>
                   <a:srgbClr val="000000"/>
                 </a:solidFill>
-                <a:latin typeface="Century Gothic"/>
-                <a:cs typeface="Century Gothic"/>
+                <a:latin typeface="Arial"/>
+                <a:cs typeface="Arial"/>
               </a:rPr>
               <a:t>Read and cite the</a:t>
             </a:r>
@@ -14595,8 +14469,8 @@
                 <a:solidFill>
                   <a:srgbClr val="000000"/>
                 </a:solidFill>
-                <a:latin typeface="Century Gothic"/>
-                <a:cs typeface="Century Gothic"/>
+                <a:latin typeface="Arial"/>
+                <a:cs typeface="Arial"/>
               </a:rPr>
               <a:t>original paper,</a:t>
             </a:r>
@@ -14616,8 +14490,8 @@
                 <a:solidFill>
                   <a:srgbClr val="000000"/>
                 </a:solidFill>
-                <a:latin typeface="Century Gothic"/>
-                <a:cs typeface="Century Gothic"/>
+                <a:latin typeface="Arial"/>
+                <a:cs typeface="Arial"/>
               </a:rPr>
               <a:t>not a summary</a:t>
             </a:r>
@@ -14659,8 +14533,8 @@
                 <a:solidFill>
                   <a:srgbClr val="FFFFFF"/>
                 </a:solidFill>
-                <a:latin typeface="Century Gothic"/>
-                <a:cs typeface="Century Gothic"/>
+                <a:latin typeface="Arial"/>
+                <a:cs typeface="Arial"/>
               </a:rPr>
               <a:t>Own words</a:t>
             </a:r>
@@ -14708,8 +14582,8 @@
                 <a:solidFill>
                   <a:srgbClr val="000000"/>
                 </a:solidFill>
-                <a:latin typeface="Century Gothic"/>
-                <a:cs typeface="Century Gothic"/>
+                <a:latin typeface="Arial"/>
+                <a:cs typeface="Arial"/>
               </a:rPr>
               <a:t>New structure;</a:t>
             </a:r>
@@ -14729,8 +14603,8 @@
                 <a:solidFill>
                   <a:srgbClr val="000000"/>
                 </a:solidFill>
-                <a:latin typeface="Century Gothic"/>
-                <a:cs typeface="Century Gothic"/>
+                <a:latin typeface="Arial"/>
+                <a:cs typeface="Arial"/>
               </a:rPr>
               <a:t>quotes only with</a:t>
             </a:r>
@@ -14750,8 +14624,8 @@
                 <a:solidFill>
                   <a:srgbClr val="000000"/>
                 </a:solidFill>
-                <a:latin typeface="Century Gothic"/>
-                <a:cs typeface="Century Gothic"/>
+                <a:latin typeface="Arial"/>
+                <a:cs typeface="Arial"/>
               </a:rPr>
               <a:t>quotation marks</a:t>
             </a:r>
@@ -14793,8 +14667,8 @@
                 <a:solidFill>
                   <a:srgbClr val="FFFFFF"/>
                 </a:solidFill>
-                <a:latin typeface="Century Gothic"/>
-                <a:cs typeface="Century Gothic"/>
+                <a:latin typeface="Arial"/>
+                <a:cs typeface="Arial"/>
               </a:rPr>
               <a:t>Check</a:t>
             </a:r>
@@ -14842,8 +14716,8 @@
                 <a:solidFill>
                   <a:srgbClr val="000000"/>
                 </a:solidFill>
-                <a:latin typeface="Century Gothic"/>
-                <a:cs typeface="Century Gothic"/>
+                <a:latin typeface="Arial"/>
+                <a:cs typeface="Arial"/>
               </a:rPr>
               <a:t>Every reference</a:t>
             </a:r>
@@ -14863,8 +14737,8 @@
                 <a:solidFill>
                   <a:srgbClr val="000000"/>
                 </a:solidFill>
-                <a:latin typeface="Century Gothic"/>
-                <a:cs typeface="Century Gothic"/>
+                <a:latin typeface="Arial"/>
+                <a:cs typeface="Arial"/>
               </a:rPr>
               <a:t>says what you</a:t>
             </a:r>
@@ -14884,8 +14758,8 @@
                 <a:solidFill>
                   <a:srgbClr val="000000"/>
                 </a:solidFill>
-                <a:latin typeface="Century Gothic"/>
-                <a:cs typeface="Century Gothic"/>
+                <a:latin typeface="Arial"/>
+                <a:cs typeface="Arial"/>
               </a:rPr>
               <a:t>claim it says</a:t>
             </a:r>
@@ -14929,8 +14803,8 @@
                 <a:solidFill>
                   <a:srgbClr val="FFFFFF"/>
                 </a:solidFill>
-                <a:latin typeface="Century Gothic"/>
-                <a:cs typeface="Century Gothic"/>
+                <a:latin typeface="Arial"/>
+                <a:cs typeface="Arial"/>
               </a:rPr>
               <a:t>KEY MESSAGE   </a:t>
             </a:r>
@@ -14939,8 +14813,8 @@
                 <a:solidFill>
                   <a:srgbClr val="FFFFFF"/>
                 </a:solidFill>
-                <a:latin typeface="Century Gothic"/>
-                <a:cs typeface="Century Gothic"/>
+                <a:latin typeface="Arial"/>
+                <a:cs typeface="Arial"/>
               </a:rPr>
               <a:t>Never cite a paper you have not read.</a:t>
             </a:r>
@@ -14977,7 +14851,7 @@
                     <a:lumMod val="50000"/>
                   </a:schemeClr>
                 </a:solidFill>
-                <a:latin typeface="Verdana"/>
+                <a:latin typeface="Arial"/>
               </a:rPr>
               <a:t>Neudata | #ClearDataClearImpact</a:t>
             </a:r>
@@ -15107,8 +14981,8 @@
                 <a:solidFill>
                   <a:srgbClr val="0D7377"/>
                 </a:solidFill>
-                <a:latin typeface="Century Gothic"/>
-                <a:cs typeface="Century Gothic"/>
+                <a:latin typeface="Arial"/>
+                <a:cs typeface="Arial"/>
               </a:rPr>
               <a:t>Check your understanding: OK or not OK?</a:t>
             </a:r>
@@ -15178,8 +15052,8 @@
                 <a:solidFill>
                   <a:srgbClr val="FFFFFF"/>
                 </a:solidFill>
-                <a:latin typeface="Century Gothic"/>
-                <a:cs typeface="Century Gothic"/>
+                <a:latin typeface="Arial"/>
+                <a:cs typeface="Arial"/>
               </a:rPr>
               <a:t>QUICK QUIZ   |   2 min</a:t>
             </a:r>
@@ -15216,25 +15090,19 @@
               <a:spcBef>
                 <a:spcPts val="450"/>
               </a:spcBef>
-              <a:buNone/>
-            </a:pPr>
-            <a:r>
-              <a:rPr lang="en-US" sz="1650" b="1" dirty="0">
-                <a:solidFill>
-                  <a:srgbClr val="6C3483"/>
-                </a:solidFill>
-                <a:latin typeface="Century Gothic"/>
-                <a:cs typeface="Century Gothic"/>
-              </a:rPr>
-              <a:t>1.  </a:t>
-            </a:r>
+              <a:buClr>
+                <a:srgbClr val="6C3483"/>
+              </a:buClr>
+              <a:buFont typeface="Arial"/>
+              <a:buChar char="•"/>
+            </a:pPr>
             <a:r>
               <a:rPr lang="en-US" sz="1650" dirty="0">
                 <a:solidFill>
                   <a:srgbClr val="000000"/>
                 </a:solidFill>
-                <a:latin typeface="Century Gothic"/>
-                <a:cs typeface="Century Gothic"/>
+                <a:latin typeface="Arial"/>
+                <a:cs typeface="Arial"/>
               </a:rPr>
               <a:t>You copy a sentence from an abstract, change two words and add [3]</a:t>
             </a:r>
@@ -15247,25 +15115,19 @@
               <a:spcBef>
                 <a:spcPts val="450"/>
               </a:spcBef>
-              <a:buNone/>
-            </a:pPr>
-            <a:r>
-              <a:rPr lang="en-US" sz="1650" b="1" dirty="0">
-                <a:solidFill>
-                  <a:srgbClr val="6C3483"/>
-                </a:solidFill>
-                <a:latin typeface="Century Gothic"/>
-                <a:cs typeface="Century Gothic"/>
-              </a:rPr>
-              <a:t>2.  </a:t>
-            </a:r>
+              <a:buClr>
+                <a:srgbClr val="6C3483"/>
+              </a:buClr>
+              <a:buFont typeface="Arial"/>
+              <a:buChar char="•"/>
+            </a:pPr>
             <a:r>
               <a:rPr lang="en-US" sz="1650" dirty="0">
                 <a:solidFill>
                   <a:srgbClr val="000000"/>
                 </a:solidFill>
-                <a:latin typeface="Century Gothic"/>
-                <a:cs typeface="Century Gothic"/>
+                <a:latin typeface="Arial"/>
+                <a:cs typeface="Arial"/>
               </a:rPr>
               <a:t>You quote one sentence word for word, in quotation marks, with [3]</a:t>
             </a:r>
@@ -15278,25 +15140,19 @@
               <a:spcBef>
                 <a:spcPts val="450"/>
               </a:spcBef>
-              <a:buNone/>
-            </a:pPr>
-            <a:r>
-              <a:rPr lang="en-US" sz="1650" b="1" dirty="0">
-                <a:solidFill>
-                  <a:srgbClr val="6C3483"/>
-                </a:solidFill>
-                <a:latin typeface="Century Gothic"/>
-                <a:cs typeface="Century Gothic"/>
-              </a:rPr>
-              <a:t>3.  </a:t>
-            </a:r>
+              <a:buClr>
+                <a:srgbClr val="6C3483"/>
+              </a:buClr>
+              <a:buFont typeface="Arial"/>
+              <a:buChar char="•"/>
+            </a:pPr>
             <a:r>
               <a:rPr lang="en-US" sz="1650" dirty="0">
                 <a:solidFill>
                   <a:srgbClr val="000000"/>
                 </a:solidFill>
-                <a:latin typeface="Century Gothic"/>
-                <a:cs typeface="Century Gothic"/>
+                <a:latin typeface="Arial"/>
+                <a:cs typeface="Arial"/>
               </a:rPr>
               <a:t>You write a finding in your own words but forget the citation</a:t>
             </a:r>
@@ -15309,25 +15165,19 @@
               <a:spcBef>
                 <a:spcPts val="450"/>
               </a:spcBef>
-              <a:buNone/>
-            </a:pPr>
-            <a:r>
-              <a:rPr lang="en-US" sz="1650" b="1" dirty="0">
-                <a:solidFill>
-                  <a:srgbClr val="6C3483"/>
-                </a:solidFill>
-                <a:latin typeface="Century Gothic"/>
-                <a:cs typeface="Century Gothic"/>
-              </a:rPr>
-              <a:t>4.  </a:t>
-            </a:r>
+              <a:buClr>
+                <a:srgbClr val="6C3483"/>
+              </a:buClr>
+              <a:buFont typeface="Arial"/>
+              <a:buChar char="•"/>
+            </a:pPr>
             <a:r>
               <a:rPr lang="en-US" sz="1650" dirty="0">
                 <a:solidFill>
                   <a:srgbClr val="000000"/>
                 </a:solidFill>
-                <a:latin typeface="Century Gothic"/>
-                <a:cs typeface="Century Gothic"/>
+                <a:latin typeface="Arial"/>
+                <a:cs typeface="Arial"/>
               </a:rPr>
               <a:t>You cite a paper you found quoted in a review, without reading it</a:t>
             </a:r>
@@ -15373,8 +15223,8 @@
                 <a:solidFill>
                   <a:srgbClr val="6C3483"/>
                 </a:solidFill>
-                <a:latin typeface="Century Gothic"/>
-                <a:cs typeface="Century Gothic"/>
+                <a:latin typeface="Arial"/>
+                <a:cs typeface="Arial"/>
               </a:rPr>
               <a:t>OUTPUT   </a:t>
             </a:r>
@@ -15383,8 +15233,8 @@
                 <a:solidFill>
                   <a:srgbClr val="000000"/>
                 </a:solidFill>
-                <a:latin typeface="Century Gothic"/>
-                <a:cs typeface="Century Gothic"/>
+                <a:latin typeface="Arial"/>
+                <a:cs typeface="Arial"/>
               </a:rPr>
               <a:t>Thumbs up (OK) or down (not OK) for each</a:t>
             </a:r>
@@ -15421,7 +15271,7 @@
                     <a:lumMod val="50000"/>
                   </a:schemeClr>
                 </a:solidFill>
-                <a:latin typeface="Verdana"/>
+                <a:latin typeface="Arial"/>
               </a:rPr>
               <a:t>Neudata | #ClearDataClearImpact</a:t>
             </a:r>
@@ -15551,8 +15401,8 @@
                 <a:solidFill>
                   <a:srgbClr val="0D7377"/>
                 </a:solidFill>
-                <a:latin typeface="Century Gothic"/>
-                <a:cs typeface="Century Gothic"/>
+                <a:latin typeface="Arial"/>
+                <a:cs typeface="Arial"/>
               </a:rPr>
               <a:t>Grey literature and trial registries</a:t>
             </a:r>
@@ -15648,8 +15498,8 @@
                 <a:solidFill>
                   <a:srgbClr val="FFFFFF"/>
                 </a:solidFill>
-                <a:latin typeface="Century Gothic"/>
-                <a:cs typeface="Century Gothic"/>
+                <a:latin typeface="Arial"/>
+                <a:cs typeface="Arial"/>
               </a:rPr>
               <a:t>KEY MESSAGE   </a:t>
             </a:r>
@@ -15658,8 +15508,8 @@
                 <a:solidFill>
                   <a:srgbClr val="FFFFFF"/>
                 </a:solidFill>
-                <a:latin typeface="Century Gothic"/>
-                <a:cs typeface="Century Gothic"/>
+                <a:latin typeface="Arial"/>
+                <a:cs typeface="Arial"/>
               </a:rPr>
               <a:t>Look below the waterline: registries and grey literature reduce publication bias.</a:t>
             </a:r>
@@ -15696,7 +15546,7 @@
                     <a:lumMod val="50000"/>
                   </a:schemeClr>
                 </a:solidFill>
-                <a:latin typeface="Verdana"/>
+                <a:latin typeface="Arial"/>
               </a:rPr>
               <a:t>Neudata | #ClearDataClearImpact</a:t>
             </a:r>
@@ -15826,8 +15676,8 @@
                 <a:solidFill>
                   <a:srgbClr val="0D7377"/>
                 </a:solidFill>
-                <a:latin typeface="Century Gothic"/>
-                <a:cs typeface="Century Gothic"/>
+                <a:latin typeface="Arial"/>
+                <a:cs typeface="Arial"/>
               </a:rPr>
               <a:t>Break</a:t>
             </a:r>
@@ -15897,8 +15747,8 @@
                 <a:solidFill>
                   <a:srgbClr val="FFFFFF"/>
                 </a:solidFill>
-                <a:latin typeface="Century Gothic"/>
-                <a:cs typeface="Century Gothic"/>
+                <a:latin typeface="Arial"/>
+                <a:cs typeface="Arial"/>
               </a:rPr>
               <a:t>BREAK   |   15 min</a:t>
             </a:r>
@@ -15935,25 +15785,19 @@
               <a:spcBef>
                 <a:spcPts val="450"/>
               </a:spcBef>
-              <a:buNone/>
-            </a:pPr>
-            <a:r>
-              <a:rPr lang="en-US" sz="1650" b="1" dirty="0">
-                <a:solidFill>
-                  <a:srgbClr val="8A99A3"/>
-                </a:solidFill>
-                <a:latin typeface="Century Gothic"/>
-                <a:cs typeface="Century Gothic"/>
-              </a:rPr>
-              <a:t>1.  </a:t>
-            </a:r>
+              <a:buClr>
+                <a:srgbClr val="8A99A3"/>
+              </a:buClr>
+              <a:buFont typeface="Arial"/>
+              <a:buChar char="•"/>
+            </a:pPr>
             <a:r>
               <a:rPr lang="en-US" sz="1650" dirty="0">
                 <a:solidFill>
                   <a:srgbClr val="000000"/>
                 </a:solidFill>
-                <a:latin typeface="Century Gothic"/>
-                <a:cs typeface="Century Gothic"/>
+                <a:latin typeface="Arial"/>
+                <a:cs typeface="Arial"/>
               </a:rPr>
               <a:t>Stretch, coffee, talk to someone from another profession</a:t>
             </a:r>
@@ -15966,25 +15810,19 @@
               <a:spcBef>
                 <a:spcPts val="450"/>
               </a:spcBef>
-              <a:buNone/>
-            </a:pPr>
-            <a:r>
-              <a:rPr lang="en-US" sz="1650" b="1" dirty="0">
-                <a:solidFill>
-                  <a:srgbClr val="8A99A3"/>
-                </a:solidFill>
-                <a:latin typeface="Century Gothic"/>
-                <a:cs typeface="Century Gothic"/>
-              </a:rPr>
-              <a:t>2.  </a:t>
-            </a:r>
+              <a:buClr>
+                <a:srgbClr val="8A99A3"/>
+              </a:buClr>
+              <a:buFont typeface="Arial"/>
+              <a:buChar char="•"/>
+            </a:pPr>
             <a:r>
               <a:rPr lang="en-US" sz="1650" dirty="0">
                 <a:solidFill>
                   <a:srgbClr val="000000"/>
                 </a:solidFill>
-                <a:latin typeface="Century Gothic"/>
-                <a:cs typeface="Century Gothic"/>
+                <a:latin typeface="Arial"/>
+                <a:cs typeface="Arial"/>
               </a:rPr>
               <a:t>Think: which problem from your ward could your group work on today?</a:t>
             </a:r>
@@ -16021,7 +15859,7 @@
                     <a:lumMod val="50000"/>
                   </a:schemeClr>
                 </a:solidFill>
-                <a:latin typeface="Verdana"/>
+                <a:latin typeface="Arial"/>
               </a:rPr>
               <a:t>Neudata | #ClearDataClearImpact</a:t>
             </a:r>
@@ -16151,8 +15989,8 @@
                 <a:solidFill>
                   <a:srgbClr val="0D7377"/>
                 </a:solidFill>
-                <a:latin typeface="Century Gothic"/>
-                <a:cs typeface="Century Gothic"/>
+                <a:latin typeface="Arial"/>
+                <a:cs typeface="Arial"/>
               </a:rPr>
               <a:t>2.3  Reading a paper in 15 minutes</a:t>
             </a:r>
@@ -16221,8 +16059,8 @@
                 <a:solidFill>
                   <a:srgbClr val="0D7377"/>
                 </a:solidFill>
-                <a:latin typeface="Century Gothic"/>
-                <a:cs typeface="Century Gothic"/>
+                <a:latin typeface="Arial"/>
+                <a:cs typeface="Arial"/>
               </a:rPr>
               <a:t>You do not have to read every word. Read the right words in the right order.</a:t>
             </a:r>
@@ -16239,8 +16077,8 @@
                 <a:solidFill>
                   <a:srgbClr val="595959"/>
                 </a:solidFill>
-                <a:latin typeface="Century Gothic"/>
-                <a:cs typeface="Century Gothic"/>
+                <a:latin typeface="Arial"/>
+                <a:cs typeface="Arial"/>
               </a:rPr>
               <a:t>40 minutes: anatomy of a paper, reading order, the abstract, spin, and a reading task on Paper 1</a:t>
             </a:r>
@@ -16277,7 +16115,7 @@
                     <a:lumMod val="50000"/>
                   </a:schemeClr>
                 </a:solidFill>
-                <a:latin typeface="Verdana"/>
+                <a:latin typeface="Arial"/>
               </a:rPr>
               <a:t>Neudata | #ClearDataClearImpact</a:t>
             </a:r>
@@ -16407,8 +16245,8 @@
                 <a:solidFill>
                   <a:srgbClr val="0D7377"/>
                 </a:solidFill>
-                <a:latin typeface="Century Gothic"/>
-                <a:cs typeface="Century Gothic"/>
+                <a:latin typeface="Arial"/>
+                <a:cs typeface="Arial"/>
               </a:rPr>
               <a:t>Anatomy of a paper: IMRaD</a:t>
             </a:r>
@@ -16504,8 +16342,8 @@
                 <a:solidFill>
                   <a:srgbClr val="FFFFFF"/>
                 </a:solidFill>
-                <a:latin typeface="Century Gothic"/>
-                <a:cs typeface="Century Gothic"/>
+                <a:latin typeface="Arial"/>
+                <a:cs typeface="Arial"/>
               </a:rPr>
               <a:t>KEY MESSAGE   </a:t>
             </a:r>
@@ -16514,8 +16352,8 @@
                 <a:solidFill>
                   <a:srgbClr val="FFFFFF"/>
                 </a:solidFill>
-                <a:latin typeface="Century Gothic"/>
-                <a:cs typeface="Century Gothic"/>
+                <a:latin typeface="Arial"/>
+                <a:cs typeface="Arial"/>
               </a:rPr>
               <a:t>Every original paper has the same shape: why, how, what, so what.</a:t>
             </a:r>
@@ -16552,7 +16390,7 @@
                     <a:lumMod val="50000"/>
                   </a:schemeClr>
                 </a:solidFill>
-                <a:latin typeface="Verdana"/>
+                <a:latin typeface="Arial"/>
               </a:rPr>
               <a:t>Neudata | #ClearDataClearImpact</a:t>
             </a:r>
@@ -16682,8 +16520,8 @@
                 <a:solidFill>
                   <a:srgbClr val="0D7377"/>
                 </a:solidFill>
-                <a:latin typeface="Century Gothic"/>
-                <a:cs typeface="Century Gothic"/>
+                <a:latin typeface="Arial"/>
+                <a:cs typeface="Arial"/>
               </a:rPr>
               <a:t>The 15-minute reading order</a:t>
             </a:r>
@@ -16779,8 +16617,8 @@
                 <a:solidFill>
                   <a:srgbClr val="FFFFFF"/>
                 </a:solidFill>
-                <a:latin typeface="Century Gothic"/>
-                <a:cs typeface="Century Gothic"/>
+                <a:latin typeface="Arial"/>
+                <a:cs typeface="Arial"/>
               </a:rPr>
               <a:t>KEY MESSAGE   </a:t>
             </a:r>
@@ -16789,8 +16627,8 @@
                 <a:solidFill>
                   <a:srgbClr val="FFFFFF"/>
                 </a:solidFill>
-                <a:latin typeface="Century Gothic"/>
-                <a:cs typeface="Century Gothic"/>
+                <a:latin typeface="Arial"/>
+                <a:cs typeface="Arial"/>
               </a:rPr>
               <a:t>Title, abstract, figures and tables, methods. Stop early if it is not relevant.</a:t>
             </a:r>
@@ -16827,7 +16665,7 @@
                     <a:lumMod val="50000"/>
                   </a:schemeClr>
                 </a:solidFill>
-                <a:latin typeface="Verdana"/>
+                <a:latin typeface="Arial"/>
               </a:rPr>
               <a:t>Neudata | #ClearDataClearImpact</a:t>
             </a:r>
@@ -16957,8 +16795,8 @@
                 <a:solidFill>
                   <a:srgbClr val="0D7377"/>
                 </a:solidFill>
-                <a:latin typeface="Century Gothic"/>
-                <a:cs typeface="Century Gothic"/>
+                <a:latin typeface="Arial"/>
+                <a:cs typeface="Arial"/>
               </a:rPr>
               <a:t>What an abstract must contain</a:t>
             </a:r>
@@ -17054,8 +16892,8 @@
                 <a:solidFill>
                   <a:srgbClr val="FFFFFF"/>
                 </a:solidFill>
-                <a:latin typeface="Century Gothic"/>
-                <a:cs typeface="Century Gothic"/>
+                <a:latin typeface="Arial"/>
+                <a:cs typeface="Arial"/>
               </a:rPr>
               <a:t>KEY MESSAGE   </a:t>
             </a:r>
@@ -17064,8 +16902,8 @@
                 <a:solidFill>
                   <a:srgbClr val="FFFFFF"/>
                 </a:solidFill>
-                <a:latin typeface="Century Gothic"/>
-                <a:cs typeface="Century Gothic"/>
+                <a:latin typeface="Arial"/>
+                <a:cs typeface="Arial"/>
               </a:rPr>
               <a:t>A good abstract lets you write the PICO and the main result without opening the paper.</a:t>
             </a:r>
@@ -17102,7 +16940,7 @@
                     <a:lumMod val="50000"/>
                   </a:schemeClr>
                 </a:solidFill>
-                <a:latin typeface="Verdana"/>
+                <a:latin typeface="Arial"/>
               </a:rPr>
               <a:t>Neudata | #ClearDataClearImpact</a:t>
             </a:r>
@@ -17232,8 +17070,8 @@
                 <a:solidFill>
                   <a:srgbClr val="0D7377"/>
                 </a:solidFill>
-                <a:latin typeface="Century Gothic"/>
-                <a:cs typeface="Century Gothic"/>
+                <a:latin typeface="Arial"/>
+                <a:cs typeface="Arial"/>
               </a:rPr>
               <a:t>A results sentence: poor vs good</a:t>
             </a:r>
@@ -17329,8 +17167,8 @@
                 <a:solidFill>
                   <a:srgbClr val="FFFFFF"/>
                 </a:solidFill>
-                <a:latin typeface="Century Gothic"/>
-                <a:cs typeface="Century Gothic"/>
+                <a:latin typeface="Arial"/>
+                <a:cs typeface="Arial"/>
               </a:rPr>
               <a:t>KEY MESSAGE   </a:t>
             </a:r>
@@ -17339,8 +17177,8 @@
                 <a:solidFill>
                   <a:srgbClr val="FFFFFF"/>
                 </a:solidFill>
-                <a:latin typeface="Century Gothic"/>
-                <a:cs typeface="Century Gothic"/>
+                <a:latin typeface="Arial"/>
+                <a:cs typeface="Arial"/>
               </a:rPr>
               <a:t>Every main result needs: numbers per group, an effect size, a 95% CI and a time point.</a:t>
             </a:r>
@@ -17377,7 +17215,7 @@
                     <a:lumMod val="50000"/>
                   </a:schemeClr>
                 </a:solidFill>
-                <a:latin typeface="Verdana"/>
+                <a:latin typeface="Arial"/>
               </a:rPr>
               <a:t>Neudata | #ClearDataClearImpact</a:t>
             </a:r>
@@ -17507,8 +17345,8 @@
                 <a:solidFill>
                   <a:srgbClr val="0D7377"/>
                 </a:solidFill>
-                <a:latin typeface="Century Gothic"/>
-                <a:cs typeface="Century Gothic"/>
+                <a:latin typeface="Arial"/>
+                <a:cs typeface="Arial"/>
               </a:rPr>
               <a:t>Spin: when words go beyond the data</a:t>
             </a:r>
@@ -17604,8 +17442,8 @@
                 <a:solidFill>
                   <a:srgbClr val="FFFFFF"/>
                 </a:solidFill>
-                <a:latin typeface="Century Gothic"/>
-                <a:cs typeface="Century Gothic"/>
+                <a:latin typeface="Arial"/>
+                <a:cs typeface="Arial"/>
               </a:rPr>
               <a:t>KEY MESSAGE   </a:t>
             </a:r>
@@ -17614,8 +17452,8 @@
                 <a:solidFill>
                   <a:srgbClr val="FFFFFF"/>
                 </a:solidFill>
-                <a:latin typeface="Century Gothic"/>
-                <a:cs typeface="Century Gothic"/>
+                <a:latin typeface="Arial"/>
+                <a:cs typeface="Arial"/>
               </a:rPr>
               <a:t>Read the numbers first, then check whether the words match them.</a:t>
             </a:r>
@@ -17652,7 +17490,7 @@
                     <a:lumMod val="50000"/>
                   </a:schemeClr>
                 </a:solidFill>
-                <a:latin typeface="Verdana"/>
+                <a:latin typeface="Arial"/>
               </a:rPr>
               <a:t>Neudata | #ClearDataClearImpact</a:t>
             </a:r>
@@ -17782,8 +17620,8 @@
                 <a:solidFill>
                   <a:srgbClr val="0D7377"/>
                 </a:solidFill>
-                <a:latin typeface="Century Gothic"/>
-                <a:cs typeface="Century Gothic"/>
+                <a:latin typeface="Arial"/>
+                <a:cs typeface="Arial"/>
               </a:rPr>
               <a:t>Recap quiz: answers</a:t>
             </a:r>
@@ -17853,10 +17691,10 @@
                 <a:solidFill>
                   <a:srgbClr val="FFFFFF"/>
                 </a:solidFill>
-                <a:latin typeface="Century Gothic"/>
-                <a:cs typeface="Century Gothic"/>
-              </a:rPr>
-              <a:t>1. Audit</a:t>
+                <a:latin typeface="Arial"/>
+                <a:cs typeface="Arial"/>
+              </a:rPr>
+              <a:t>Audit</a:t>
             </a:r>
           </a:p>
         </p:txBody>
@@ -17902,8 +17740,8 @@
                 <a:solidFill>
                   <a:srgbClr val="000000"/>
                 </a:solidFill>
-                <a:latin typeface="Century Gothic"/>
-                <a:cs typeface="Century Gothic"/>
+                <a:latin typeface="Arial"/>
+                <a:cs typeface="Arial"/>
               </a:rPr>
               <a:t>Checking practice</a:t>
             </a:r>
@@ -17923,8 +17761,8 @@
                 <a:solidFill>
                   <a:srgbClr val="000000"/>
                 </a:solidFill>
-                <a:latin typeface="Century Gothic"/>
-                <a:cs typeface="Century Gothic"/>
+                <a:latin typeface="Arial"/>
+                <a:cs typeface="Arial"/>
               </a:rPr>
               <a:t>against a standard</a:t>
             </a:r>
@@ -17966,10 +17804,10 @@
                 <a:solidFill>
                   <a:srgbClr val="FFFFFF"/>
                 </a:solidFill>
-                <a:latin typeface="Century Gothic"/>
-                <a:cs typeface="Century Gothic"/>
-              </a:rPr>
-              <a:t>2. PICO(T)</a:t>
+                <a:latin typeface="Arial"/>
+                <a:cs typeface="Arial"/>
+              </a:rPr>
+              <a:t>PICO(T)</a:t>
             </a:r>
           </a:p>
         </p:txBody>
@@ -18015,8 +17853,8 @@
                 <a:solidFill>
                   <a:srgbClr val="000000"/>
                 </a:solidFill>
-                <a:latin typeface="Century Gothic"/>
-                <a:cs typeface="Century Gothic"/>
+                <a:latin typeface="Arial"/>
+                <a:cs typeface="Arial"/>
               </a:rPr>
               <a:t>P ICU staff</a:t>
             </a:r>
@@ -18036,8 +17874,8 @@
                 <a:solidFill>
                   <a:srgbClr val="000000"/>
                 </a:solidFill>
-                <a:latin typeface="Century Gothic"/>
-                <a:cs typeface="Century Gothic"/>
+                <a:latin typeface="Arial"/>
+                <a:cs typeface="Arial"/>
               </a:rPr>
               <a:t>I feedback  C none</a:t>
             </a:r>
@@ -18057,8 +17895,8 @@
                 <a:solidFill>
                   <a:srgbClr val="000000"/>
                 </a:solidFill>
-                <a:latin typeface="Century Gothic"/>
-                <a:cs typeface="Century Gothic"/>
+                <a:latin typeface="Arial"/>
+                <a:cs typeface="Arial"/>
               </a:rPr>
               <a:t>O compliance</a:t>
             </a:r>
@@ -18078,8 +17916,8 @@
                 <a:solidFill>
                   <a:srgbClr val="000000"/>
                 </a:solidFill>
-                <a:latin typeface="Century Gothic"/>
-                <a:cs typeface="Century Gothic"/>
+                <a:latin typeface="Arial"/>
+                <a:cs typeface="Arial"/>
               </a:rPr>
               <a:t>T 3 months</a:t>
             </a:r>
@@ -18121,10 +17959,10 @@
                 <a:solidFill>
                   <a:srgbClr val="FFFFFF"/>
                 </a:solidFill>
-                <a:latin typeface="Century Gothic"/>
-                <a:cs typeface="Century Gothic"/>
-              </a:rPr>
-              <a:t>3. Feasible</a:t>
+                <a:latin typeface="Arial"/>
+                <a:cs typeface="Arial"/>
+              </a:rPr>
+              <a:t>Feasible</a:t>
             </a:r>
           </a:p>
         </p:txBody>
@@ -18170,8 +18008,8 @@
                 <a:solidFill>
                   <a:srgbClr val="000000"/>
                 </a:solidFill>
-                <a:latin typeface="Century Gothic"/>
-                <a:cs typeface="Century Gothic"/>
+                <a:latin typeface="Arial"/>
+                <a:cs typeface="Arial"/>
               </a:rPr>
               <a:t>Mortality needs</a:t>
             </a:r>
@@ -18191,8 +18029,8 @@
                 <a:solidFill>
                   <a:srgbClr val="000000"/>
                 </a:solidFill>
-                <a:latin typeface="Century Gothic"/>
-                <a:cs typeface="Century Gothic"/>
+                <a:latin typeface="Arial"/>
+                <a:cs typeface="Arial"/>
               </a:rPr>
               <a:t>1,000+ patients</a:t>
             </a:r>
@@ -18234,10 +18072,10 @@
                 <a:solidFill>
                   <a:srgbClr val="FFFFFF"/>
                 </a:solidFill>
-                <a:latin typeface="Century Gothic"/>
-                <a:cs typeface="Century Gothic"/>
-              </a:rPr>
-              <a:t>4. Estimate</a:t>
+                <a:latin typeface="Arial"/>
+                <a:cs typeface="Arial"/>
+              </a:rPr>
+              <a:t>Estimate</a:t>
             </a:r>
           </a:p>
         </p:txBody>
@@ -18283,8 +18121,8 @@
                 <a:solidFill>
                   <a:srgbClr val="000000"/>
                 </a:solidFill>
-                <a:latin typeface="Century Gothic"/>
-                <a:cs typeface="Century Gothic"/>
+                <a:latin typeface="Arial"/>
+                <a:cs typeface="Arial"/>
               </a:rPr>
               <a:t>A measurable verb;</a:t>
             </a:r>
@@ -18304,8 +18142,8 @@
                 <a:solidFill>
                   <a:srgbClr val="000000"/>
                 </a:solidFill>
-                <a:latin typeface="Century Gothic"/>
-                <a:cs typeface="Century Gothic"/>
+                <a:latin typeface="Arial"/>
+                <a:cs typeface="Arial"/>
               </a:rPr>
               <a:t>'understand' is not</a:t>
             </a:r>
@@ -18347,10 +18185,10 @@
                 <a:solidFill>
                   <a:srgbClr val="FFFFFF"/>
                 </a:solidFill>
-                <a:latin typeface="Century Gothic"/>
-                <a:cs typeface="Century Gothic"/>
-              </a:rPr>
-              <a:t>5. H0</a:t>
+                <a:latin typeface="Arial"/>
+                <a:cs typeface="Arial"/>
+              </a:rPr>
+              <a:t>H0</a:t>
             </a:r>
           </a:p>
         </p:txBody>
@@ -18396,8 +18234,8 @@
                 <a:solidFill>
                   <a:srgbClr val="000000"/>
                 </a:solidFill>
-                <a:latin typeface="Century Gothic"/>
-                <a:cs typeface="Century Gothic"/>
+                <a:latin typeface="Arial"/>
+                <a:cs typeface="Arial"/>
               </a:rPr>
               <a:t>ICU stay is the</a:t>
             </a:r>
@@ -18417,8 +18255,8 @@
                 <a:solidFill>
                   <a:srgbClr val="000000"/>
                 </a:solidFill>
-                <a:latin typeface="Century Gothic"/>
-                <a:cs typeface="Century Gothic"/>
+                <a:latin typeface="Arial"/>
+                <a:cs typeface="Arial"/>
               </a:rPr>
               <a:t>same with early</a:t>
             </a:r>
@@ -18438,8 +18276,8 @@
                 <a:solidFill>
                   <a:srgbClr val="000000"/>
                 </a:solidFill>
-                <a:latin typeface="Century Gothic"/>
-                <a:cs typeface="Century Gothic"/>
+                <a:latin typeface="Arial"/>
+                <a:cs typeface="Arial"/>
               </a:rPr>
               <a:t>mobilisation and</a:t>
             </a:r>
@@ -18459,8 +18297,8 @@
                 <a:solidFill>
                   <a:srgbClr val="000000"/>
                 </a:solidFill>
-                <a:latin typeface="Century Gothic"/>
-                <a:cs typeface="Century Gothic"/>
+                <a:latin typeface="Arial"/>
+                <a:cs typeface="Arial"/>
               </a:rPr>
               <a:t>usual care</a:t>
             </a:r>
@@ -18504,8 +18342,8 @@
                 <a:solidFill>
                   <a:srgbClr val="FFFFFF"/>
                 </a:solidFill>
-                <a:latin typeface="Century Gothic"/>
-                <a:cs typeface="Century Gothic"/>
+                <a:latin typeface="Arial"/>
+                <a:cs typeface="Arial"/>
               </a:rPr>
               <a:t>KEY MESSAGE   </a:t>
             </a:r>
@@ -18514,8 +18352,8 @@
                 <a:solidFill>
                   <a:srgbClr val="FFFFFF"/>
                 </a:solidFill>
-                <a:latin typeface="Century Gothic"/>
-                <a:cs typeface="Century Gothic"/>
+                <a:latin typeface="Arial"/>
+                <a:cs typeface="Arial"/>
               </a:rPr>
               <a:t>If you got 4 or 5 right, you are ready for today.</a:t>
             </a:r>
@@ -18552,7 +18390,7 @@
                     <a:lumMod val="50000"/>
                   </a:schemeClr>
                 </a:solidFill>
-                <a:latin typeface="Verdana"/>
+                <a:latin typeface="Arial"/>
               </a:rPr>
               <a:t>Neudata | #ClearDataClearImpact</a:t>
             </a:r>
@@ -18682,8 +18520,8 @@
                 <a:solidFill>
                   <a:srgbClr val="0D7377"/>
                 </a:solidFill>
-                <a:latin typeface="Century Gothic"/>
-                <a:cs typeface="Century Gothic"/>
+                <a:latin typeface="Arial"/>
+                <a:cs typeface="Arial"/>
               </a:rPr>
               <a:t>Check your understanding: spot the spin</a:t>
             </a:r>
@@ -18753,8 +18591,8 @@
                 <a:solidFill>
                   <a:srgbClr val="FFFFFF"/>
                 </a:solidFill>
-                <a:latin typeface="Century Gothic"/>
-                <a:cs typeface="Century Gothic"/>
+                <a:latin typeface="Arial"/>
+                <a:cs typeface="Arial"/>
               </a:rPr>
               <a:t>QUICK QUIZ   |   3 min</a:t>
             </a:r>
@@ -18791,25 +18629,19 @@
               <a:spcBef>
                 <a:spcPts val="450"/>
               </a:spcBef>
-              <a:buNone/>
-            </a:pPr>
-            <a:r>
-              <a:rPr lang="en-US" sz="1650" b="1" dirty="0">
-                <a:solidFill>
-                  <a:srgbClr val="6C3483"/>
-                </a:solidFill>
-                <a:latin typeface="Century Gothic"/>
-                <a:cs typeface="Century Gothic"/>
-              </a:rPr>
-              <a:t>1.  </a:t>
-            </a:r>
+              <a:buClr>
+                <a:srgbClr val="6C3483"/>
+              </a:buClr>
+              <a:buFont typeface="Arial"/>
+              <a:buChar char="•"/>
+            </a:pPr>
             <a:r>
               <a:rPr lang="en-US" sz="1650" dirty="0">
                 <a:solidFill>
                   <a:srgbClr val="000000"/>
                 </a:solidFill>
-                <a:latin typeface="Century Gothic"/>
-                <a:cs typeface="Century Gothic"/>
+                <a:latin typeface="Arial"/>
+                <a:cs typeface="Arial"/>
               </a:rPr>
               <a:t>A cohort study: 'Early feeding REDUCES pneumonia in stroke patients'</a:t>
             </a:r>
@@ -18822,25 +18654,19 @@
               <a:spcBef>
                 <a:spcPts val="450"/>
               </a:spcBef>
-              <a:buNone/>
-            </a:pPr>
-            <a:r>
-              <a:rPr lang="en-US" sz="1650" b="1" dirty="0">
-                <a:solidFill>
-                  <a:srgbClr val="6C3483"/>
-                </a:solidFill>
-                <a:latin typeface="Century Gothic"/>
-                <a:cs typeface="Century Gothic"/>
-              </a:rPr>
-              <a:t>2.  </a:t>
-            </a:r>
+              <a:buClr>
+                <a:srgbClr val="6C3483"/>
+              </a:buClr>
+              <a:buFont typeface="Arial"/>
+              <a:buChar char="•"/>
+            </a:pPr>
             <a:r>
               <a:rPr lang="en-US" sz="1650" dirty="0">
                 <a:solidFill>
                   <a:srgbClr val="000000"/>
                 </a:solidFill>
-                <a:latin typeface="Century Gothic"/>
-                <a:cs typeface="Century Gothic"/>
+                <a:latin typeface="Arial"/>
+                <a:cs typeface="Arial"/>
               </a:rPr>
               <a:t>Primary outcome p = 0.31: 'a promising trend towards benefit'</a:t>
             </a:r>
@@ -18853,25 +18679,19 @@
               <a:spcBef>
                 <a:spcPts val="450"/>
               </a:spcBef>
-              <a:buNone/>
-            </a:pPr>
-            <a:r>
-              <a:rPr lang="en-US" sz="1650" b="1" dirty="0">
-                <a:solidFill>
-                  <a:srgbClr val="6C3483"/>
-                </a:solidFill>
-                <a:latin typeface="Century Gothic"/>
-                <a:cs typeface="Century Gothic"/>
-              </a:rPr>
-              <a:t>3.  </a:t>
-            </a:r>
+              <a:buClr>
+                <a:srgbClr val="6C3483"/>
+              </a:buClr>
+              <a:buFont typeface="Arial"/>
+              <a:buChar char="•"/>
+            </a:pPr>
             <a:r>
               <a:rPr lang="en-US" sz="1650" dirty="0">
                 <a:solidFill>
                   <a:srgbClr val="000000"/>
                 </a:solidFill>
-                <a:latin typeface="Century Gothic"/>
-                <a:cs typeface="Century Gothic"/>
+                <a:latin typeface="Arial"/>
+                <a:cs typeface="Arial"/>
               </a:rPr>
               <a:t>Primary outcome no difference; abstract headline: 'improved patient satisfaction'</a:t>
             </a:r>
@@ -18884,25 +18704,19 @@
               <a:spcBef>
                 <a:spcPts val="450"/>
               </a:spcBef>
-              <a:buNone/>
-            </a:pPr>
-            <a:r>
-              <a:rPr lang="en-US" sz="1650" b="1" dirty="0">
-                <a:solidFill>
-                  <a:srgbClr val="6C3483"/>
-                </a:solidFill>
-                <a:latin typeface="Century Gothic"/>
-                <a:cs typeface="Century Gothic"/>
-              </a:rPr>
-              <a:t>4.  </a:t>
-            </a:r>
+              <a:buClr>
+                <a:srgbClr val="6C3483"/>
+              </a:buClr>
+              <a:buFont typeface="Arial"/>
+              <a:buChar char="•"/>
+            </a:pPr>
             <a:r>
               <a:rPr lang="en-US" sz="1650" dirty="0">
                 <a:solidFill>
                   <a:srgbClr val="000000"/>
                 </a:solidFill>
-                <a:latin typeface="Century Gothic"/>
-                <a:cs typeface="Century Gothic"/>
+                <a:latin typeface="Arial"/>
+                <a:cs typeface="Arial"/>
               </a:rPr>
               <a:t>'Mortality fell from 30% to 22% after the new protocol' (no control group)</a:t>
             </a:r>
@@ -18948,8 +18762,8 @@
                 <a:solidFill>
                   <a:srgbClr val="6C3483"/>
                 </a:solidFill>
-                <a:latin typeface="Century Gothic"/>
-                <a:cs typeface="Century Gothic"/>
+                <a:latin typeface="Arial"/>
+                <a:cs typeface="Arial"/>
               </a:rPr>
               <a:t>OUTPUT   </a:t>
             </a:r>
@@ -18958,8 +18772,8 @@
                 <a:solidFill>
                   <a:srgbClr val="000000"/>
                 </a:solidFill>
-                <a:latin typeface="Century Gothic"/>
-                <a:cs typeface="Century Gothic"/>
+                <a:latin typeface="Arial"/>
+                <a:cs typeface="Arial"/>
               </a:rPr>
               <a:t>For each: what is the spin, and how would you rewrite it?</a:t>
             </a:r>
@@ -18996,7 +18810,7 @@
                     <a:lumMod val="50000"/>
                   </a:schemeClr>
                 </a:solidFill>
-                <a:latin typeface="Verdana"/>
+                <a:latin typeface="Arial"/>
               </a:rPr>
               <a:t>Neudata | #ClearDataClearImpact</a:t>
             </a:r>
@@ -19126,8 +18940,8 @@
                 <a:solidFill>
                   <a:srgbClr val="0D7377"/>
                 </a:solidFill>
-                <a:latin typeface="Century Gothic"/>
-                <a:cs typeface="Century Gothic"/>
+                <a:latin typeface="Arial"/>
+                <a:cs typeface="Arial"/>
               </a:rPr>
               <a:t>Your turn: read Paper 1's abstract</a:t>
             </a:r>
@@ -19197,8 +19011,8 @@
                 <a:solidFill>
                   <a:srgbClr val="FFFFFF"/>
                 </a:solidFill>
-                <a:latin typeface="Century Gothic"/>
-                <a:cs typeface="Century Gothic"/>
+                <a:latin typeface="Arial"/>
+                <a:cs typeface="Arial"/>
               </a:rPr>
               <a:t>INDIVIDUAL TASK   |   12 min</a:t>
             </a:r>
@@ -19235,25 +19049,19 @@
               <a:spcBef>
                 <a:spcPts val="450"/>
               </a:spcBef>
-              <a:buNone/>
-            </a:pPr>
-            <a:r>
-              <a:rPr lang="en-US" sz="1650" b="1" dirty="0">
-                <a:solidFill>
-                  <a:srgbClr val="0B376C"/>
-                </a:solidFill>
-                <a:latin typeface="Century Gothic"/>
-                <a:cs typeface="Century Gothic"/>
-              </a:rPr>
-              <a:t>1.  </a:t>
-            </a:r>
+              <a:buClr>
+                <a:srgbClr val="0B376C"/>
+              </a:buClr>
+              <a:buFont typeface="Arial"/>
+              <a:buChar char="•"/>
+            </a:pPr>
             <a:r>
               <a:rPr lang="en-US" sz="1650" dirty="0">
                 <a:solidFill>
                   <a:srgbClr val="000000"/>
                 </a:solidFill>
-                <a:latin typeface="Century Gothic"/>
-                <a:cs typeface="Century Gothic"/>
+                <a:latin typeface="Arial"/>
+                <a:cs typeface="Arial"/>
               </a:rPr>
               <a:t>Take the abstract of Paper 1 (Boulet 2024, Crit Care)</a:t>
             </a:r>
@@ -19266,25 +19074,19 @@
               <a:spcBef>
                 <a:spcPts val="450"/>
               </a:spcBef>
-              <a:buNone/>
-            </a:pPr>
-            <a:r>
-              <a:rPr lang="en-US" sz="1650" b="1" dirty="0">
-                <a:solidFill>
-                  <a:srgbClr val="0B376C"/>
-                </a:solidFill>
-                <a:latin typeface="Century Gothic"/>
-                <a:cs typeface="Century Gothic"/>
-              </a:rPr>
-              <a:t>2.  </a:t>
-            </a:r>
+              <a:buClr>
+                <a:srgbClr val="0B376C"/>
+              </a:buClr>
+              <a:buFont typeface="Arial"/>
+              <a:buChar char="•"/>
+            </a:pPr>
             <a:r>
               <a:rPr lang="en-US" sz="1650" dirty="0">
                 <a:solidFill>
                   <a:srgbClr val="000000"/>
                 </a:solidFill>
-                <a:latin typeface="Century Gothic"/>
-                <a:cs typeface="Century Gothic"/>
+                <a:latin typeface="Arial"/>
+                <a:cs typeface="Arial"/>
               </a:rPr>
               <a:t>Fill the reading grid (Exercise 3): design, P, I vs C</a:t>
             </a:r>
@@ -19297,25 +19099,19 @@
               <a:spcBef>
                 <a:spcPts val="450"/>
               </a:spcBef>
-              <a:buNone/>
-            </a:pPr>
-            <a:r>
-              <a:rPr lang="en-US" sz="1650" b="1" dirty="0">
-                <a:solidFill>
-                  <a:srgbClr val="0B376C"/>
-                </a:solidFill>
-                <a:latin typeface="Century Gothic"/>
-                <a:cs typeface="Century Gothic"/>
-              </a:rPr>
-              <a:t>3.  </a:t>
-            </a:r>
+              <a:buClr>
+                <a:srgbClr val="0B376C"/>
+              </a:buClr>
+              <a:buFont typeface="Arial"/>
+              <a:buChar char="•"/>
+            </a:pPr>
             <a:r>
               <a:rPr lang="en-US" sz="1650" dirty="0">
                 <a:solidFill>
                   <a:srgbClr val="000000"/>
                 </a:solidFill>
-                <a:latin typeface="Century Gothic"/>
-                <a:cs typeface="Century Gothic"/>
+                <a:latin typeface="Arial"/>
+                <a:cs typeface="Arial"/>
               </a:rPr>
               <a:t>Primary outcome, numbers screened and analysed</a:t>
             </a:r>
@@ -19328,25 +19124,19 @@
               <a:spcBef>
                 <a:spcPts val="450"/>
               </a:spcBef>
-              <a:buNone/>
-            </a:pPr>
-            <a:r>
-              <a:rPr lang="en-US" sz="1650" b="1" dirty="0">
-                <a:solidFill>
-                  <a:srgbClr val="0B376C"/>
-                </a:solidFill>
-                <a:latin typeface="Century Gothic"/>
-                <a:cs typeface="Century Gothic"/>
-              </a:rPr>
-              <a:t>4.  </a:t>
-            </a:r>
+              <a:buClr>
+                <a:srgbClr val="0B376C"/>
+              </a:buClr>
+              <a:buFont typeface="Arial"/>
+              <a:buChar char="•"/>
+            </a:pPr>
             <a:r>
               <a:rPr lang="en-US" sz="1650" dirty="0">
                 <a:solidFill>
                   <a:srgbClr val="000000"/>
                 </a:solidFill>
-                <a:latin typeface="Century Gothic"/>
-                <a:cs typeface="Century Gothic"/>
+                <a:latin typeface="Arial"/>
+                <a:cs typeface="Arial"/>
               </a:rPr>
               <a:t>Main result with its 95% CI and p-value</a:t>
             </a:r>
@@ -19359,25 +19149,19 @@
               <a:spcBef>
                 <a:spcPts val="450"/>
               </a:spcBef>
-              <a:buNone/>
-            </a:pPr>
-            <a:r>
-              <a:rPr lang="en-US" sz="1650" b="1" dirty="0">
-                <a:solidFill>
-                  <a:srgbClr val="0B376C"/>
-                </a:solidFill>
-                <a:latin typeface="Century Gothic"/>
-                <a:cs typeface="Century Gothic"/>
-              </a:rPr>
-              <a:t>5.  </a:t>
-            </a:r>
+              <a:buClr>
+                <a:srgbClr val="0B376C"/>
+              </a:buClr>
+              <a:buFont typeface="Arial"/>
+              <a:buChar char="•"/>
+            </a:pPr>
             <a:r>
               <a:rPr lang="en-US" sz="1650" dirty="0">
                 <a:solidFill>
                   <a:srgbClr val="000000"/>
                 </a:solidFill>
-                <a:latin typeface="Century Gothic"/>
-                <a:cs typeface="Century Gothic"/>
+                <a:latin typeface="Arial"/>
+                <a:cs typeface="Arial"/>
               </a:rPr>
               <a:t>Does the conclusion match the result? Any spin?</a:t>
             </a:r>
@@ -19390,25 +19174,19 @@
               <a:spcBef>
                 <a:spcPts val="450"/>
               </a:spcBef>
-              <a:buNone/>
-            </a:pPr>
-            <a:r>
-              <a:rPr lang="en-US" sz="1650" b="1" dirty="0">
-                <a:solidFill>
-                  <a:srgbClr val="0B376C"/>
-                </a:solidFill>
-                <a:latin typeface="Century Gothic"/>
-                <a:cs typeface="Century Gothic"/>
-              </a:rPr>
-              <a:t>6.  </a:t>
-            </a:r>
+              <a:buClr>
+                <a:srgbClr val="0B376C"/>
+              </a:buClr>
+              <a:buFont typeface="Arial"/>
+              <a:buChar char="•"/>
+            </a:pPr>
             <a:r>
               <a:rPr lang="en-US" sz="1650" dirty="0">
                 <a:solidFill>
                   <a:srgbClr val="000000"/>
                 </a:solidFill>
-                <a:latin typeface="Century Gothic"/>
-                <a:cs typeface="Century Gothic"/>
+                <a:latin typeface="Arial"/>
+                <a:cs typeface="Arial"/>
               </a:rPr>
               <a:t>Compare your grid with your neighbour</a:t>
             </a:r>
@@ -19452,8 +19230,8 @@
                 <a:solidFill>
                   <a:srgbClr val="0B376C"/>
                 </a:solidFill>
-                <a:latin typeface="Century Gothic"/>
-                <a:cs typeface="Century Gothic"/>
+                <a:latin typeface="Arial"/>
+                <a:cs typeface="Arial"/>
               </a:rPr>
               <a:t>Clock</a:t>
             </a:r>
@@ -19473,8 +19251,8 @@
                 <a:solidFill>
                   <a:srgbClr val="000000"/>
                 </a:solidFill>
-                <a:latin typeface="Century Gothic"/>
-                <a:cs typeface="Century Gothic"/>
+                <a:latin typeface="Arial"/>
+                <a:cs typeface="Arial"/>
               </a:rPr>
               <a:t>8 minutes reading</a:t>
             </a:r>
@@ -19494,8 +19272,8 @@
                 <a:solidFill>
                   <a:srgbClr val="000000"/>
                 </a:solidFill>
-                <a:latin typeface="Century Gothic"/>
-                <a:cs typeface="Century Gothic"/>
+                <a:latin typeface="Arial"/>
+                <a:cs typeface="Arial"/>
               </a:rPr>
               <a:t>4 minutes comparing</a:t>
             </a:r>
@@ -19541,8 +19319,8 @@
                 <a:solidFill>
                   <a:srgbClr val="0B376C"/>
                 </a:solidFill>
-                <a:latin typeface="Century Gothic"/>
-                <a:cs typeface="Century Gothic"/>
+                <a:latin typeface="Arial"/>
+                <a:cs typeface="Arial"/>
               </a:rPr>
               <a:t>OUTPUT   </a:t>
             </a:r>
@@ -19551,8 +19329,8 @@
                 <a:solidFill>
                   <a:srgbClr val="000000"/>
                 </a:solidFill>
-                <a:latin typeface="Century Gothic"/>
-                <a:cs typeface="Century Gothic"/>
+                <a:latin typeface="Arial"/>
+                <a:cs typeface="Arial"/>
               </a:rPr>
               <a:t>A completed abstract reading grid</a:t>
             </a:r>
@@ -19589,7 +19367,7 @@
                     <a:lumMod val="50000"/>
                   </a:schemeClr>
                 </a:solidFill>
-                <a:latin typeface="Verdana"/>
+                <a:latin typeface="Arial"/>
               </a:rPr>
               <a:t>Neudata | #ClearDataClearImpact</a:t>
             </a:r>
@@ -19719,8 +19497,8 @@
                 <a:solidFill>
                   <a:srgbClr val="0D7377"/>
                 </a:solidFill>
-                <a:latin typeface="Century Gothic"/>
-                <a:cs typeface="Century Gothic"/>
+                <a:latin typeface="Arial"/>
+                <a:cs typeface="Arial"/>
               </a:rPr>
               <a:t>Paper 1's abstract: the answers</a:t>
             </a:r>
@@ -19816,8 +19594,8 @@
                 <a:solidFill>
                   <a:srgbClr val="FFFFFF"/>
                 </a:solidFill>
-                <a:latin typeface="Century Gothic"/>
-                <a:cs typeface="Century Gothic"/>
+                <a:latin typeface="Arial"/>
+                <a:cs typeface="Arial"/>
               </a:rPr>
               <a:t>KEY MESSAGE   </a:t>
             </a:r>
@@ -19826,8 +19604,8 @@
                 <a:solidFill>
                   <a:srgbClr val="FFFFFF"/>
                 </a:solidFill>
-                <a:latin typeface="Century Gothic"/>
-                <a:cs typeface="Century Gothic"/>
+                <a:latin typeface="Arial"/>
+                <a:cs typeface="Arial"/>
               </a:rPr>
               <a:t>Primary outcome: fluid balance, not mortality. Read what the study actually measured.</a:t>
             </a:r>
@@ -19864,7 +19642,7 @@
                     <a:lumMod val="50000"/>
                   </a:schemeClr>
                 </a:solidFill>
-                <a:latin typeface="Verdana"/>
+                <a:latin typeface="Arial"/>
               </a:rPr>
               <a:t>Neudata | #ClearDataClearImpact</a:t>
             </a:r>
@@ -19994,8 +19772,8 @@
                 <a:solidFill>
                   <a:srgbClr val="0D7377"/>
                 </a:solidFill>
-                <a:latin typeface="Century Gothic"/>
-                <a:cs typeface="Century Gothic"/>
+                <a:latin typeface="Arial"/>
+                <a:cs typeface="Arial"/>
               </a:rPr>
               <a:t>2.4  From literature to introduction</a:t>
             </a:r>
@@ -20064,8 +19842,8 @@
                 <a:solidFill>
                   <a:srgbClr val="0D7377"/>
                 </a:solidFill>
-                <a:latin typeface="Century Gothic"/>
-                <a:cs typeface="Century Gothic"/>
+                <a:latin typeface="Arial"/>
+                <a:cs typeface="Arial"/>
               </a:rPr>
               <a:t>The papers you read become the first page of your proposal.</a:t>
             </a:r>
@@ -20082,8 +19860,8 @@
                 <a:solidFill>
                   <a:srgbClr val="595959"/>
                 </a:solidFill>
-                <a:latin typeface="Century Gothic"/>
-                <a:cs typeface="Century Gothic"/>
+                <a:latin typeface="Arial"/>
+                <a:cs typeface="Arial"/>
               </a:rPr>
               <a:t>15 minutes: the literature matrix, the problem-statement funnel, a model problem statement, working title and keywords</a:t>
             </a:r>
@@ -20120,7 +19898,7 @@
                     <a:lumMod val="50000"/>
                   </a:schemeClr>
                 </a:solidFill>
-                <a:latin typeface="Verdana"/>
+                <a:latin typeface="Arial"/>
               </a:rPr>
               <a:t>Neudata | #ClearDataClearImpact</a:t>
             </a:r>
@@ -20250,8 +20028,8 @@
                 <a:solidFill>
                   <a:srgbClr val="0D7377"/>
                 </a:solidFill>
-                <a:latin typeface="Century Gothic"/>
-                <a:cs typeface="Century Gothic"/>
+                <a:latin typeface="Arial"/>
+                <a:cs typeface="Arial"/>
               </a:rPr>
               <a:t>The literature review worksheet</a:t>
             </a:r>
@@ -20347,8 +20125,8 @@
                 <a:solidFill>
                   <a:srgbClr val="FFFFFF"/>
                 </a:solidFill>
-                <a:latin typeface="Century Gothic"/>
-                <a:cs typeface="Century Gothic"/>
+                <a:latin typeface="Arial"/>
+                <a:cs typeface="Arial"/>
               </a:rPr>
               <a:t>KEY MESSAGE   </a:t>
             </a:r>
@@ -20357,8 +20135,8 @@
                 <a:solidFill>
                   <a:srgbClr val="FFFFFF"/>
                 </a:solidFill>
-                <a:latin typeface="Century Gothic"/>
-                <a:cs typeface="Century Gothic"/>
+                <a:latin typeface="Arial"/>
+                <a:cs typeface="Arial"/>
               </a:rPr>
               <a:t>One row per paper: 5 rows today, the same columns for every paper.</a:t>
             </a:r>
@@ -20395,7 +20173,7 @@
                     <a:lumMod val="50000"/>
                   </a:schemeClr>
                 </a:solidFill>
-                <a:latin typeface="Verdana"/>
+                <a:latin typeface="Arial"/>
               </a:rPr>
               <a:t>Neudata | #ClearDataClearImpact</a:t>
             </a:r>
@@ -20525,8 +20303,8 @@
                 <a:solidFill>
                   <a:srgbClr val="0D7377"/>
                 </a:solidFill>
-                <a:latin typeface="Century Gothic"/>
-                <a:cs typeface="Century Gothic"/>
+                <a:latin typeface="Arial"/>
+                <a:cs typeface="Arial"/>
               </a:rPr>
               <a:t>From literature to your Introduction</a:t>
             </a:r>
@@ -20622,8 +20400,8 @@
                 <a:solidFill>
                   <a:srgbClr val="FFFFFF"/>
                 </a:solidFill>
-                <a:latin typeface="Century Gothic"/>
-                <a:cs typeface="Century Gothic"/>
+                <a:latin typeface="Arial"/>
+                <a:cs typeface="Arial"/>
               </a:rPr>
               <a:t>KEY MESSAGE   </a:t>
             </a:r>
@@ -20632,8 +20410,8 @@
                 <a:solidFill>
                   <a:srgbClr val="FFFFFF"/>
                 </a:solidFill>
-                <a:latin typeface="Century Gothic"/>
-                <a:cs typeface="Century Gothic"/>
+                <a:latin typeface="Arial"/>
+                <a:cs typeface="Arial"/>
               </a:rPr>
               <a:t>Known, not known, why here: the question then follows naturally.</a:t>
             </a:r>
@@ -20670,7 +20448,7 @@
                     <a:lumMod val="50000"/>
                   </a:schemeClr>
                 </a:solidFill>
-                <a:latin typeface="Verdana"/>
+                <a:latin typeface="Arial"/>
               </a:rPr>
               <a:t>Neudata | #ClearDataClearImpact</a:t>
             </a:r>
@@ -20800,8 +20578,8 @@
                 <a:solidFill>
                   <a:srgbClr val="0D7377"/>
                 </a:solidFill>
-                <a:latin typeface="Century Gothic"/>
-                <a:cs typeface="Century Gothic"/>
+                <a:latin typeface="Arial"/>
+                <a:cs typeface="Arial"/>
               </a:rPr>
               <a:t>A model problem statement</a:t>
             </a:r>
@@ -20897,8 +20675,8 @@
                 <a:solidFill>
                   <a:srgbClr val="FFFFFF"/>
                 </a:solidFill>
-                <a:latin typeface="Century Gothic"/>
-                <a:cs typeface="Century Gothic"/>
+                <a:latin typeface="Arial"/>
+                <a:cs typeface="Arial"/>
               </a:rPr>
               <a:t>KEY MESSAGE   </a:t>
             </a:r>
@@ -20907,8 +20685,8 @@
                 <a:solidFill>
                   <a:srgbClr val="FFFFFF"/>
                 </a:solidFill>
-                <a:latin typeface="Century Gothic"/>
-                <a:cs typeface="Century Gothic"/>
+                <a:latin typeface="Arial"/>
+                <a:cs typeface="Arial"/>
               </a:rPr>
               <a:t>Three short paragraphs, each with its own job, and references in brackets.</a:t>
             </a:r>
@@ -20945,7 +20723,7 @@
                     <a:lumMod val="50000"/>
                   </a:schemeClr>
                 </a:solidFill>
-                <a:latin typeface="Verdana"/>
+                <a:latin typeface="Arial"/>
               </a:rPr>
               <a:t>Neudata | #ClearDataClearImpact</a:t>
             </a:r>
@@ -21075,8 +20853,8 @@
                 <a:solidFill>
                   <a:srgbClr val="0D7377"/>
                 </a:solidFill>
-                <a:latin typeface="Century Gothic"/>
-                <a:cs typeface="Century Gothic"/>
+                <a:latin typeface="Arial"/>
+                <a:cs typeface="Arial"/>
               </a:rPr>
               <a:t>Working title and keywords from PICO</a:t>
             </a:r>
@@ -21172,8 +20950,8 @@
                 <a:solidFill>
                   <a:srgbClr val="FFFFFF"/>
                 </a:solidFill>
-                <a:latin typeface="Century Gothic"/>
-                <a:cs typeface="Century Gothic"/>
+                <a:latin typeface="Arial"/>
+                <a:cs typeface="Arial"/>
               </a:rPr>
               <a:t>KEY MESSAGE   </a:t>
             </a:r>
@@ -21182,8 +20960,8 @@
                 <a:solidFill>
                   <a:srgbClr val="FFFFFF"/>
                 </a:solidFill>
-                <a:latin typeface="Century Gothic"/>
-                <a:cs typeface="Century Gothic"/>
+                <a:latin typeface="Arial"/>
+                <a:cs typeface="Arial"/>
               </a:rPr>
               <a:t>Your PICO already contains your title: add the design and keep it short.</a:t>
             </a:r>
@@ -21220,7 +20998,7 @@
                     <a:lumMod val="50000"/>
                   </a:schemeClr>
                 </a:solidFill>
-                <a:latin typeface="Verdana"/>
+                <a:latin typeface="Arial"/>
               </a:rPr>
               <a:t>Neudata | #ClearDataClearImpact</a:t>
             </a:r>
@@ -21350,8 +21128,8 @@
                 <a:solidFill>
                   <a:srgbClr val="0D7377"/>
                 </a:solidFill>
-                <a:latin typeface="Century Gothic"/>
-                <a:cs typeface="Century Gothic"/>
+                <a:latin typeface="Arial"/>
+                <a:cs typeface="Arial"/>
               </a:rPr>
               <a:t>Proposal builder 2</a:t>
             </a:r>
@@ -21420,8 +21198,8 @@
                 <a:solidFill>
                   <a:srgbClr val="0D7377"/>
                 </a:solidFill>
-                <a:latin typeface="Century Gothic"/>
-                <a:cs typeface="Century Gothic"/>
+                <a:latin typeface="Arial"/>
+                <a:cs typeface="Arial"/>
               </a:rPr>
               <a:t>Now find your group's evidence: one search, five papers, one problem statement, one title.</a:t>
             </a:r>
@@ -21438,8 +21216,8 @@
                 <a:solidFill>
                   <a:srgbClr val="595959"/>
                 </a:solidFill>
-                <a:latin typeface="Century Gothic"/>
-                <a:cs typeface="Century Gothic"/>
+                <a:latin typeface="Arial"/>
+                <a:cs typeface="Arial"/>
               </a:rPr>
               <a:t>35 minutes of group work to complete Part 1 of your research proposal</a:t>
             </a:r>
@@ -21476,7 +21254,7 @@
                     <a:lumMod val="50000"/>
                   </a:schemeClr>
                 </a:solidFill>
-                <a:latin typeface="Verdana"/>
+                <a:latin typeface="Arial"/>
               </a:rPr>
               <a:t>Neudata | #ClearDataClearImpact</a:t>
             </a:r>
@@ -21606,8 +21384,8 @@
                 <a:solidFill>
                   <a:srgbClr val="0D7377"/>
                 </a:solidFill>
-                <a:latin typeface="Century Gothic"/>
-                <a:cs typeface="Century Gothic"/>
+                <a:latin typeface="Arial"/>
+                <a:cs typeface="Arial"/>
               </a:rPr>
               <a:t>Proposal builder 2: your group's evidence</a:t>
             </a:r>
@@ -21677,8 +21455,8 @@
                 <a:solidFill>
                   <a:srgbClr val="FFFFFF"/>
                 </a:solidFill>
-                <a:latin typeface="Century Gothic"/>
-                <a:cs typeface="Century Gothic"/>
+                <a:latin typeface="Arial"/>
+                <a:cs typeface="Arial"/>
               </a:rPr>
               <a:t>PROPOSAL BUILDER   |   33 min</a:t>
             </a:r>
@@ -21715,25 +21493,19 @@
               <a:spcBef>
                 <a:spcPts val="450"/>
               </a:spcBef>
-              <a:buNone/>
-            </a:pPr>
-            <a:r>
-              <a:rPr lang="en-US" sz="1650" b="1" dirty="0">
-                <a:solidFill>
-                  <a:srgbClr val="055F56"/>
-                </a:solidFill>
-                <a:latin typeface="Century Gothic"/>
-                <a:cs typeface="Century Gothic"/>
-              </a:rPr>
-              <a:t>1.  </a:t>
-            </a:r>
+              <a:buClr>
+                <a:srgbClr val="055F56"/>
+              </a:buClr>
+              <a:buFont typeface="Arial"/>
+              <a:buChar char="•"/>
+            </a:pPr>
             <a:r>
               <a:rPr lang="en-US" sz="1650" dirty="0">
                 <a:solidFill>
                   <a:srgbClr val="000000"/>
                 </a:solidFill>
-                <a:latin typeface="Century Gothic"/>
-                <a:cs typeface="Century Gothic"/>
+                <a:latin typeface="Arial"/>
+                <a:cs typeface="Arial"/>
               </a:rPr>
               <a:t>Run your search string in PubMed; write the date and number of hits</a:t>
             </a:r>
@@ -21746,25 +21518,19 @@
               <a:spcBef>
                 <a:spcPts val="450"/>
               </a:spcBef>
-              <a:buNone/>
-            </a:pPr>
-            <a:r>
-              <a:rPr lang="en-US" sz="1650" b="1" dirty="0">
-                <a:solidFill>
-                  <a:srgbClr val="055F56"/>
-                </a:solidFill>
-                <a:latin typeface="Century Gothic"/>
-                <a:cs typeface="Century Gothic"/>
-              </a:rPr>
-              <a:t>2.  </a:t>
-            </a:r>
+              <a:buClr>
+                <a:srgbClr val="055F56"/>
+              </a:buClr>
+              <a:buFont typeface="Arial"/>
+              <a:buChar char="•"/>
+            </a:pPr>
             <a:r>
               <a:rPr lang="en-US" sz="1650" dirty="0">
                 <a:solidFill>
                   <a:srgbClr val="000000"/>
                 </a:solidFill>
-                <a:latin typeface="Century Gothic"/>
-                <a:cs typeface="Century Gothic"/>
+                <a:latin typeface="Arial"/>
+                <a:cs typeface="Arial"/>
               </a:rPr>
               <a:t>Screen titles and abstracts; pick 5 key papers; export them to Zotero</a:t>
             </a:r>
@@ -21777,25 +21543,19 @@
               <a:spcBef>
                 <a:spcPts val="450"/>
               </a:spcBef>
-              <a:buNone/>
-            </a:pPr>
-            <a:r>
-              <a:rPr lang="en-US" sz="1650" b="1" dirty="0">
-                <a:solidFill>
-                  <a:srgbClr val="055F56"/>
-                </a:solidFill>
-                <a:latin typeface="Century Gothic"/>
-                <a:cs typeface="Century Gothic"/>
-              </a:rPr>
-              <a:t>3.  </a:t>
-            </a:r>
+              <a:buClr>
+                <a:srgbClr val="055F56"/>
+              </a:buClr>
+              <a:buFont typeface="Arial"/>
+              <a:buChar char="•"/>
+            </a:pPr>
             <a:r>
               <a:rPr lang="en-US" sz="1650" dirty="0">
                 <a:solidFill>
                   <a:srgbClr val="000000"/>
                 </a:solidFill>
-                <a:latin typeface="Century Gothic"/>
-                <a:cs typeface="Century Gothic"/>
+                <a:latin typeface="Arial"/>
+                <a:cs typeface="Arial"/>
               </a:rPr>
               <a:t>Fill one row per paper in the literature matrix</a:t>
             </a:r>
@@ -21808,25 +21568,19 @@
               <a:spcBef>
                 <a:spcPts val="450"/>
               </a:spcBef>
-              <a:buNone/>
-            </a:pPr>
-            <a:r>
-              <a:rPr lang="en-US" sz="1650" b="1" dirty="0">
-                <a:solidFill>
-                  <a:srgbClr val="055F56"/>
-                </a:solidFill>
-                <a:latin typeface="Century Gothic"/>
-                <a:cs typeface="Century Gothic"/>
-              </a:rPr>
-              <a:t>4.  </a:t>
-            </a:r>
+              <a:buClr>
+                <a:srgbClr val="055F56"/>
+              </a:buClr>
+              <a:buFont typeface="Arial"/>
+              <a:buChar char="•"/>
+            </a:pPr>
             <a:r>
               <a:rPr lang="en-US" sz="1650" dirty="0">
                 <a:solidFill>
                   <a:srgbClr val="000000"/>
                 </a:solidFill>
-                <a:latin typeface="Century Gothic"/>
-                <a:cs typeface="Century Gothic"/>
+                <a:latin typeface="Arial"/>
+                <a:cs typeface="Arial"/>
               </a:rPr>
               <a:t>Draft the problem statement: known, not known, why here</a:t>
             </a:r>
@@ -21839,25 +21593,19 @@
               <a:spcBef>
                 <a:spcPts val="450"/>
               </a:spcBef>
-              <a:buNone/>
-            </a:pPr>
-            <a:r>
-              <a:rPr lang="en-US" sz="1650" b="1" dirty="0">
-                <a:solidFill>
-                  <a:srgbClr val="055F56"/>
-                </a:solidFill>
-                <a:latin typeface="Century Gothic"/>
-                <a:cs typeface="Century Gothic"/>
-              </a:rPr>
-              <a:t>5.  </a:t>
-            </a:r>
+              <a:buClr>
+                <a:srgbClr val="055F56"/>
+              </a:buClr>
+              <a:buFont typeface="Arial"/>
+              <a:buChar char="•"/>
+            </a:pPr>
             <a:r>
               <a:rPr lang="en-US" sz="1650" dirty="0">
                 <a:solidFill>
                   <a:srgbClr val="000000"/>
                 </a:solidFill>
-                <a:latin typeface="Century Gothic"/>
-                <a:cs typeface="Century Gothic"/>
+                <a:latin typeface="Arial"/>
+                <a:cs typeface="Arial"/>
               </a:rPr>
               <a:t>Working title (10-16 words) + 3-6 keywords</a:t>
             </a:r>
@@ -21870,25 +21618,19 @@
               <a:spcBef>
                 <a:spcPts val="450"/>
               </a:spcBef>
-              <a:buNone/>
-            </a:pPr>
-            <a:r>
-              <a:rPr lang="en-US" sz="1650" b="1" dirty="0">
-                <a:solidFill>
-                  <a:srgbClr val="055F56"/>
-                </a:solidFill>
-                <a:latin typeface="Century Gothic"/>
-                <a:cs typeface="Century Gothic"/>
-              </a:rPr>
-              <a:t>6.  </a:t>
-            </a:r>
+              <a:buClr>
+                <a:srgbClr val="055F56"/>
+              </a:buClr>
+              <a:buFont typeface="Arial"/>
+              <a:buChar char="•"/>
+            </a:pPr>
             <a:r>
               <a:rPr lang="en-US" sz="1650" dirty="0">
                 <a:solidFill>
                   <a:srgbClr val="000000"/>
                 </a:solidFill>
-                <a:latin typeface="Century Gothic"/>
-                <a:cs typeface="Century Gothic"/>
+                <a:latin typeface="Arial"/>
+                <a:cs typeface="Arial"/>
               </a:rPr>
               <a:t>One group reads its title and gap aloud</a:t>
             </a:r>
@@ -21932,8 +21674,8 @@
                 <a:solidFill>
                   <a:srgbClr val="055F56"/>
                 </a:solidFill>
-                <a:latin typeface="Century Gothic"/>
-                <a:cs typeface="Century Gothic"/>
+                <a:latin typeface="Arial"/>
+                <a:cs typeface="Arial"/>
               </a:rPr>
               <a:t>Timing</a:t>
             </a:r>
@@ -21953,8 +21695,8 @@
                 <a:solidFill>
                   <a:srgbClr val="000000"/>
                 </a:solidFill>
-                <a:latin typeface="Century Gothic"/>
-                <a:cs typeface="Century Gothic"/>
+                <a:latin typeface="Arial"/>
+                <a:cs typeface="Arial"/>
               </a:rPr>
               <a:t>0-8 min: run the search</a:t>
             </a:r>
@@ -21974,8 +21716,8 @@
                 <a:solidFill>
                   <a:srgbClr val="000000"/>
                 </a:solidFill>
-                <a:latin typeface="Century Gothic"/>
-                <a:cs typeface="Century Gothic"/>
+                <a:latin typeface="Arial"/>
+                <a:cs typeface="Arial"/>
               </a:rPr>
               <a:t>8-16: screen + pick 5 papers</a:t>
             </a:r>
@@ -21995,8 +21737,8 @@
                 <a:solidFill>
                   <a:srgbClr val="000000"/>
                 </a:solidFill>
-                <a:latin typeface="Century Gothic"/>
-                <a:cs typeface="Century Gothic"/>
+                <a:latin typeface="Arial"/>
+                <a:cs typeface="Arial"/>
               </a:rPr>
               <a:t>16-22: matrix rows</a:t>
             </a:r>
@@ -22016,8 +21758,8 @@
                 <a:solidFill>
                   <a:srgbClr val="000000"/>
                 </a:solidFill>
-                <a:latin typeface="Century Gothic"/>
-                <a:cs typeface="Century Gothic"/>
+                <a:latin typeface="Arial"/>
+                <a:cs typeface="Arial"/>
               </a:rPr>
               <a:t>22-28: problem statement</a:t>
             </a:r>
@@ -22037,8 +21779,8 @@
                 <a:solidFill>
                   <a:srgbClr val="000000"/>
                 </a:solidFill>
-                <a:latin typeface="Century Gothic"/>
-                <a:cs typeface="Century Gothic"/>
+                <a:latin typeface="Arial"/>
+                <a:cs typeface="Arial"/>
               </a:rPr>
               <a:t>28-31: title + keywords</a:t>
             </a:r>
@@ -22058,8 +21800,8 @@
                 <a:solidFill>
                   <a:srgbClr val="000000"/>
                 </a:solidFill>
-                <a:latin typeface="Century Gothic"/>
-                <a:cs typeface="Century Gothic"/>
+                <a:latin typeface="Arial"/>
+                <a:cs typeface="Arial"/>
               </a:rPr>
               <a:t>31-33: 1 group reads aloud</a:t>
             </a:r>
@@ -22105,8 +21847,8 @@
                 <a:solidFill>
                   <a:srgbClr val="055F56"/>
                 </a:solidFill>
-                <a:latin typeface="Century Gothic"/>
-                <a:cs typeface="Century Gothic"/>
+                <a:latin typeface="Arial"/>
+                <a:cs typeface="Arial"/>
               </a:rPr>
               <a:t>OUTPUT   </a:t>
             </a:r>
@@ -22115,8 +21857,8 @@
                 <a:solidFill>
                   <a:srgbClr val="000000"/>
                 </a:solidFill>
-                <a:latin typeface="Century Gothic"/>
-                <a:cs typeface="Century Gothic"/>
+                <a:latin typeface="Arial"/>
+                <a:cs typeface="Arial"/>
               </a:rPr>
               <a:t>Proposal Part 1 complete: search, 5 references, problem statement, title</a:t>
             </a:r>
@@ -22153,7 +21895,7 @@
                     <a:lumMod val="50000"/>
                   </a:schemeClr>
                 </a:solidFill>
-                <a:latin typeface="Verdana"/>
+                <a:latin typeface="Arial"/>
               </a:rPr>
               <a:t>Neudata | #ClearDataClearImpact</a:t>
             </a:r>
@@ -22283,8 +22025,8 @@
                 <a:solidFill>
                   <a:srgbClr val="0D7377"/>
                 </a:solidFill>
-                <a:latin typeface="Century Gothic"/>
-                <a:cs typeface="Century Gothic"/>
+                <a:latin typeface="Arial"/>
+                <a:cs typeface="Arial"/>
               </a:rPr>
               <a:t>2.1  Finding the evidence</a:t>
             </a:r>
@@ -22353,8 +22095,8 @@
                 <a:solidFill>
                   <a:srgbClr val="0D7377"/>
                 </a:solidFill>
-                <a:latin typeface="Century Gothic"/>
-                <a:cs typeface="Century Gothic"/>
+                <a:latin typeface="Arial"/>
+                <a:cs typeface="Arial"/>
               </a:rPr>
               <a:t>Before you study it, find out what is already known.</a:t>
             </a:r>
@@ -22371,8 +22113,8 @@
                 <a:solidFill>
                   <a:srgbClr val="595959"/>
                 </a:solidFill>
-                <a:latin typeface="Century Gothic"/>
-                <a:cs typeface="Century Gothic"/>
+                <a:latin typeface="Arial"/>
+                <a:cs typeface="Arial"/>
               </a:rPr>
               <a:t>40 minutes: the search funnel, PICO to search blocks, Boolean, MeSH, search tools and a live PubMed demo</a:t>
             </a:r>
@@ -22409,7 +22151,7 @@
                     <a:lumMod val="50000"/>
                   </a:schemeClr>
                 </a:solidFill>
-                <a:latin typeface="Verdana"/>
+                <a:latin typeface="Arial"/>
               </a:rPr>
               <a:t>Neudata | #ClearDataClearImpact</a:t>
             </a:r>
@@ -22539,8 +22281,8 @@
                 <a:solidFill>
                   <a:srgbClr val="0D7377"/>
                 </a:solidFill>
-                <a:latin typeface="Century Gothic"/>
-                <a:cs typeface="Century Gothic"/>
+                <a:latin typeface="Arial"/>
+                <a:cs typeface="Arial"/>
               </a:rPr>
               <a:t>Key words of the day</a:t>
             </a:r>
@@ -22607,7 +22349,7 @@
                           <a:solidFill>
                             <a:srgbClr val="FFFFFF"/>
                           </a:solidFill>
-                          <a:latin typeface="Century Gothic"/>
+                          <a:latin typeface="Arial"/>
                         </a:rPr>
                         <a:t>Key word</a:t>
                       </a:r>
@@ -22630,7 +22372,7 @@
                           <a:solidFill>
                             <a:srgbClr val="FFFFFF"/>
                           </a:solidFill>
-                          <a:latin typeface="Century Gothic"/>
+                          <a:latin typeface="Arial"/>
                         </a:rPr>
                         <a:t>In one line</a:t>
                       </a:r>
@@ -22655,7 +22397,7 @@
                           <a:solidFill>
                             <a:srgbClr val="000000"/>
                           </a:solidFill>
-                          <a:latin typeface="Century Gothic"/>
+                          <a:latin typeface="Arial"/>
                         </a:rPr>
                         <a:t>MeSH</a:t>
                       </a:r>
@@ -22678,7 +22420,7 @@
                           <a:solidFill>
                             <a:srgbClr val="000000"/>
                           </a:solidFill>
-                          <a:latin typeface="Century Gothic"/>
+                          <a:latin typeface="Arial"/>
                         </a:rPr>
                         <a:t>The shared label PubMed gives to many ways of writing one idea</a:t>
                       </a:r>
@@ -22703,7 +22445,7 @@
                           <a:solidFill>
                             <a:srgbClr val="000000"/>
                           </a:solidFill>
-                          <a:latin typeface="Century Gothic"/>
+                          <a:latin typeface="Arial"/>
                         </a:rPr>
                         <a:t>AND / OR / NOT</a:t>
                       </a:r>
@@ -22726,7 +22468,7 @@
                           <a:solidFill>
                             <a:srgbClr val="000000"/>
                           </a:solidFill>
-                          <a:latin typeface="Century Gothic"/>
+                          <a:latin typeface="Arial"/>
                         </a:rPr>
                         <a:t>Narrows / widens / removes. OR inside a block, AND between blocks</a:t>
                       </a:r>
@@ -22751,7 +22493,7 @@
                           <a:solidFill>
                             <a:srgbClr val="000000"/>
                           </a:solidFill>
-                          <a:latin typeface="Century Gothic"/>
+                          <a:latin typeface="Arial"/>
                         </a:rPr>
                         <a:t>Reference manager</a:t>
                       </a:r>
@@ -22774,7 +22516,7 @@
                           <a:solidFill>
                             <a:srgbClr val="000000"/>
                           </a:solidFill>
-                          <a:latin typeface="Century Gothic"/>
+                          <a:latin typeface="Arial"/>
                         </a:rPr>
                         <a:t>Stores each paper once and formats citations in any style</a:t>
                       </a:r>
@@ -22799,7 +22541,7 @@
                           <a:solidFill>
                             <a:srgbClr val="000000"/>
                           </a:solidFill>
-                          <a:latin typeface="Century Gothic"/>
+                          <a:latin typeface="Arial"/>
                         </a:rPr>
                         <a:t>Patchwriting</a:t>
                       </a:r>
@@ -22822,7 +22564,7 @@
                           <a:solidFill>
                             <a:srgbClr val="000000"/>
                           </a:solidFill>
-                          <a:latin typeface="Century Gothic"/>
+                          <a:latin typeface="Arial"/>
                         </a:rPr>
                         <a:t>Copying with a few words swapped: plagiarism even if cited</a:t>
                       </a:r>
@@ -22847,7 +22589,7 @@
                           <a:solidFill>
                             <a:srgbClr val="000000"/>
                           </a:solidFill>
-                          <a:latin typeface="Century Gothic"/>
+                          <a:latin typeface="Arial"/>
                         </a:rPr>
                         <a:t>IMRaD</a:t>
                       </a:r>
@@ -22870,7 +22612,7 @@
                           <a:solidFill>
                             <a:srgbClr val="000000"/>
                           </a:solidFill>
-                          <a:latin typeface="Century Gothic"/>
+                          <a:latin typeface="Arial"/>
                         </a:rPr>
                         <a:t>Introduction, Methods, Results and Discussion</a:t>
                       </a:r>
@@ -22895,7 +22637,7 @@
                           <a:solidFill>
                             <a:srgbClr val="000000"/>
                           </a:solidFill>
-                          <a:latin typeface="Century Gothic"/>
+                          <a:latin typeface="Arial"/>
                         </a:rPr>
                         <a:t>Spin</a:t>
                       </a:r>
@@ -22918,7 +22660,7 @@
                           <a:solidFill>
                             <a:srgbClr val="000000"/>
                           </a:solidFill>
-                          <a:latin typeface="Century Gothic"/>
+                          <a:latin typeface="Arial"/>
                         </a:rPr>
                         <a:t>Words that claim more than the numbers show</a:t>
                       </a:r>
@@ -22965,7 +22707,7 @@
                     <a:lumMod val="50000"/>
                   </a:schemeClr>
                 </a:solidFill>
-                <a:latin typeface="Verdana"/>
+                <a:latin typeface="Arial"/>
               </a:rPr>
               <a:t>Neudata | #ClearDataClearImpact</a:t>
             </a:r>
@@ -23095,8 +22837,8 @@
                 <a:solidFill>
                   <a:srgbClr val="0D7377"/>
                 </a:solidFill>
-                <a:latin typeface="Century Gothic"/>
-                <a:cs typeface="Century Gothic"/>
+                <a:latin typeface="Arial"/>
+                <a:cs typeface="Arial"/>
               </a:rPr>
               <a:t>Session 2 recap</a:t>
             </a:r>
@@ -23166,10 +22908,10 @@
                 <a:solidFill>
                   <a:srgbClr val="FFFFFF"/>
                 </a:solidFill>
-                <a:latin typeface="Century Gothic"/>
-                <a:cs typeface="Century Gothic"/>
-              </a:rPr>
-              <a:t>1. Search</a:t>
+                <a:latin typeface="Arial"/>
+                <a:cs typeface="Arial"/>
+              </a:rPr>
+              <a:t>Search</a:t>
             </a:r>
           </a:p>
         </p:txBody>
@@ -23215,8 +22957,8 @@
                 <a:solidFill>
                   <a:srgbClr val="000000"/>
                 </a:solidFill>
-                <a:latin typeface="Century Gothic"/>
-                <a:cs typeface="Century Gothic"/>
+                <a:latin typeface="Arial"/>
+                <a:cs typeface="Arial"/>
               </a:rPr>
               <a:t>PICO blocks, MeSH +</a:t>
             </a:r>
@@ -23236,8 +22978,8 @@
                 <a:solidFill>
                   <a:srgbClr val="000000"/>
                 </a:solidFill>
-                <a:latin typeface="Century Gothic"/>
-                <a:cs typeface="Century Gothic"/>
+                <a:latin typeface="Arial"/>
+                <a:cs typeface="Arial"/>
               </a:rPr>
               <a:t>free text; OR inside,</a:t>
             </a:r>
@@ -23257,8 +22999,8 @@
                 <a:solidFill>
                   <a:srgbClr val="000000"/>
                 </a:solidFill>
-                <a:latin typeface="Century Gothic"/>
-                <a:cs typeface="Century Gothic"/>
+                <a:latin typeface="Arial"/>
+                <a:cs typeface="Arial"/>
               </a:rPr>
               <a:t>AND between; write it down</a:t>
             </a:r>
@@ -23300,10 +23042,10 @@
                 <a:solidFill>
                   <a:srgbClr val="FFFFFF"/>
                 </a:solidFill>
-                <a:latin typeface="Century Gothic"/>
-                <a:cs typeface="Century Gothic"/>
-              </a:rPr>
-              <a:t>2. Cite honestly</a:t>
+                <a:latin typeface="Arial"/>
+                <a:cs typeface="Arial"/>
+              </a:rPr>
+              <a:t>Cite honestly</a:t>
             </a:r>
           </a:p>
         </p:txBody>
@@ -23349,8 +23091,8 @@
                 <a:solidFill>
                   <a:srgbClr val="000000"/>
                 </a:solidFill>
-                <a:latin typeface="Century Gothic"/>
-                <a:cs typeface="Century Gothic"/>
+                <a:latin typeface="Arial"/>
+                <a:cs typeface="Arial"/>
               </a:rPr>
               <a:t>Reference manager</a:t>
             </a:r>
@@ -23370,8 +23112,8 @@
                 <a:solidFill>
                   <a:srgbClr val="000000"/>
                 </a:solidFill>
-                <a:latin typeface="Century Gothic"/>
-                <a:cs typeface="Century Gothic"/>
+                <a:latin typeface="Arial"/>
+                <a:cs typeface="Arial"/>
               </a:rPr>
               <a:t>from day one; own</a:t>
             </a:r>
@@ -23391,8 +23133,8 @@
                 <a:solidFill>
                   <a:srgbClr val="000000"/>
                 </a:solidFill>
-                <a:latin typeface="Century Gothic"/>
-                <a:cs typeface="Century Gothic"/>
+                <a:latin typeface="Arial"/>
+                <a:cs typeface="Arial"/>
               </a:rPr>
               <a:t>words; read what you cite</a:t>
             </a:r>
@@ -23434,10 +23176,10 @@
                 <a:solidFill>
                   <a:srgbClr val="FFFFFF"/>
                 </a:solidFill>
-                <a:latin typeface="Century Gothic"/>
-                <a:cs typeface="Century Gothic"/>
-              </a:rPr>
-              <a:t>3. Read smart</a:t>
+                <a:latin typeface="Arial"/>
+                <a:cs typeface="Arial"/>
+              </a:rPr>
+              <a:t>Read smart</a:t>
             </a:r>
           </a:p>
         </p:txBody>
@@ -23483,8 +23225,8 @@
                 <a:solidFill>
                   <a:srgbClr val="000000"/>
                 </a:solidFill>
-                <a:latin typeface="Century Gothic"/>
-                <a:cs typeface="Century Gothic"/>
+                <a:latin typeface="Arial"/>
+                <a:cs typeface="Arial"/>
               </a:rPr>
               <a:t>Title, abstract,</a:t>
             </a:r>
@@ -23504,8 +23246,8 @@
                 <a:solidFill>
                   <a:srgbClr val="000000"/>
                 </a:solidFill>
-                <a:latin typeface="Century Gothic"/>
-                <a:cs typeface="Century Gothic"/>
+                <a:latin typeface="Arial"/>
+                <a:cs typeface="Arial"/>
               </a:rPr>
               <a:t>figures, methods;</a:t>
             </a:r>
@@ -23525,8 +23267,8 @@
                 <a:solidFill>
                   <a:srgbClr val="000000"/>
                 </a:solidFill>
-                <a:latin typeface="Century Gothic"/>
-                <a:cs typeface="Century Gothic"/>
+                <a:latin typeface="Arial"/>
+                <a:cs typeface="Arial"/>
               </a:rPr>
               <a:t>numbers before words</a:t>
             </a:r>
@@ -23570,8 +23312,8 @@
                 <a:solidFill>
                   <a:srgbClr val="FFFFFF"/>
                 </a:solidFill>
-                <a:latin typeface="Century Gothic"/>
-                <a:cs typeface="Century Gothic"/>
+                <a:latin typeface="Arial"/>
+                <a:cs typeface="Arial"/>
               </a:rPr>
               <a:t>KEY MESSAGE   </a:t>
             </a:r>
@@ -23580,8 +23322,8 @@
                 <a:solidFill>
                   <a:srgbClr val="FFFFFF"/>
                 </a:solidFill>
-                <a:latin typeface="Century Gothic"/>
-                <a:cs typeface="Century Gothic"/>
+                <a:latin typeface="Arial"/>
+                <a:cs typeface="Arial"/>
               </a:rPr>
               <a:t>Weeks 1-2 are done: your group has a question, five papers and a title.</a:t>
             </a:r>
@@ -23618,7 +23360,7 @@
                     <a:lumMod val="50000"/>
                   </a:schemeClr>
                 </a:solidFill>
-                <a:latin typeface="Verdana"/>
+                <a:latin typeface="Arial"/>
               </a:rPr>
               <a:t>Neudata | #ClearDataClearImpact</a:t>
             </a:r>
@@ -23748,8 +23490,8 @@
                 <a:solidFill>
                   <a:srgbClr val="0D7377"/>
                 </a:solidFill>
-                <a:latin typeface="Century Gothic"/>
-                <a:cs typeface="Century Gothic"/>
+                <a:latin typeface="Arial"/>
+                <a:cs typeface="Arial"/>
               </a:rPr>
               <a:t>Exit question</a:t>
             </a:r>
@@ -23819,8 +23561,8 @@
                 <a:solidFill>
                   <a:srgbClr val="FFFFFF"/>
                 </a:solidFill>
-                <a:latin typeface="Century Gothic"/>
-                <a:cs typeface="Century Gothic"/>
+                <a:latin typeface="Arial"/>
+                <a:cs typeface="Arial"/>
               </a:rPr>
               <a:t>QUICK QUIZ   |   2 min</a:t>
             </a:r>
@@ -23857,25 +23599,19 @@
               <a:spcBef>
                 <a:spcPts val="450"/>
               </a:spcBef>
-              <a:buNone/>
-            </a:pPr>
-            <a:r>
-              <a:rPr lang="en-US" sz="1650" b="1" dirty="0">
-                <a:solidFill>
-                  <a:srgbClr val="6C3483"/>
-                </a:solidFill>
-                <a:latin typeface="Century Gothic"/>
-                <a:cs typeface="Century Gothic"/>
-              </a:rPr>
-              <a:t>1.  </a:t>
-            </a:r>
+              <a:buClr>
+                <a:srgbClr val="6C3483"/>
+              </a:buClr>
+              <a:buFont typeface="Arial"/>
+              <a:buChar char="•"/>
+            </a:pPr>
             <a:r>
               <a:rPr lang="en-US" sz="1650" dirty="0">
                 <a:solidFill>
                   <a:srgbClr val="000000"/>
                 </a:solidFill>
-                <a:latin typeface="Century Gothic"/>
-                <a:cs typeface="Century Gothic"/>
+                <a:latin typeface="Arial"/>
+                <a:cs typeface="Arial"/>
               </a:rPr>
               <a:t>Which gives MORE hits: septic shock AND fluids, or septic shock OR fluids?</a:t>
             </a:r>
@@ -23888,25 +23624,19 @@
               <a:spcBef>
                 <a:spcPts val="450"/>
               </a:spcBef>
-              <a:buNone/>
-            </a:pPr>
-            <a:r>
-              <a:rPr lang="en-US" sz="1650" b="1" dirty="0">
-                <a:solidFill>
-                  <a:srgbClr val="6C3483"/>
-                </a:solidFill>
-                <a:latin typeface="Century Gothic"/>
-                <a:cs typeface="Century Gothic"/>
-              </a:rPr>
-              <a:t>2.  </a:t>
-            </a:r>
+              <a:buClr>
+                <a:srgbClr val="6C3483"/>
+              </a:buClr>
+              <a:buFont typeface="Arial"/>
+              <a:buChar char="•"/>
+            </a:pPr>
             <a:r>
               <a:rPr lang="en-US" sz="1650" dirty="0">
                 <a:solidFill>
                   <a:srgbClr val="000000"/>
                 </a:solidFill>
-                <a:latin typeface="Century Gothic"/>
-                <a:cs typeface="Century Gothic"/>
+                <a:latin typeface="Arial"/>
+                <a:cs typeface="Arial"/>
               </a:rPr>
               <a:t>What was the primary outcome of Paper 1?</a:t>
             </a:r>
@@ -23919,25 +23649,19 @@
               <a:spcBef>
                 <a:spcPts val="450"/>
               </a:spcBef>
-              <a:buNone/>
-            </a:pPr>
-            <a:r>
-              <a:rPr lang="en-US" sz="1650" b="1" dirty="0">
-                <a:solidFill>
-                  <a:srgbClr val="6C3483"/>
-                </a:solidFill>
-                <a:latin typeface="Century Gothic"/>
-                <a:cs typeface="Century Gothic"/>
-              </a:rPr>
-              <a:t>3.  </a:t>
-            </a:r>
+              <a:buClr>
+                <a:srgbClr val="6C3483"/>
+              </a:buClr>
+              <a:buFont typeface="Arial"/>
+              <a:buChar char="•"/>
+            </a:pPr>
             <a:r>
               <a:rPr lang="en-US" sz="1650" dirty="0">
                 <a:solidFill>
                   <a:srgbClr val="000000"/>
                 </a:solidFill>
-                <a:latin typeface="Century Gothic"/>
-                <a:cs typeface="Century Gothic"/>
+                <a:latin typeface="Arial"/>
+                <a:cs typeface="Arial"/>
               </a:rPr>
               <a:t>Write both answers on a sticky note (no names) and stick it on the door as you leave</a:t>
             </a:r>
@@ -23983,8 +23707,8 @@
                 <a:solidFill>
                   <a:srgbClr val="6C3483"/>
                 </a:solidFill>
-                <a:latin typeface="Century Gothic"/>
-                <a:cs typeface="Century Gothic"/>
+                <a:latin typeface="Arial"/>
+                <a:cs typeface="Arial"/>
               </a:rPr>
               <a:t>OUTPUT   </a:t>
             </a:r>
@@ -23993,8 +23717,8 @@
                 <a:solidFill>
                   <a:srgbClr val="000000"/>
                 </a:solidFill>
-                <a:latin typeface="Century Gothic"/>
-                <a:cs typeface="Century Gothic"/>
+                <a:latin typeface="Arial"/>
+                <a:cs typeface="Arial"/>
               </a:rPr>
               <a:t>One sticky note per person (we read them before Session 3)</a:t>
             </a:r>
@@ -24031,7 +23755,7 @@
                     <a:lumMod val="50000"/>
                   </a:schemeClr>
                 </a:solidFill>
-                <a:latin typeface="Verdana"/>
+                <a:latin typeface="Arial"/>
               </a:rPr>
               <a:t>Neudata | #ClearDataClearImpact</a:t>
             </a:r>
@@ -24161,8 +23885,8 @@
                 <a:solidFill>
                   <a:srgbClr val="0D7377"/>
                 </a:solidFill>
-                <a:latin typeface="Century Gothic"/>
-                <a:cs typeface="Century Gothic"/>
+                <a:latin typeface="Arial"/>
+                <a:cs typeface="Arial"/>
               </a:rPr>
               <a:t>Homework before Session 3 (next Saturday)</a:t>
             </a:r>
@@ -24232,8 +23956,8 @@
                 <a:solidFill>
                   <a:srgbClr val="FFFFFF"/>
                 </a:solidFill>
-                <a:latin typeface="Century Gothic"/>
-                <a:cs typeface="Century Gothic"/>
+                <a:latin typeface="Arial"/>
+                <a:cs typeface="Arial"/>
               </a:rPr>
               <a:t>INDIVIDUAL TASK</a:t>
             </a:r>
@@ -24270,25 +23994,19 @@
               <a:spcBef>
                 <a:spcPts val="450"/>
               </a:spcBef>
-              <a:buNone/>
-            </a:pPr>
-            <a:r>
-              <a:rPr lang="en-US" sz="1650" b="1" dirty="0">
-                <a:solidFill>
-                  <a:srgbClr val="0B376C"/>
-                </a:solidFill>
-                <a:latin typeface="Century Gothic"/>
-                <a:cs typeface="Century Gothic"/>
-              </a:rPr>
-              <a:t>1.  </a:t>
-            </a:r>
+              <a:buClr>
+                <a:srgbClr val="0B376C"/>
+              </a:buClr>
+              <a:buFont typeface="Arial"/>
+              <a:buChar char="•"/>
+            </a:pPr>
             <a:r>
               <a:rPr lang="en-US" sz="1650" dirty="0">
                 <a:solidFill>
                   <a:srgbClr val="000000"/>
                 </a:solidFill>
-                <a:latin typeface="Century Gothic"/>
-                <a:cs typeface="Century Gothic"/>
+                <a:latin typeface="Arial"/>
+                <a:cs typeface="Arial"/>
               </a:rPr>
               <a:t>Group: finish the 5 key references and the problem statement</a:t>
             </a:r>
@@ -24301,25 +24019,19 @@
               <a:spcBef>
                 <a:spcPts val="450"/>
               </a:spcBef>
-              <a:buNone/>
-            </a:pPr>
-            <a:r>
-              <a:rPr lang="en-US" sz="1650" b="1" dirty="0">
-                <a:solidFill>
-                  <a:srgbClr val="0B376C"/>
-                </a:solidFill>
-                <a:latin typeface="Century Gothic"/>
-                <a:cs typeface="Century Gothic"/>
-              </a:rPr>
-              <a:t>2.  </a:t>
-            </a:r>
+              <a:buClr>
+                <a:srgbClr val="0B376C"/>
+              </a:buClr>
+              <a:buFont typeface="Arial"/>
+              <a:buChar char="•"/>
+            </a:pPr>
             <a:r>
               <a:rPr lang="en-US" sz="1650" dirty="0">
                 <a:solidFill>
                   <a:srgbClr val="000000"/>
                 </a:solidFill>
-                <a:latin typeface="Century Gothic"/>
-                <a:cs typeface="Century Gothic"/>
+                <a:latin typeface="Arial"/>
+                <a:cs typeface="Arial"/>
               </a:rPr>
               <a:t>Each member: read one paper with the 15-minute routine and fill its row</a:t>
             </a:r>
@@ -24332,25 +24044,19 @@
               <a:spcBef>
                 <a:spcPts val="450"/>
               </a:spcBef>
-              <a:buNone/>
-            </a:pPr>
-            <a:r>
-              <a:rPr lang="en-US" sz="1650" b="1" dirty="0">
-                <a:solidFill>
-                  <a:srgbClr val="0B376C"/>
-                </a:solidFill>
-                <a:latin typeface="Century Gothic"/>
-                <a:cs typeface="Century Gothic"/>
-              </a:rPr>
-              <a:t>3.  </a:t>
-            </a:r>
+              <a:buClr>
+                <a:srgbClr val="0B376C"/>
+              </a:buClr>
+              <a:buFont typeface="Arial"/>
+              <a:buChar char="•"/>
+            </a:pPr>
             <a:r>
               <a:rPr lang="en-US" sz="1650" dirty="0">
                 <a:solidFill>
                   <a:srgbClr val="000000"/>
                 </a:solidFill>
-                <a:latin typeface="Century Gothic"/>
-                <a:cs typeface="Century Gothic"/>
+                <a:latin typeface="Arial"/>
+                <a:cs typeface="Arial"/>
               </a:rPr>
               <a:t>Everyone: read the abstract of Paper 2 (Hyun) with the reading grid</a:t>
             </a:r>
@@ -24363,25 +24069,19 @@
               <a:spcBef>
                 <a:spcPts val="450"/>
               </a:spcBef>
-              <a:buNone/>
-            </a:pPr>
-            <a:r>
-              <a:rPr lang="en-US" sz="1650" b="1" dirty="0">
-                <a:solidFill>
-                  <a:srgbClr val="0B376C"/>
-                </a:solidFill>
-                <a:latin typeface="Century Gothic"/>
-                <a:cs typeface="Century Gothic"/>
-              </a:rPr>
-              <a:t>4.  </a:t>
-            </a:r>
+              <a:buClr>
+                <a:srgbClr val="0B376C"/>
+              </a:buClr>
+              <a:buFont typeface="Arial"/>
+              <a:buChar char="•"/>
+            </a:pPr>
             <a:r>
               <a:rPr lang="en-US" sz="1650" dirty="0">
                 <a:solidFill>
                   <a:srgbClr val="000000"/>
                 </a:solidFill>
-                <a:latin typeface="Century Gothic"/>
-                <a:cs typeface="Century Gothic"/>
+                <a:latin typeface="Arial"/>
+                <a:cs typeface="Arial"/>
               </a:rPr>
               <a:t>Exercise 2 (paraphrasing) if not done in class</a:t>
             </a:r>
@@ -24394,25 +24094,19 @@
               <a:spcBef>
                 <a:spcPts val="450"/>
               </a:spcBef>
-              <a:buNone/>
-            </a:pPr>
-            <a:r>
-              <a:rPr lang="en-US" sz="1650" b="1" dirty="0">
-                <a:solidFill>
-                  <a:srgbClr val="0B376C"/>
-                </a:solidFill>
-                <a:latin typeface="Century Gothic"/>
-                <a:cs typeface="Century Gothic"/>
-              </a:rPr>
-              <a:t>5.  </a:t>
-            </a:r>
+              <a:buClr>
+                <a:srgbClr val="0B376C"/>
+              </a:buClr>
+              <a:buFont typeface="Arial"/>
+              <a:buChar char="•"/>
+            </a:pPr>
             <a:r>
               <a:rPr lang="en-US" sz="1650" dirty="0">
                 <a:solidFill>
                   <a:srgbClr val="000000"/>
                 </a:solidFill>
-                <a:latin typeface="Century Gothic"/>
-                <a:cs typeface="Century Gothic"/>
+                <a:latin typeface="Arial"/>
+                <a:cs typeface="Arial"/>
               </a:rPr>
               <a:t>Optional: look up Paper 1 (NCT04947904) on ClinicalTrials.gov</a:t>
             </a:r>
@@ -24456,8 +24150,8 @@
                 <a:solidFill>
                   <a:srgbClr val="0B376C"/>
                 </a:solidFill>
-                <a:latin typeface="Century Gothic"/>
-                <a:cs typeface="Century Gothic"/>
+                <a:latin typeface="Arial"/>
+                <a:cs typeface="Arial"/>
               </a:rPr>
               <a:t>Bring next Saturday</a:t>
             </a:r>
@@ -24478,8 +24172,8 @@
                 <a:solidFill>
                   <a:srgbClr val="000000"/>
                 </a:solidFill>
-                <a:latin typeface="Century Gothic"/>
-                <a:cs typeface="Century Gothic"/>
+                <a:latin typeface="Arial"/>
+                <a:cs typeface="Arial"/>
               </a:rPr>
               <a:t>Proposal Part 1 (printed or on a laptop)</a:t>
             </a:r>
@@ -24500,8 +24194,8 @@
                 <a:solidFill>
                   <a:srgbClr val="000000"/>
                 </a:solidFill>
-                <a:latin typeface="Century Gothic"/>
-                <a:cs typeface="Century Gothic"/>
+                <a:latin typeface="Arial"/>
+                <a:cs typeface="Arial"/>
               </a:rPr>
               <a:t>Your completed literature matrix</a:t>
             </a:r>
@@ -24547,8 +24241,8 @@
                 <a:solidFill>
                   <a:srgbClr val="0B376C"/>
                 </a:solidFill>
-                <a:latin typeface="Century Gothic"/>
-                <a:cs typeface="Century Gothic"/>
+                <a:latin typeface="Arial"/>
+                <a:cs typeface="Arial"/>
               </a:rPr>
               <a:t>OUTPUT   </a:t>
             </a:r>
@@ -24557,8 +24251,8 @@
                 <a:solidFill>
                   <a:srgbClr val="000000"/>
                 </a:solidFill>
-                <a:latin typeface="Century Gothic"/>
-                <a:cs typeface="Century Gothic"/>
+                <a:latin typeface="Arial"/>
+                <a:cs typeface="Arial"/>
               </a:rPr>
               <a:t>Proposal Part 1 complete before Session 3</a:t>
             </a:r>
@@ -24595,7 +24289,7 @@
                     <a:lumMod val="50000"/>
                   </a:schemeClr>
                 </a:solidFill>
-                <a:latin typeface="Verdana"/>
+                <a:latin typeface="Arial"/>
               </a:rPr>
               <a:t>Neudata | #ClearDataClearImpact</a:t>
             </a:r>
@@ -24728,8 +24422,8 @@
                 <a:solidFill>
                   <a:srgbClr val="0D7377"/>
                 </a:solidFill>
-                <a:latin typeface="Century Gothic"/>
-                <a:cs typeface="Century Gothic"/>
+                <a:latin typeface="Arial"/>
+                <a:cs typeface="Arial"/>
               </a:rPr>
               <a:t>Extra slides: Session 2</a:t>
             </a:r>
@@ -24746,8 +24440,8 @@
                 <a:solidFill>
                   <a:srgbClr val="595959"/>
                 </a:solidFill>
-                <a:latin typeface="Century Gothic"/>
-                <a:cs typeface="Century Gothic"/>
+                <a:latin typeface="Arial"/>
+                <a:cs typeface="Arial"/>
               </a:rPr>
               <a:t>Use if time allows, or for self-study</a:t>
             </a:r>
@@ -24784,7 +24478,7 @@
                     <a:lumMod val="50000"/>
                   </a:schemeClr>
                 </a:solidFill>
-                <a:latin typeface="Verdana"/>
+                <a:latin typeface="Arial"/>
               </a:rPr>
               <a:t>Neudata | #ClearDataClearImpact</a:t>
             </a:r>
@@ -24914,8 +24608,8 @@
                 <a:solidFill>
                   <a:srgbClr val="0D7377"/>
                 </a:solidFill>
-                <a:latin typeface="Century Gothic"/>
-                <a:cs typeface="Century Gothic"/>
+                <a:latin typeface="Arial"/>
+                <a:cs typeface="Arial"/>
               </a:rPr>
               <a:t>Beyond PubMed: other places to search</a:t>
             </a:r>
@@ -24985,8 +24679,8 @@
                 <a:solidFill>
                   <a:srgbClr val="FFFFFF"/>
                 </a:solidFill>
-                <a:latin typeface="Century Gothic"/>
-                <a:cs typeface="Century Gothic"/>
+                <a:latin typeface="Arial"/>
+                <a:cs typeface="Arial"/>
               </a:rPr>
               <a:t>Cochrane Library</a:t>
             </a:r>
@@ -25034,8 +24728,8 @@
                 <a:solidFill>
                   <a:srgbClr val="000000"/>
                 </a:solidFill>
-                <a:latin typeface="Century Gothic"/>
-                <a:cs typeface="Century Gothic"/>
+                <a:latin typeface="Arial"/>
+                <a:cs typeface="Arial"/>
               </a:rPr>
               <a:t>Systematic reviews</a:t>
             </a:r>
@@ -25055,8 +24749,8 @@
                 <a:solidFill>
                   <a:srgbClr val="000000"/>
                 </a:solidFill>
-                <a:latin typeface="Century Gothic"/>
-                <a:cs typeface="Century Gothic"/>
+                <a:latin typeface="Arial"/>
+                <a:cs typeface="Arial"/>
               </a:rPr>
               <a:t>and a register</a:t>
             </a:r>
@@ -25076,8 +24770,8 @@
                 <a:solidFill>
                   <a:srgbClr val="000000"/>
                 </a:solidFill>
-                <a:latin typeface="Century Gothic"/>
-                <a:cs typeface="Century Gothic"/>
+                <a:latin typeface="Arial"/>
+                <a:cs typeface="Arial"/>
               </a:rPr>
               <a:t>of trials</a:t>
             </a:r>
@@ -25119,8 +24813,8 @@
                 <a:solidFill>
                   <a:srgbClr val="FFFFFF"/>
                 </a:solidFill>
-                <a:latin typeface="Century Gothic"/>
-                <a:cs typeface="Century Gothic"/>
+                <a:latin typeface="Arial"/>
+                <a:cs typeface="Arial"/>
               </a:rPr>
               <a:t>Embase</a:t>
             </a:r>
@@ -25168,8 +24862,8 @@
                 <a:solidFill>
                   <a:srgbClr val="000000"/>
                 </a:solidFill>
-                <a:latin typeface="Century Gothic"/>
-                <a:cs typeface="Century Gothic"/>
+                <a:latin typeface="Arial"/>
+                <a:cs typeface="Arial"/>
               </a:rPr>
               <a:t>Large biomedical</a:t>
             </a:r>
@@ -25189,8 +24883,8 @@
                 <a:solidFill>
                   <a:srgbClr val="000000"/>
                 </a:solidFill>
-                <a:latin typeface="Century Gothic"/>
-                <a:cs typeface="Century Gothic"/>
+                <a:latin typeface="Arial"/>
+                <a:cs typeface="Arial"/>
               </a:rPr>
               <a:t>database; strong on</a:t>
             </a:r>
@@ -25210,8 +24904,8 @@
                 <a:solidFill>
                   <a:srgbClr val="000000"/>
                 </a:solidFill>
-                <a:latin typeface="Century Gothic"/>
-                <a:cs typeface="Century Gothic"/>
+                <a:latin typeface="Arial"/>
+                <a:cs typeface="Arial"/>
               </a:rPr>
               <a:t>drugs (subscription)</a:t>
             </a:r>
@@ -25253,8 +24947,8 @@
                 <a:solidFill>
                   <a:srgbClr val="FFFFFF"/>
                 </a:solidFill>
-                <a:latin typeface="Century Gothic"/>
-                <a:cs typeface="Century Gothic"/>
+                <a:latin typeface="Arial"/>
+                <a:cs typeface="Arial"/>
               </a:rPr>
               <a:t>CINAHL</a:t>
             </a:r>
@@ -25302,8 +24996,8 @@
                 <a:solidFill>
                   <a:srgbClr val="000000"/>
                 </a:solidFill>
-                <a:latin typeface="Century Gothic"/>
-                <a:cs typeface="Century Gothic"/>
+                <a:latin typeface="Arial"/>
+                <a:cs typeface="Arial"/>
               </a:rPr>
               <a:t>Nursing and allied</a:t>
             </a:r>
@@ -25323,8 +25017,8 @@
                 <a:solidFill>
                   <a:srgbClr val="000000"/>
                 </a:solidFill>
-                <a:latin typeface="Century Gothic"/>
-                <a:cs typeface="Century Gothic"/>
+                <a:latin typeface="Arial"/>
+                <a:cs typeface="Arial"/>
               </a:rPr>
               <a:t>health literature</a:t>
             </a:r>
@@ -25344,8 +25038,8 @@
                 <a:solidFill>
                   <a:srgbClr val="000000"/>
                 </a:solidFill>
-                <a:latin typeface="Century Gothic"/>
-                <a:cs typeface="Century Gothic"/>
+                <a:latin typeface="Arial"/>
+                <a:cs typeface="Arial"/>
               </a:rPr>
               <a:t>(subscription)</a:t>
             </a:r>
@@ -25387,8 +25081,8 @@
                 <a:solidFill>
                   <a:srgbClr val="FFFFFF"/>
                 </a:solidFill>
-                <a:latin typeface="Century Gothic"/>
-                <a:cs typeface="Century Gothic"/>
+                <a:latin typeface="Arial"/>
+                <a:cs typeface="Arial"/>
               </a:rPr>
               <a:t>Trial registries</a:t>
             </a:r>
@@ -25436,8 +25130,8 @@
                 <a:solidFill>
                   <a:srgbClr val="000000"/>
                 </a:solidFill>
-                <a:latin typeface="Century Gothic"/>
-                <a:cs typeface="Century Gothic"/>
+                <a:latin typeface="Arial"/>
+                <a:cs typeface="Arial"/>
               </a:rPr>
               <a:t>ClinicalTrials.gov,</a:t>
             </a:r>
@@ -25457,8 +25151,8 @@
                 <a:solidFill>
                   <a:srgbClr val="000000"/>
                 </a:solidFill>
-                <a:latin typeface="Century Gothic"/>
-                <a:cs typeface="Century Gothic"/>
+                <a:latin typeface="Arial"/>
+                <a:cs typeface="Arial"/>
               </a:rPr>
               <a:t>WHO ICTRP: ongoing</a:t>
             </a:r>
@@ -25478,8 +25172,8 @@
                 <a:solidFill>
                   <a:srgbClr val="000000"/>
                 </a:solidFill>
-                <a:latin typeface="Century Gothic"/>
-                <a:cs typeface="Century Gothic"/>
+                <a:latin typeface="Arial"/>
+                <a:cs typeface="Arial"/>
               </a:rPr>
               <a:t>and unpublished trials</a:t>
             </a:r>
@@ -25523,8 +25217,8 @@
                 <a:solidFill>
                   <a:srgbClr val="FFFFFF"/>
                 </a:solidFill>
-                <a:latin typeface="Century Gothic"/>
-                <a:cs typeface="Century Gothic"/>
+                <a:latin typeface="Arial"/>
+                <a:cs typeface="Arial"/>
               </a:rPr>
               <a:t>KEY MESSAGE   </a:t>
             </a:r>
@@ -25533,8 +25227,8 @@
                 <a:solidFill>
                   <a:srgbClr val="FFFFFF"/>
                 </a:solidFill>
-                <a:latin typeface="Century Gothic"/>
-                <a:cs typeface="Century Gothic"/>
+                <a:latin typeface="Arial"/>
+                <a:cs typeface="Arial"/>
               </a:rPr>
               <a:t>For a proposal, PubMed + a registry is enough; systematic reviews search several databases.</a:t>
             </a:r>
@@ -25571,7 +25265,7 @@
                     <a:lumMod val="50000"/>
                   </a:schemeClr>
                 </a:solidFill>
-                <a:latin typeface="Verdana"/>
+                <a:latin typeface="Arial"/>
               </a:rPr>
               <a:t>Neudata | #ClearDataClearImpact</a:t>
             </a:r>
@@ -25701,8 +25395,8 @@
                 <a:solidFill>
                   <a:srgbClr val="0D7377"/>
                 </a:solidFill>
-                <a:latin typeface="Century Gothic"/>
-                <a:cs typeface="Century Gothic"/>
+                <a:latin typeface="Arial"/>
+                <a:cs typeface="Arial"/>
               </a:rPr>
               <a:t>PubMed Clinical Queries: a ready-made filter</a:t>
             </a:r>
@@ -25774,8 +25468,8 @@
                 <a:solidFill>
                   <a:srgbClr val="FFFFFF"/>
                 </a:solidFill>
-                <a:latin typeface="Century Gothic"/>
-                <a:cs typeface="Century Gothic"/>
+                <a:latin typeface="Arial"/>
+                <a:cs typeface="Arial"/>
               </a:rPr>
               <a:t>Open</a:t>
             </a:r>
@@ -25823,8 +25517,8 @@
                 <a:solidFill>
                   <a:srgbClr val="000000"/>
                 </a:solidFill>
-                <a:latin typeface="Century Gothic"/>
-                <a:cs typeface="Century Gothic"/>
+                <a:latin typeface="Arial"/>
+                <a:cs typeface="Arial"/>
               </a:rPr>
               <a:t>PubMed home page:</a:t>
             </a:r>
@@ -25844,8 +25538,8 @@
                 <a:solidFill>
                   <a:srgbClr val="000000"/>
                 </a:solidFill>
-                <a:latin typeface="Century Gothic"/>
-                <a:cs typeface="Century Gothic"/>
+                <a:latin typeface="Arial"/>
+                <a:cs typeface="Arial"/>
               </a:rPr>
               <a:t>Clinical Queries</a:t>
             </a:r>
@@ -25865,8 +25559,8 @@
                 <a:solidFill>
                   <a:srgbClr val="000000"/>
                 </a:solidFill>
-                <a:latin typeface="Century Gothic"/>
-                <a:cs typeface="Century Gothic"/>
+                <a:latin typeface="Arial"/>
+                <a:cs typeface="Arial"/>
               </a:rPr>
               <a:t>(under Find)</a:t>
             </a:r>
@@ -25910,8 +25604,8 @@
                 <a:solidFill>
                   <a:srgbClr val="FFFFFF"/>
                 </a:solidFill>
-                <a:latin typeface="Century Gothic"/>
-                <a:cs typeface="Century Gothic"/>
+                <a:latin typeface="Arial"/>
+                <a:cs typeface="Arial"/>
               </a:rPr>
               <a:t>Type</a:t>
             </a:r>
@@ -25959,8 +25653,8 @@
                 <a:solidFill>
                   <a:srgbClr val="000000"/>
                 </a:solidFill>
-                <a:latin typeface="Century Gothic"/>
-                <a:cs typeface="Century Gothic"/>
+                <a:latin typeface="Arial"/>
+                <a:cs typeface="Arial"/>
               </a:rPr>
               <a:t>Your topic words,</a:t>
             </a:r>
@@ -25980,8 +25674,8 @@
                 <a:solidFill>
                   <a:srgbClr val="000000"/>
                 </a:solidFill>
-                <a:latin typeface="Century Gothic"/>
-                <a:cs typeface="Century Gothic"/>
+                <a:latin typeface="Arial"/>
+                <a:cs typeface="Arial"/>
               </a:rPr>
               <a:t>e.g. septic shock</a:t>
             </a:r>
@@ -26001,8 +25695,8 @@
                 <a:solidFill>
                   <a:srgbClr val="000000"/>
                 </a:solidFill>
-                <a:latin typeface="Century Gothic"/>
-                <a:cs typeface="Century Gothic"/>
+                <a:latin typeface="Arial"/>
+                <a:cs typeface="Arial"/>
               </a:rPr>
               <a:t>fluid restriction</a:t>
             </a:r>
@@ -26046,8 +25740,8 @@
                 <a:solidFill>
                   <a:srgbClr val="FFFFFF"/>
                 </a:solidFill>
-                <a:latin typeface="Century Gothic"/>
-                <a:cs typeface="Century Gothic"/>
+                <a:latin typeface="Arial"/>
+                <a:cs typeface="Arial"/>
               </a:rPr>
               <a:t>Choose</a:t>
             </a:r>
@@ -26095,8 +25789,8 @@
                 <a:solidFill>
                   <a:srgbClr val="000000"/>
                 </a:solidFill>
-                <a:latin typeface="Century Gothic"/>
-                <a:cs typeface="Century Gothic"/>
+                <a:latin typeface="Arial"/>
+                <a:cs typeface="Arial"/>
               </a:rPr>
               <a:t>Category: therapy,</a:t>
             </a:r>
@@ -26116,8 +25810,8 @@
                 <a:solidFill>
                   <a:srgbClr val="000000"/>
                 </a:solidFill>
-                <a:latin typeface="Century Gothic"/>
-                <a:cs typeface="Century Gothic"/>
+                <a:latin typeface="Arial"/>
+                <a:cs typeface="Arial"/>
               </a:rPr>
               <a:t>diagnosis, etiology,</a:t>
             </a:r>
@@ -26137,8 +25831,8 @@
                 <a:solidFill>
                   <a:srgbClr val="000000"/>
                 </a:solidFill>
-                <a:latin typeface="Century Gothic"/>
-                <a:cs typeface="Century Gothic"/>
+                <a:latin typeface="Arial"/>
+                <a:cs typeface="Arial"/>
               </a:rPr>
               <a:t>prognosis...</a:t>
             </a:r>
@@ -26182,8 +25876,8 @@
                 <a:solidFill>
                   <a:srgbClr val="FFFFFF"/>
                 </a:solidFill>
-                <a:latin typeface="Century Gothic"/>
-                <a:cs typeface="Century Gothic"/>
+                <a:latin typeface="Arial"/>
+                <a:cs typeface="Arial"/>
               </a:rPr>
               <a:t>Scope</a:t>
             </a:r>
@@ -26231,8 +25925,8 @@
                 <a:solidFill>
                   <a:srgbClr val="000000"/>
                 </a:solidFill>
-                <a:latin typeface="Century Gothic"/>
-                <a:cs typeface="Century Gothic"/>
+                <a:latin typeface="Arial"/>
+                <a:cs typeface="Arial"/>
               </a:rPr>
               <a:t>Broad (finds more)</a:t>
             </a:r>
@@ -26252,8 +25946,8 @@
                 <a:solidFill>
                   <a:srgbClr val="000000"/>
                 </a:solidFill>
-                <a:latin typeface="Century Gothic"/>
-                <a:cs typeface="Century Gothic"/>
+                <a:latin typeface="Arial"/>
+                <a:cs typeface="Arial"/>
               </a:rPr>
               <a:t>or narrow (more</a:t>
             </a:r>
@@ -26273,8 +25967,8 @@
                 <a:solidFill>
                   <a:srgbClr val="000000"/>
                 </a:solidFill>
-                <a:latin typeface="Century Gothic"/>
-                <a:cs typeface="Century Gothic"/>
+                <a:latin typeface="Arial"/>
+                <a:cs typeface="Arial"/>
               </a:rPr>
               <a:t>precise)</a:t>
             </a:r>
@@ -26318,8 +26012,8 @@
                 <a:solidFill>
                   <a:srgbClr val="FFFFFF"/>
                 </a:solidFill>
-                <a:latin typeface="Century Gothic"/>
-                <a:cs typeface="Century Gothic"/>
+                <a:latin typeface="Arial"/>
+                <a:cs typeface="Arial"/>
               </a:rPr>
               <a:t>KEY MESSAGE   </a:t>
             </a:r>
@@ -26328,8 +26022,8 @@
                 <a:solidFill>
                   <a:srgbClr val="FFFFFF"/>
                 </a:solidFill>
-                <a:latin typeface="Century Gothic"/>
-                <a:cs typeface="Century Gothic"/>
+                <a:latin typeface="Arial"/>
+                <a:cs typeface="Arial"/>
               </a:rPr>
               <a:t>A quick shortcut for 'is there good evidence?', not a replacement for your own search.</a:t>
             </a:r>
@@ -26366,7 +26060,7 @@
                     <a:lumMod val="50000"/>
                   </a:schemeClr>
                 </a:solidFill>
-                <a:latin typeface="Verdana"/>
+                <a:latin typeface="Arial"/>
               </a:rPr>
               <a:t>Neudata | #ClearDataClearImpact</a:t>
             </a:r>
@@ -26496,8 +26190,8 @@
                 <a:solidFill>
                   <a:srgbClr val="0D7377"/>
                 </a:solidFill>
-                <a:latin typeface="Century Gothic"/>
-                <a:cs typeface="Century Gothic"/>
+                <a:latin typeface="Arial"/>
+                <a:cs typeface="Arial"/>
               </a:rPr>
               <a:t>Optional demo: Google Scholar and 'Cited by'</a:t>
             </a:r>
@@ -26567,8 +26261,8 @@
                 <a:solidFill>
                   <a:srgbClr val="FFFFFF"/>
                 </a:solidFill>
-                <a:latin typeface="Century Gothic"/>
-                <a:cs typeface="Century Gothic"/>
+                <a:latin typeface="Arial"/>
+                <a:cs typeface="Arial"/>
               </a:rPr>
               <a:t>LIVE DEMO   |   3 min</a:t>
             </a:r>
@@ -26605,25 +26299,19 @@
               <a:spcBef>
                 <a:spcPts val="450"/>
               </a:spcBef>
-              <a:buNone/>
-            </a:pPr>
-            <a:r>
-              <a:rPr lang="en-US" sz="1650" b="1" dirty="0">
-                <a:solidFill>
-                  <a:srgbClr val="B5651D"/>
-                </a:solidFill>
-                <a:latin typeface="Century Gothic"/>
-                <a:cs typeface="Century Gothic"/>
-              </a:rPr>
-              <a:t>1.  </a:t>
-            </a:r>
+              <a:buClr>
+                <a:srgbClr val="B5651D"/>
+              </a:buClr>
+              <a:buFont typeface="Arial"/>
+              <a:buChar char="•"/>
+            </a:pPr>
             <a:r>
               <a:rPr lang="en-US" sz="1650" dirty="0">
                 <a:solidFill>
                   <a:srgbClr val="000000"/>
                 </a:solidFill>
-                <a:latin typeface="Century Gothic"/>
-                <a:cs typeface="Century Gothic"/>
+                <a:latin typeface="Arial"/>
+                <a:cs typeface="Arial"/>
               </a:rPr>
               <a:t>Search: restrictive fluid septic shock mortality</a:t>
             </a:r>
@@ -26636,25 +26324,19 @@
               <a:spcBef>
                 <a:spcPts val="450"/>
               </a:spcBef>
-              <a:buNone/>
-            </a:pPr>
-            <a:r>
-              <a:rPr lang="en-US" sz="1650" b="1" dirty="0">
-                <a:solidFill>
-                  <a:srgbClr val="B5651D"/>
-                </a:solidFill>
-                <a:latin typeface="Century Gothic"/>
-                <a:cs typeface="Century Gothic"/>
-              </a:rPr>
-              <a:t>2.  </a:t>
-            </a:r>
+              <a:buClr>
+                <a:srgbClr val="B5651D"/>
+              </a:buClr>
+              <a:buFont typeface="Arial"/>
+              <a:buChar char="•"/>
+            </a:pPr>
             <a:r>
               <a:rPr lang="en-US" sz="1650" dirty="0">
                 <a:solidFill>
                   <a:srgbClr val="000000"/>
                 </a:solidFill>
-                <a:latin typeface="Century Gothic"/>
-                <a:cs typeface="Century Gothic"/>
+                <a:latin typeface="Arial"/>
+                <a:cs typeface="Arial"/>
               </a:rPr>
               <a:t>Look: journals, theses, preprints, ranked by a hidden algorithm</a:t>
             </a:r>
@@ -26667,25 +26349,19 @@
               <a:spcBef>
                 <a:spcPts val="450"/>
               </a:spcBef>
-              <a:buNone/>
-            </a:pPr>
-            <a:r>
-              <a:rPr lang="en-US" sz="1650" b="1" dirty="0">
-                <a:solidFill>
-                  <a:srgbClr val="B5651D"/>
-                </a:solidFill>
-                <a:latin typeface="Century Gothic"/>
-                <a:cs typeface="Century Gothic"/>
-              </a:rPr>
-              <a:t>3.  </a:t>
-            </a:r>
+              <a:buClr>
+                <a:srgbClr val="B5651D"/>
+              </a:buClr>
+              <a:buFont typeface="Arial"/>
+              <a:buChar char="•"/>
+            </a:pPr>
             <a:r>
               <a:rPr lang="en-US" sz="1650" dirty="0">
                 <a:solidFill>
                   <a:srgbClr val="000000"/>
                 </a:solidFill>
-                <a:latin typeface="Century Gothic"/>
-                <a:cs typeface="Century Gothic"/>
+                <a:latin typeface="Arial"/>
+                <a:cs typeface="Arial"/>
               </a:rPr>
               <a:t>Under a key trial, click 'Cited by', then search within citing articles</a:t>
             </a:r>
@@ -26698,25 +26374,19 @@
               <a:spcBef>
                 <a:spcPts val="450"/>
               </a:spcBef>
-              <a:buNone/>
-            </a:pPr>
-            <a:r>
-              <a:rPr lang="en-US" sz="1650" b="1" dirty="0">
-                <a:solidFill>
-                  <a:srgbClr val="B5651D"/>
-                </a:solidFill>
-                <a:latin typeface="Century Gothic"/>
-                <a:cs typeface="Century Gothic"/>
-              </a:rPr>
-              <a:t>4.  </a:t>
-            </a:r>
+              <a:buClr>
+                <a:srgbClr val="B5651D"/>
+              </a:buClr>
+              <a:buFont typeface="Arial"/>
+              <a:buChar char="•"/>
+            </a:pPr>
             <a:r>
               <a:rPr lang="en-US" sz="1650" dirty="0">
                 <a:solidFill>
                   <a:srgbClr val="000000"/>
                 </a:solidFill>
-                <a:latin typeface="Century Gothic"/>
-                <a:cs typeface="Century Gothic"/>
+                <a:latin typeface="Arial"/>
+                <a:cs typeface="Arial"/>
               </a:rPr>
               <a:t>Click the quote icon to see export formats</a:t>
             </a:r>
@@ -26762,8 +26432,8 @@
                 <a:solidFill>
                   <a:srgbClr val="B5651D"/>
                 </a:solidFill>
-                <a:latin typeface="Century Gothic"/>
-                <a:cs typeface="Century Gothic"/>
+                <a:latin typeface="Arial"/>
+                <a:cs typeface="Arial"/>
               </a:rPr>
               <a:t>OUTPUT   </a:t>
             </a:r>
@@ -26772,8 +26442,8 @@
                 <a:solidFill>
                   <a:srgbClr val="000000"/>
                 </a:solidFill>
-                <a:latin typeface="Century Gothic"/>
-                <a:cs typeface="Century Gothic"/>
+                <a:latin typeface="Arial"/>
+                <a:cs typeface="Arial"/>
               </a:rPr>
               <a:t>Participants see what Scholar adds and what it lacks</a:t>
             </a:r>
@@ -26810,7 +26480,7 @@
                     <a:lumMod val="50000"/>
                   </a:schemeClr>
                 </a:solidFill>
-                <a:latin typeface="Verdana"/>
+                <a:latin typeface="Arial"/>
               </a:rPr>
               <a:t>Neudata | #ClearDataClearImpact</a:t>
             </a:r>
@@ -26940,8 +26610,8 @@
                 <a:solidFill>
                   <a:srgbClr val="0D7377"/>
                 </a:solidFill>
-                <a:latin typeface="Century Gothic"/>
-                <a:cs typeface="Century Gothic"/>
+                <a:latin typeface="Arial"/>
+                <a:cs typeface="Arial"/>
               </a:rPr>
               <a:t>Text recycling, AI tools and similarity checks</a:t>
             </a:r>
@@ -27011,8 +26681,8 @@
                 <a:solidFill>
                   <a:srgbClr val="FFFFFF"/>
                 </a:solidFill>
-                <a:latin typeface="Century Gothic"/>
-                <a:cs typeface="Century Gothic"/>
+                <a:latin typeface="Arial"/>
+                <a:cs typeface="Arial"/>
               </a:rPr>
               <a:t>Text recycling</a:t>
             </a:r>
@@ -27060,8 +26730,8 @@
                 <a:solidFill>
                   <a:srgbClr val="000000"/>
                 </a:solidFill>
-                <a:latin typeface="Century Gothic"/>
-                <a:cs typeface="Century Gothic"/>
+                <a:latin typeface="Arial"/>
+                <a:cs typeface="Arial"/>
               </a:rPr>
               <a:t>Reusing your own</a:t>
             </a:r>
@@ -27081,8 +26751,8 @@
                 <a:solidFill>
                   <a:srgbClr val="000000"/>
                 </a:solidFill>
-                <a:latin typeface="Century Gothic"/>
-                <a:cs typeface="Century Gothic"/>
+                <a:latin typeface="Arial"/>
+                <a:cs typeface="Arial"/>
               </a:rPr>
               <a:t>published wording:</a:t>
             </a:r>
@@ -27102,8 +26772,8 @@
                 <a:solidFill>
                   <a:srgbClr val="000000"/>
                 </a:solidFill>
-                <a:latin typeface="Century Gothic"/>
-                <a:cs typeface="Century Gothic"/>
+                <a:latin typeface="Arial"/>
+                <a:cs typeface="Arial"/>
               </a:rPr>
               <a:t>check journal policy</a:t>
             </a:r>
@@ -27145,8 +26815,8 @@
                 <a:solidFill>
                   <a:srgbClr val="FFFFFF"/>
                 </a:solidFill>
-                <a:latin typeface="Century Gothic"/>
-                <a:cs typeface="Century Gothic"/>
+                <a:latin typeface="Arial"/>
+                <a:cs typeface="Arial"/>
               </a:rPr>
               <a:t>AI rewording</a:t>
             </a:r>
@@ -27194,8 +26864,8 @@
                 <a:solidFill>
                   <a:srgbClr val="000000"/>
                 </a:solidFill>
-                <a:latin typeface="Century Gothic"/>
-                <a:cs typeface="Century Gothic"/>
+                <a:latin typeface="Arial"/>
+                <a:cs typeface="Arial"/>
               </a:rPr>
               <a:t>Does not remove</a:t>
             </a:r>
@@ -27215,8 +26885,8 @@
                 <a:solidFill>
                   <a:srgbClr val="000000"/>
                 </a:solidFill>
-                <a:latin typeface="Century Gothic"/>
-                <a:cs typeface="Century Gothic"/>
+                <a:latin typeface="Arial"/>
+                <a:cs typeface="Arial"/>
               </a:rPr>
               <a:t>plagiarism; you stay</a:t>
             </a:r>
@@ -27236,8 +26906,8 @@
                 <a:solidFill>
                   <a:srgbClr val="000000"/>
                 </a:solidFill>
-                <a:latin typeface="Century Gothic"/>
-                <a:cs typeface="Century Gothic"/>
+                <a:latin typeface="Arial"/>
+                <a:cs typeface="Arial"/>
               </a:rPr>
               <a:t>responsible</a:t>
             </a:r>
@@ -27279,8 +26949,8 @@
                 <a:solidFill>
                   <a:srgbClr val="FFFFFF"/>
                 </a:solidFill>
-                <a:latin typeface="Century Gothic"/>
-                <a:cs typeface="Century Gothic"/>
+                <a:latin typeface="Arial"/>
+                <a:cs typeface="Arial"/>
               </a:rPr>
               <a:t>AI references</a:t>
             </a:r>
@@ -27328,8 +26998,8 @@
                 <a:solidFill>
                   <a:srgbClr val="000000"/>
                 </a:solidFill>
-                <a:latin typeface="Century Gothic"/>
-                <a:cs typeface="Century Gothic"/>
+                <a:latin typeface="Arial"/>
+                <a:cs typeface="Arial"/>
               </a:rPr>
               <a:t>May be invented;</a:t>
             </a:r>
@@ -27349,8 +27019,8 @@
                 <a:solidFill>
                   <a:srgbClr val="000000"/>
                 </a:solidFill>
-                <a:latin typeface="Century Gothic"/>
-                <a:cs typeface="Century Gothic"/>
+                <a:latin typeface="Arial"/>
+                <a:cs typeface="Arial"/>
               </a:rPr>
               <a:t>find every one</a:t>
             </a:r>
@@ -27370,8 +27040,8 @@
                 <a:solidFill>
                   <a:srgbClr val="000000"/>
                 </a:solidFill>
-                <a:latin typeface="Century Gothic"/>
-                <a:cs typeface="Century Gothic"/>
+                <a:latin typeface="Arial"/>
+                <a:cs typeface="Arial"/>
               </a:rPr>
               <a:t>in PubMed</a:t>
             </a:r>
@@ -27413,8 +27083,8 @@
                 <a:solidFill>
                   <a:srgbClr val="FFFFFF"/>
                 </a:solidFill>
-                <a:latin typeface="Century Gothic"/>
-                <a:cs typeface="Century Gothic"/>
+                <a:latin typeface="Arial"/>
+                <a:cs typeface="Arial"/>
               </a:rPr>
               <a:t>Similarity checks</a:t>
             </a:r>
@@ -27462,8 +27132,8 @@
                 <a:solidFill>
                   <a:srgbClr val="000000"/>
                 </a:solidFill>
-                <a:latin typeface="Century Gothic"/>
-                <a:cs typeface="Century Gothic"/>
+                <a:latin typeface="Arial"/>
+                <a:cs typeface="Arial"/>
               </a:rPr>
               <a:t>Journals screen</a:t>
             </a:r>
@@ -27483,8 +27153,8 @@
                 <a:solidFill>
                   <a:srgbClr val="000000"/>
                 </a:solidFill>
-                <a:latin typeface="Century Gothic"/>
-                <a:cs typeface="Century Gothic"/>
+                <a:latin typeface="Arial"/>
+                <a:cs typeface="Arial"/>
               </a:rPr>
               <a:t>submissions for</a:t>
             </a:r>
@@ -27504,8 +27174,8 @@
                 <a:solidFill>
                   <a:srgbClr val="000000"/>
                 </a:solidFill>
-                <a:latin typeface="Century Gothic"/>
-                <a:cs typeface="Century Gothic"/>
+                <a:latin typeface="Arial"/>
+                <a:cs typeface="Arial"/>
               </a:rPr>
               <a:t>copied text</a:t>
             </a:r>
@@ -27549,8 +27219,8 @@
                 <a:solidFill>
                   <a:srgbClr val="FFFFFF"/>
                 </a:solidFill>
-                <a:latin typeface="Century Gothic"/>
-                <a:cs typeface="Century Gothic"/>
+                <a:latin typeface="Arial"/>
+                <a:cs typeface="Arial"/>
               </a:rPr>
               <a:t>KEY MESSAGE   </a:t>
             </a:r>
@@ -27559,8 +27229,8 @@
                 <a:solidFill>
                   <a:srgbClr val="FFFFFF"/>
                 </a:solidFill>
-                <a:latin typeface="Century Gothic"/>
-                <a:cs typeface="Century Gothic"/>
+                <a:latin typeface="Arial"/>
+                <a:cs typeface="Arial"/>
               </a:rPr>
               <a:t>Write from understanding, cite what you use, and check every reference yourself.</a:t>
             </a:r>
@@ -27597,7 +27267,7 @@
                     <a:lumMod val="50000"/>
                   </a:schemeClr>
                 </a:solidFill>
-                <a:latin typeface="Verdana"/>
+                <a:latin typeface="Arial"/>
               </a:rPr>
               <a:t>Neudata | #ClearDataClearImpact</a:t>
             </a:r>
@@ -27751,8 +27421,8 @@
                 <a:solidFill>
                   <a:srgbClr val="4472C4"/>
                 </a:solidFill>
-                <a:latin typeface="Century Gothic"/>
-                <a:cs typeface="Century Gothic"/>
+                <a:latin typeface="Arial"/>
+                <a:cs typeface="Arial"/>
               </a:rPr>
               <a:t>Copyright © Neudata, 2026</a:t>
             </a:r>
@@ -27897,7 +27567,7 @@
                     <a:lumMod val="50000"/>
                   </a:schemeClr>
                 </a:solidFill>
-                <a:latin typeface="Verdana"/>
+                <a:latin typeface="Arial"/>
               </a:rPr>
               <a:t>Neudata | #ClearDataClearImpact</a:t>
             </a:r>
@@ -28003,8 +27673,8 @@
                 <a:solidFill>
                   <a:srgbClr val="0D7377"/>
                 </a:solidFill>
-                <a:latin typeface="Century Gothic"/>
-                <a:cs typeface="Century Gothic"/>
+                <a:latin typeface="Arial"/>
+                <a:cs typeface="Arial"/>
               </a:rPr>
               <a:t>The search funnel</a:t>
             </a:r>
@@ -28100,8 +27770,8 @@
                 <a:solidFill>
                   <a:srgbClr val="FFFFFF"/>
                 </a:solidFill>
-                <a:latin typeface="Century Gothic"/>
-                <a:cs typeface="Century Gothic"/>
+                <a:latin typeface="Arial"/>
+                <a:cs typeface="Arial"/>
               </a:rPr>
               <a:t>KEY MESSAGE   </a:t>
             </a:r>
@@ -28110,8 +27780,8 @@
                 <a:solidFill>
                   <a:srgbClr val="FFFFFF"/>
                 </a:solidFill>
-                <a:latin typeface="Century Gothic"/>
-                <a:cs typeface="Century Gothic"/>
+                <a:latin typeface="Arial"/>
+                <a:cs typeface="Arial"/>
               </a:rPr>
               <a:t>A good search starts wide, narrows step by step, and is written down.</a:t>
             </a:r>
@@ -28148,7 +27818,7 @@
                     <a:lumMod val="50000"/>
                   </a:schemeClr>
                 </a:solidFill>
-                <a:latin typeface="Verdana"/>
+                <a:latin typeface="Arial"/>
               </a:rPr>
               <a:t>Neudata | #ClearDataClearImpact</a:t>
             </a:r>
@@ -28278,8 +27948,8 @@
                 <a:solidFill>
                   <a:srgbClr val="0D7377"/>
                 </a:solidFill>
-                <a:latin typeface="Century Gothic"/>
-                <a:cs typeface="Century Gothic"/>
+                <a:latin typeface="Arial"/>
+                <a:cs typeface="Arial"/>
               </a:rPr>
               <a:t>From PICO to search blocks</a:t>
             </a:r>
@@ -28375,8 +28045,8 @@
                 <a:solidFill>
                   <a:srgbClr val="FFFFFF"/>
                 </a:solidFill>
-                <a:latin typeface="Century Gothic"/>
-                <a:cs typeface="Century Gothic"/>
+                <a:latin typeface="Arial"/>
+                <a:cs typeface="Arial"/>
               </a:rPr>
               <a:t>KEY MESSAGE   </a:t>
             </a:r>
@@ -28385,8 +28055,8 @@
                 <a:solidFill>
                   <a:srgbClr val="FFFFFF"/>
                 </a:solidFill>
-                <a:latin typeface="Century Gothic"/>
-                <a:cs typeface="Century Gothic"/>
+                <a:latin typeface="Arial"/>
+                <a:cs typeface="Arial"/>
               </a:rPr>
               <a:t>One block per PICO concept: OR inside a block, AND between blocks.</a:t>
             </a:r>
@@ -28423,7 +28093,7 @@
                     <a:lumMod val="50000"/>
                   </a:schemeClr>
                 </a:solidFill>
-                <a:latin typeface="Verdana"/>
+                <a:latin typeface="Arial"/>
               </a:rPr>
               <a:t>Neudata | #ClearDataClearImpact</a:t>
             </a:r>
@@ -28553,8 +28223,8 @@
                 <a:solidFill>
                   <a:srgbClr val="0D7377"/>
                 </a:solidFill>
-                <a:latin typeface="Century Gothic"/>
-                <a:cs typeface="Century Gothic"/>
+                <a:latin typeface="Arial"/>
+                <a:cs typeface="Arial"/>
               </a:rPr>
               <a:t>Worked example 2: a ward question</a:t>
             </a:r>
@@ -28650,8 +28320,8 @@
                 <a:solidFill>
                   <a:srgbClr val="FFFFFF"/>
                 </a:solidFill>
-                <a:latin typeface="Century Gothic"/>
-                <a:cs typeface="Century Gothic"/>
+                <a:latin typeface="Arial"/>
+                <a:cs typeface="Arial"/>
               </a:rPr>
               <a:t>KEY MESSAGE   </a:t>
             </a:r>
@@ -28660,8 +28330,8 @@
                 <a:solidFill>
                   <a:srgbClr val="FFFFFF"/>
                 </a:solidFill>
-                <a:latin typeface="Century Gothic"/>
-                <a:cs typeface="Century Gothic"/>
+                <a:latin typeface="Arial"/>
+                <a:cs typeface="Arial"/>
               </a:rPr>
               <a:t>Same method for any topic: concepts in blocks, synonyms with OR, blocks with AND.</a:t>
             </a:r>
@@ -28698,7 +28368,7 @@
                     <a:lumMod val="50000"/>
                   </a:schemeClr>
                 </a:solidFill>
-                <a:latin typeface="Verdana"/>
+                <a:latin typeface="Arial"/>
               </a:rPr>
               <a:t>Neudata | #ClearDataClearImpact</a:t>
             </a:r>
@@ -28828,8 +28498,8 @@
                 <a:solidFill>
                   <a:srgbClr val="0D7377"/>
                 </a:solidFill>
-                <a:latin typeface="Century Gothic"/>
-                <a:cs typeface="Century Gothic"/>
+                <a:latin typeface="Arial"/>
+                <a:cs typeface="Arial"/>
               </a:rPr>
               <a:t>Boolean logic in pictures</a:t>
             </a:r>
@@ -28925,8 +28595,8 @@
                 <a:solidFill>
                   <a:srgbClr val="FFFFFF"/>
                 </a:solidFill>
-                <a:latin typeface="Century Gothic"/>
-                <a:cs typeface="Century Gothic"/>
+                <a:latin typeface="Arial"/>
+                <a:cs typeface="Arial"/>
               </a:rPr>
               <a:t>KEY MESSAGE   </a:t>
             </a:r>
@@ -28935,8 +28605,8 @@
                 <a:solidFill>
                   <a:srgbClr val="FFFFFF"/>
                 </a:solidFill>
-                <a:latin typeface="Century Gothic"/>
-                <a:cs typeface="Century Gothic"/>
+                <a:latin typeface="Arial"/>
+                <a:cs typeface="Arial"/>
               </a:rPr>
               <a:t>AND narrows, OR widens, NOT removes. Use NOT sparingly.</a:t>
             </a:r>
@@ -28973,7 +28643,7 @@
                     <a:lumMod val="50000"/>
                   </a:schemeClr>
                 </a:solidFill>
-                <a:latin typeface="Verdana"/>
+                <a:latin typeface="Arial"/>
               </a:rPr>
               <a:t>Neudata | #ClearDataClearImpact</a:t>
             </a:r>
@@ -29103,8 +28773,8 @@
                 <a:solidFill>
                   <a:srgbClr val="0D7377"/>
                 </a:solidFill>
-                <a:latin typeface="Century Gothic"/>
-                <a:cs typeface="Century Gothic"/>
+                <a:latin typeface="Arial"/>
+                <a:cs typeface="Arial"/>
               </a:rPr>
               <a:t>Check your understanding: AND, OR or NOT?</a:t>
             </a:r>
@@ -29174,8 +28844,8 @@
                 <a:solidFill>
                   <a:srgbClr val="FFFFFF"/>
                 </a:solidFill>
-                <a:latin typeface="Century Gothic"/>
-                <a:cs typeface="Century Gothic"/>
+                <a:latin typeface="Arial"/>
+                <a:cs typeface="Arial"/>
               </a:rPr>
               <a:t>QUICK QUIZ   |   2 min</a:t>
             </a:r>
@@ -29212,25 +28882,19 @@
               <a:spcBef>
                 <a:spcPts val="450"/>
               </a:spcBef>
-              <a:buNone/>
-            </a:pPr>
-            <a:r>
-              <a:rPr lang="en-US" sz="1650" b="1" dirty="0">
-                <a:solidFill>
-                  <a:srgbClr val="6C3483"/>
-                </a:solidFill>
-                <a:latin typeface="Century Gothic"/>
-                <a:cs typeface="Century Gothic"/>
-              </a:rPr>
-              <a:t>1.  </a:t>
-            </a:r>
+              <a:buClr>
+                <a:srgbClr val="6C3483"/>
+              </a:buClr>
+              <a:buFont typeface="Arial"/>
+              <a:buChar char="•"/>
+            </a:pPr>
             <a:r>
               <a:rPr lang="en-US" sz="1650" dirty="0">
                 <a:solidFill>
                   <a:srgbClr val="000000"/>
                 </a:solidFill>
-                <a:latin typeface="Century Gothic"/>
-                <a:cs typeface="Century Gothic"/>
+                <a:latin typeface="Arial"/>
+                <a:cs typeface="Arial"/>
               </a:rPr>
               <a:t>You want papers that mention BOTH delirium AND hip fracture: which operator?</a:t>
             </a:r>
@@ -29243,25 +28907,19 @@
               <a:spcBef>
                 <a:spcPts val="450"/>
               </a:spcBef>
-              <a:buNone/>
-            </a:pPr>
-            <a:r>
-              <a:rPr lang="en-US" sz="1650" b="1" dirty="0">
-                <a:solidFill>
-                  <a:srgbClr val="6C3483"/>
-                </a:solidFill>
-                <a:latin typeface="Century Gothic"/>
-                <a:cs typeface="Century Gothic"/>
-              </a:rPr>
-              <a:t>2.  </a:t>
-            </a:r>
+              <a:buClr>
+                <a:srgbClr val="6C3483"/>
+              </a:buClr>
+              <a:buFont typeface="Arial"/>
+              <a:buChar char="•"/>
+            </a:pPr>
             <a:r>
               <a:rPr lang="en-US" sz="1650" dirty="0">
                 <a:solidFill>
                   <a:srgbClr val="000000"/>
                 </a:solidFill>
-                <a:latin typeface="Century Gothic"/>
-                <a:cs typeface="Century Gothic"/>
+                <a:latin typeface="Arial"/>
+                <a:cs typeface="Arial"/>
               </a:rPr>
               <a:t>You want papers using EITHER 'pressure ulcer' OR 'bedsore': which operator?</a:t>
             </a:r>
@@ -29274,25 +28932,19 @@
               <a:spcBef>
                 <a:spcPts val="450"/>
               </a:spcBef>
-              <a:buNone/>
-            </a:pPr>
-            <a:r>
-              <a:rPr lang="en-US" sz="1650" b="1" dirty="0">
-                <a:solidFill>
-                  <a:srgbClr val="6C3483"/>
-                </a:solidFill>
-                <a:latin typeface="Century Gothic"/>
-                <a:cs typeface="Century Gothic"/>
-              </a:rPr>
-              <a:t>3.  </a:t>
-            </a:r>
+              <a:buClr>
+                <a:srgbClr val="6C3483"/>
+              </a:buClr>
+              <a:buFont typeface="Arial"/>
+              <a:buChar char="•"/>
+            </a:pPr>
             <a:r>
               <a:rPr lang="en-US" sz="1650" dirty="0">
                 <a:solidFill>
                   <a:srgbClr val="000000"/>
                 </a:solidFill>
-                <a:latin typeface="Century Gothic"/>
-                <a:cs typeface="Century Gothic"/>
+                <a:latin typeface="Arial"/>
+                <a:cs typeface="Arial"/>
               </a:rPr>
               <a:t>Your search found 40,000 hits. Will adding a third AND block give more or fewer?</a:t>
             </a:r>
@@ -29305,25 +28957,19 @@
               <a:spcBef>
                 <a:spcPts val="450"/>
               </a:spcBef>
-              <a:buNone/>
-            </a:pPr>
-            <a:r>
-              <a:rPr lang="en-US" sz="1650" b="1" dirty="0">
-                <a:solidFill>
-                  <a:srgbClr val="6C3483"/>
-                </a:solidFill>
-                <a:latin typeface="Century Gothic"/>
-                <a:cs typeface="Century Gothic"/>
-              </a:rPr>
-              <a:t>4.  </a:t>
-            </a:r>
+              <a:buClr>
+                <a:srgbClr val="6C3483"/>
+              </a:buClr>
+              <a:buFont typeface="Arial"/>
+              <a:buChar char="•"/>
+            </a:pPr>
             <a:r>
               <a:rPr lang="en-US" sz="1650" dirty="0">
                 <a:solidFill>
                   <a:srgbClr val="000000"/>
                 </a:solidFill>
-                <a:latin typeface="Century Gothic"/>
-                <a:cs typeface="Century Gothic"/>
+                <a:latin typeface="Arial"/>
+                <a:cs typeface="Arial"/>
               </a:rPr>
               <a:t>Why is 'sepsis NOT children' risky?</a:t>
             </a:r>
@@ -29369,8 +29015,8 @@
                 <a:solidFill>
                   <a:srgbClr val="6C3483"/>
                 </a:solidFill>
-                <a:latin typeface="Century Gothic"/>
-                <a:cs typeface="Century Gothic"/>
+                <a:latin typeface="Arial"/>
+                <a:cs typeface="Arial"/>
               </a:rPr>
               <a:t>OUTPUT   </a:t>
             </a:r>
@@ -29379,8 +29025,8 @@
                 <a:solidFill>
                   <a:srgbClr val="000000"/>
                 </a:solidFill>
-                <a:latin typeface="Century Gothic"/>
-                <a:cs typeface="Century Gothic"/>
+                <a:latin typeface="Arial"/>
+                <a:cs typeface="Arial"/>
               </a:rPr>
               <a:t>Answers out loud</a:t>
             </a:r>
@@ -29417,7 +29063,7 @@
                     <a:lumMod val="50000"/>
                   </a:schemeClr>
                 </a:solidFill>
-                <a:latin typeface="Verdana"/>
+                <a:latin typeface="Arial"/>
               </a:rPr>
               <a:t>Neudata | #ClearDataClearImpact</a:t>
             </a:r>
@@ -29534,7 +29180,7 @@
     </a:clrScheme>
     <a:fontScheme name="Office">
       <a:majorFont>
-        <a:latin typeface="Calibri"/>
+        <a:latin typeface="Arial"/>
         <a:ea typeface=""/>
         <a:cs typeface=""/>
         <a:font script="Jpan" typeface="ＭＳ Ｐゴシック"/>
@@ -29569,7 +29215,7 @@
         <a:font script="Geor" typeface="Sylfaen"/>
       </a:majorFont>
       <a:minorFont>
-        <a:latin typeface="Calibri"/>
+        <a:latin typeface="Arial"/>
         <a:ea typeface=""/>
         <a:cs typeface=""/>
         <a:font script="Jpan" typeface="ＭＳ Ｐゴシック"/>
@@ -29854,7 +29500,7 @@
     </a:clrScheme>
     <a:fontScheme name="Office">
       <a:majorFont>
-        <a:latin typeface="Calibri Light" panose="020F0302020204030204"/>
+        <a:latin typeface="Arial" panose="020F0302020204030204"/>
         <a:ea typeface=""/>
         <a:cs typeface=""/>
         <a:font script="Jpan" typeface="游ゴシック Light"/>
@@ -29889,7 +29535,7 @@
         <a:font script="Geor" typeface="Sylfaen"/>
       </a:majorFont>
       <a:minorFont>
-        <a:latin typeface="Calibri" panose="020F0502020204030204"/>
+        <a:latin typeface="Arial" panose="020F0502020204030204"/>
         <a:ea typeface=""/>
         <a:cs typeface=""/>
         <a:font script="Jpan" typeface="游ゴシック"/>
@@ -30115,7 +29761,7 @@
     </a:clrScheme>
     <a:fontScheme name="Office">
       <a:majorFont>
-        <a:latin typeface="Calibri Light" panose="020F0302020204030204"/>
+        <a:latin typeface="Arial" panose="020F0302020204030204"/>
         <a:ea typeface=""/>
         <a:cs typeface=""/>
         <a:font script="Jpan" typeface="游ゴシック Light"/>
@@ -30150,7 +29796,7 @@
         <a:font script="Geor" typeface="Sylfaen"/>
       </a:majorFont>
       <a:minorFont>
-        <a:latin typeface="Calibri" panose="020F0502020204030204"/>
+        <a:latin typeface="Arial" panose="020F0502020204030204"/>
         <a:ea typeface=""/>
         <a:cs typeface=""/>
         <a:font script="Jpan" typeface="游ゴシック"/>

--- a/en/files/slides/Session_2_EN.pptx
+++ b/en/files/slides/Session_2_EN.pptx
@@ -738,38 +738,20 @@
           <a:lstStyle/>
           <a:p>
             <a:r>
-              <a:rPr lang="en-US" sz="1400" b="1" dirty="0"/>
-              <a:t>SESSION 2 OPENING (0:00, 19:30).</a:t>
-            </a:r>
-          </a:p>
-          <a:p>
-            <a:r>
               <a:rPr lang="en-US" sz="1400" b="0" dirty="0"/>
-              <a:t>Open with what the Session 1 exit question showed (for example, how many people still used vague verbs) and spend one minute on it if needed.</a:t>
+              <a:t>Start 19:30. If the Session 1 exit question showed vague verbs, spend one minute on objectives.</a:t>
             </a:r>
           </a:p>
           <a:p>
             <a:r>
               <a:rPr lang="en-US" sz="1400" b="0" dirty="0"/>
-              <a:t>Teaching point: last Saturday each participant started their own question. Today we find out what is already known about it, keep the references safely, and read papers efficiently.</a:t>
+              <a:t>Check in the chat: PICO question, synonym list and Zotero ready. Paste the links to the Session 2 exercise sheet and the clean Paper 1 PDF.</a:t>
             </a:r>
           </a:p>
           <a:p>
             <a:r>
               <a:rPr lang="en-US" sz="1400" b="0" dirty="0"/>
-              <a:t>Pace: slower than it looks. Every block has a demo or a task. Use the 'Check your understanding' slides: they show you who is lost.</a:t>
-            </a:r>
-          </a:p>
-          <a:p>
-            <a:r>
-              <a:rPr lang="en-US" sz="1400" b="0" dirty="0"/>
-              <a:t>Practical check before starting (chat): everyone has their PICO question, their synonym list (homework) and Zotero installed. Paste two links in the chat: the Session 2 exercise sheet (PDF) and Paper 1 as a clean PDF (the unannotated original, Course/Papers/Paper 1 - Boulet 2024 Crit Care (RCT) - original.pdf, also linked by DOI on the course website page 'The two papers').</a:t>
-            </a:r>
-          </a:p>
-          <a:p>
-            <a:r>
-              <a:rPr lang="en-US" sz="1400" b="0" dirty="0"/>
-              <a:t>Timing: 1 minute, then the recap quiz.</a:t>
+              <a:t>Timing: 1 minute.</a:t>
             </a:r>
           </a:p>
         </p:txBody>
@@ -850,31 +832,13 @@
           <a:p>
             <a:r>
               <a:rPr lang="en-US" sz="1400" b="0" dirty="0"/>
-              <a:t>Quotes keep a phrase together.</a:t>
+              <a:t>Example: child* finds child, children, childhood. Cautions: it also finds childbirth, and truncated words are not mapped to MeSH.</a:t>
             </a:r>
           </a:p>
           <a:p>
             <a:r>
               <a:rPr lang="en-US" sz="1400" b="0" dirty="0"/>
-              <a:t>Truncation (the asterisk) helps when authors write the same idea with different endings. Clinical example: for a paediatric question, child* finds child, children, childhood and childhood-onset in one go, instead of typing each word with OR. Other useful stems: nurs* (nurse, nurses, nursing), restrict* (restricted, restriction, restrictive).</a:t>
-            </a:r>
-          </a:p>
-          <a:p>
-            <a:r>
-              <a:rPr lang="en-US" sz="1400" b="0" dirty="0"/>
-              <a:t>Cautions: child* also finds childbirth, and too short a stem (flu*) finds influenza and fluoride. In PubMed the stem needs at least four letters, and a truncated word is not mapped to MeSH, so keep the MeSH term in the block as well.</a:t>
-            </a:r>
-          </a:p>
-          <a:p>
-            <a:r>
-              <a:rPr lang="en-US" sz="1400" b="0" dirty="0"/>
-              <a:t>Field tags restrict where PubMed looks. Filters (left of the results) narrow by article type, date and age. Each filter needs a reason you can write down.</a:t>
-            </a:r>
-          </a:p>
-          <a:p>
-            <a:r>
-              <a:rPr lang="en-US" sz="1400" b="0" dirty="0"/>
-              <a:t>Misconception: 'filter to free full text'. That throws away key papers.</a:t>
+              <a:t>Do not filter to free full text: it loses key papers.</a:t>
             </a:r>
           </a:p>
           <a:p>
@@ -961,31 +925,13 @@
           <a:p>
             <a:r>
               <a:rPr lang="en-US" sz="1400" b="0" dirty="0"/>
-              <a:t>Now put the pieces together. Each PICO element becomes a block: the MeSH term plus free-text words, joined with OR. The blocks are joined with AND.</a:t>
+              <a:t>Leave out the comparison block: the words vary too much.</a:t>
             </a:r>
           </a:p>
           <a:p>
             <a:r>
               <a:rPr lang="en-US" sz="1400" b="0" dirty="0"/>
-              <a:t>The asterisk (*) is truncation: restrictive fluid* also finds 'restrictive fluids'.</a:t>
-            </a:r>
-          </a:p>
-          <a:p>
-            <a:r>
-              <a:rPr lang="en-US" sz="1400" b="0" dirty="0"/>
-              <a:t>The comparison (usual care) is normally left out because the words vary too much.</a:t>
-            </a:r>
-          </a:p>
-          <a:p>
-            <a:r>
-              <a:rPr lang="en-US" sz="1400" b="0" dirty="0"/>
-              <a:t>Misconception: 'just type the whole question into PubMed'. You lose control of synonyms and logic.</a:t>
-            </a:r>
-          </a:p>
-          <a:p>
-            <a:r>
-              <a:rPr lang="en-US" sz="1400" b="0" dirty="0"/>
-              <a:t>Ask the class (chat): 'Which other words would authors use for restrictive?' Expected: conservative, limited, de-resuscitation, fluid removal, negative fluid balance.</a:t>
+              <a:t>Ask: 'Which other words would authors use for restrictive?' Expected: conservative, limited, de-resuscitation, negative fluid balance.</a:t>
             </a:r>
           </a:p>
           <a:p>
@@ -1072,25 +1018,13 @@
           <a:p>
             <a:r>
               <a:rPr lang="en-US" sz="1400" b="0" dirty="0"/>
-              <a:t>A second worked example, from the ward, so colleagues outside the ICU see that the method works for any topic. Same layout as the previous slide.</a:t>
+              <a:t>P and O share one idea here, so one block carries both.</a:t>
             </a:r>
           </a:p>
           <a:p>
             <a:r>
               <a:rPr lang="en-US" sz="1400" b="0" dirty="0"/>
-              <a:t>Here P and O share the same idea (pressure injury), so one block carries both. The second block is the intervention.</a:t>
-            </a:r>
-          </a:p>
-          <a:p>
-            <a:r>
-              <a:rPr lang="en-US" sz="1400" b="0" dirty="0"/>
-              <a:t>MeSH: authors write pressure ulcer, pressure injury, bedsore, decubitus. The MeSH heading 'Pressure Ulcer' collects them.</a:t>
-            </a:r>
-          </a:p>
-          <a:p>
-            <a:r>
-              <a:rPr lang="en-US" sz="1400" b="0" dirty="0"/>
-              <a:t>Ask the class (chat): 'Which other words would authors use for repositioning?' Expected: turning, position change, mobilisation, offloading.</a:t>
+              <a:t>Ask: 'Other words for repositioning?' Expected: turning, position change, offloading.</a:t>
             </a:r>
           </a:p>
           <a:p>
@@ -1177,37 +1111,13 @@
           <a:p>
             <a:r>
               <a:rPr lang="en-US" sz="1400" b="0" dirty="0"/>
-              <a:t>PubMed: free, run by the US National Library of Medicine, biomedical journals, MeSH labels, many filters. The same string gives the same results later, so the search can be reported and repeated.</a:t>
+              <a:t>Run and report the search in PubMed. Use Scholar's 'Cited by' to find newer papers and check nothing is missing.</a:t>
             </a:r>
           </a:p>
           <a:p>
             <a:r>
               <a:rPr lang="en-US" sz="1400" b="0" dirty="0"/>
-              <a:t>Google Scholar: very broad (theses, books, preprints), but it ranks results with a hidden method, has few filters and is hard to repeat.</a:t>
-            </a:r>
-          </a:p>
-          <a:p>
-            <a:r>
-              <a:rPr lang="en-US" sz="1400" b="0" dirty="0"/>
-              <a:t>Row 'Finds newer papers that cite a paper': open a key trial and click 'Cited by' to see every later paper that cites it. This is how you find recent work, and papers your PubMed string missed. PubMed shows this only for papers in PubMed Central.</a:t>
-            </a:r>
-          </a:p>
-          <a:p>
-            <a:r>
-              <a:rPr lang="en-US" sz="1400" b="0" dirty="0"/>
-              <a:t>So: run and report your search in PubMed, then use Scholar to check that no important paper is missing.</a:t>
-            </a:r>
-          </a:p>
-          <a:p>
-            <a:r>
-              <a:rPr lang="en-US" sz="1400" b="0" dirty="0"/>
-              <a:t>Other databases (Embase, Cochrane Library, Web of Science, Scopus, CINAHL) are on the extra slide 'Beyond PubMed'. For a Level 1 proposal, PubMed plus a trial registry is enough.</a:t>
-            </a:r>
-          </a:p>
-          <a:p>
-            <a:r>
-              <a:rPr lang="en-US" sz="1400" b="0" dirty="0"/>
-              <a:t>Ask the class (chat): 'A colleague found a perfect paper in Google Scholar. What should you check?' Expected: peer-reviewed or preprint? Legitimate journal? (Predatory journals: Session 8.)</a:t>
+              <a:t>Ask: 'A colleague found a perfect paper in Google Scholar. What should you check?' Expected: peer reviewed or preprint, legitimate journal.</a:t>
             </a:r>
           </a:p>
           <a:p>
@@ -1294,31 +1204,13 @@
           <a:p>
             <a:r>
               <a:rPr lang="en-US" sz="1400" b="0" dirty="0"/>
-              <a:t>Teaching point: before starting any research, get an overview of what is already known about your question. The best overview is a systematic review: one you find, or one you do yourself.</a:t>
+              <a:t>If a recent, good review answers your question, build on it. If none exists or it is out of date, that gap is part of your justification.</a:t>
             </a:r>
           </a:p>
           <a:p>
             <a:r>
               <a:rPr lang="en-US" sz="1400" b="0" dirty="0"/>
-              <a:t>Where to look: the Cochrane Library (Cochrane systematic reviews, mostly on treatments), PubMed with the article-type filter 'Systematic Review', and PROSPERO (https://www.crd.york.ac.uk/prospero/), the international register of systematic reviews that are planned or under way.</a:t>
-            </a:r>
-          </a:p>
-          <a:p>
-            <a:r>
-              <a:rPr lang="en-US" sz="1400" b="0" dirty="0"/>
-              <a:t>If a recent, good review answers your question, do not repeat it: build on it and move your question to the gap that remains. If there is none, or it is out of date, that gap is part of your justification.</a:t>
-            </a:r>
-          </a:p>
-          <a:p>
-            <a:r>
-              <a:rPr lang="en-US" sz="1400" b="0" dirty="0"/>
-              <a:t>Doing a systematic review and meta-analysis yourself is a course of its own: Level 3 has a dedicated module (Module A: systematic review and meta-analysis).</a:t>
-            </a:r>
-          </a:p>
-          <a:p>
-            <a:r>
-              <a:rPr lang="en-US" sz="1400" b="0" dirty="0"/>
-              <a:t>Ask the class (chat): 'Has anyone started a project and then found it had already been done?'</a:t>
+              <a:t>Ask: 'Has anyone started a project and then found it had already been done?'</a:t>
             </a:r>
           </a:p>
           <a:p>
@@ -1405,31 +1297,19 @@
           <a:p>
             <a:r>
               <a:rPr lang="en-US" sz="1400" b="0" dirty="0"/>
-              <a:t>Follow Course/Demos/s2_demo.md, Part A (PubMed): exact strings, where to click, and the offline fallback.</a:t>
+              <a:t>Script: s2_demo.md, Part A. Narrate slowly so people can note the hits.</a:t>
             </a:r>
           </a:p>
           <a:p>
             <a:r>
               <a:rPr lang="en-US" sz="1400" b="0" dirty="0"/>
-              <a:t>Do not promise hit counts. Expect tens of thousands for 'septic shock' and a few thousand for the full PICO string. The numbers change every day.</a:t>
+              <a:t>CLASSIC (first mention): Meyhoff, NEJM 2022, 1,554 adults, no change in 90-day mortality. Say this when it appears in the results.</a:t>
             </a:r>
           </a:p>
           <a:p>
             <a:r>
               <a:rPr lang="en-US" sz="1400" b="0" dirty="0"/>
-              <a:t>CLASSIC (first time we name it): a large randomised trial, Meyhoff et al., N Engl J Med 2022, 'Restriction of Intravenous Fluid in ICU Patients with Septic Shock'. The name stands for Conservative versus Liberal Approach to Fluid Therapy of Septic Shock in Intensive Care. In 1,554 adults with septic shock in European ICUs, restricting IV fluid did not change 90-day mortality. It is the main trial behind our running example, so say this when it appears in the results.</a:t>
-            </a:r>
-          </a:p>
-          <a:p>
-            <a:r>
-              <a:rPr lang="en-US" sz="1400" b="0" dirty="0"/>
-              <a:t>Share your screen. Narrate slowly and pause after each step so participants can note the number of hits on their sheet. Invite synonyms for the blocks in the chat and add one or two live.</a:t>
-            </a:r>
-          </a:p>
-          <a:p>
-            <a:r>
-              <a:rPr lang="en-US" sz="1400" b="0" dirty="0"/>
-              <a:t>If your internet fails, switch to the screenshots (the second trainer can share them). Do not troubleshoot live.</a:t>
+              <a:t>Do not promise hit counts. If the internet fails, switch to the screenshots.</a:t>
             </a:r>
           </a:p>
           <a:p>
@@ -1516,31 +1396,19 @@
           <a:p>
             <a:r>
               <a:rPr lang="en-US" sz="1400" b="0" dirty="0"/>
-              <a:t>Individual: participants write their string on the exercise sheet or in a text file. They do not search yet.</a:t>
+              <a:t>People write their string alone. After 4 minutes call on 2 or 3 to read it. Type it on screen and ask for one missing synonym.</a:t>
             </a:r>
           </a:p>
           <a:p>
             <a:r>
               <a:rPr lang="en-US" sz="1400" b="0" dirty="0"/>
-              <a:t>After 4 minutes, call on 2 or 3 participants by name (tell the class at the start that you will do this). Each unmutes and reads one block or the whole string aloud. Type it on your shared screen as they read, and ask the class for one missing synonym.</a:t>
+              <a:t>Watch for: missing brackets, AND and OR mixed in one block, a comparison block, NOT without a reason.</a:t>
             </a:r>
           </a:p>
           <a:p>
             <a:r>
               <a:rPr lang="en-US" sz="1400" b="0" dirty="0"/>
-              <a:t>Listen for: missing brackets, AND and OR mixed inside one block, the comparison included as a block, NOT used without a reason.</a:t>
-            </a:r>
-          </a:p>
-          <a:p>
-            <a:r>
-              <a:rPr lang="en-US" sz="1400" b="0" dirty="0"/>
-              <a:t>Fast finishers: add one filter and write why.</a:t>
-            </a:r>
-          </a:p>
-          <a:p>
-            <a:r>
-              <a:rPr lang="en-US" sz="1400" b="0" dirty="0"/>
-              <a:t>Timing: 5 minutes. Segment 2.1 ends at 0:50.</a:t>
+              <a:t>Timing: 5 minutes. 2.1 ends at 20:20.</a:t>
             </a:r>
           </a:p>
         </p:txBody>
@@ -1620,20 +1488,8 @@
           <a:lstStyle/>
           <a:p>
             <a:r>
-              <a:rPr lang="en-US" sz="1400" b="1" dirty="0"/>
-              <a:t>SEGMENT 2.2 (0:50-1:10, 20:20-20:40).</a:t>
-            </a:r>
-          </a:p>
-          <a:p>
-            <a:r>
               <a:rPr lang="en-US" sz="1400" b="0" dirty="0"/>
-              <a:t>Teaching point: two habits protect every proposal and paper: save references in a reference manager from day one, and never copy wording from a source.</a:t>
-            </a:r>
-          </a:p>
-          <a:p>
-            <a:r>
-              <a:rPr lang="en-US" sz="1400" b="0" dirty="0"/>
-              <a:t>Timing: 30 seconds.</a:t>
+              <a:t>2.2 runs 20:20-20:40. Timing: 30 seconds.</a:t>
             </a:r>
           </a:p>
         </p:txBody>
@@ -1714,25 +1570,7 @@
           <a:p>
             <a:r>
               <a:rPr lang="en-US" sz="1400" b="0" dirty="0"/>
-              <a:t>Teaching point: never type references by hand. A reference manager stores each paper once and formats it in any journal style.</a:t>
-            </a:r>
-          </a:p>
-          <a:p>
-            <a:r>
-              <a:rPr lang="en-US" sz="1400" b="0" dirty="0"/>
-              <a:t>Zotero (free, open source) and Mendeley (free) work with Word. EndNote is common in universities but paid. In this course everyone uses Zotero (installed as Session 1 homework).</a:t>
-            </a:r>
-          </a:p>
-          <a:p>
-            <a:r>
-              <a:rPr lang="en-US" sz="1400" b="0" dirty="0"/>
-              <a:t>Browser connectors (e.g. Zotero Connector) save a paper from the journal page in one click, often with the PDF.</a:t>
-            </a:r>
-          </a:p>
-          <a:p>
-            <a:r>
-              <a:rPr lang="en-US" sz="1400" b="0" dirty="0"/>
-              <a:t>Misconception: 'I will sort the references at the end'. Saving as you go takes seconds, but rebuilding a list takes hours and causes errors.</a:t>
+              <a:t>Everyone uses Zotero. Saving as you go takes seconds, rebuilding a list takes hours.</a:t>
             </a:r>
           </a:p>
           <a:p>
@@ -1819,25 +1657,13 @@
           <a:p>
             <a:r>
               <a:rPr lang="en-US" sz="1400" b="0" dirty="0"/>
-              <a:t>Vancouver (numbered, in the order cited) is used by most medical journals and follows the ICMJE recommendations. APA (author and year) is common in nursing, psychology and social science.</a:t>
+              <a:t>Every journal states its style in the guide for authors. Cite the original study for facts, not a review that quotes it.</a:t>
             </a:r>
           </a:p>
           <a:p>
             <a:r>
               <a:rPr lang="en-US" sz="1400" b="0" dirty="0"/>
-              <a:t>Every journal states its style in the 'Guide for authors'. A reference manager switches between thousands of styles in one click.</a:t>
-            </a:r>
-          </a:p>
-          <a:p>
-            <a:r>
-              <a:rPr lang="en-US" sz="1400" b="0" dirty="0"/>
-              <a:t>Teaching point: a citation lets the reader check your claim. Cite the original study for facts and numbers, not a review that quotes it, wherever you can.</a:t>
-            </a:r>
-          </a:p>
-          <a:p>
-            <a:r>
-              <a:rPr lang="en-US" sz="1400" b="0" dirty="0"/>
-              <a:t>Ask the class (chat): 'Which style uses [1]?' Expected: Vancouver. The Zotero demo comes next and switches between the two styles.</a:t>
+              <a:t>Ask: 'Which style uses [1]?' Expected: Vancouver.</a:t>
             </a:r>
           </a:p>
           <a:p>
@@ -1924,19 +1750,7 @@
           <a:p>
             <a:r>
               <a:rPr lang="en-US" sz="1400" b="0" dirty="0"/>
-              <a:t>RECAP QUIZ (0:00-0:10, 19:30-19:40). Individual, answers typed in the chat, 6 minutes, then 2 minutes calling on 2-3 people to give their answers. Answers on the next slide. The questions are also on the Session 2 exercise sheet.</a:t>
-            </a:r>
-          </a:p>
-          <a:p>
-            <a:r>
-              <a:rPr lang="en-US" sz="1400" b="0" dirty="0"/>
-              <a:t>This also re-activates last Saturday's vocabulary for today's search.</a:t>
-            </a:r>
-          </a:p>
-          <a:p>
-            <a:r>
-              <a:rPr lang="en-US" sz="1400" b="0" dirty="0"/>
-              <a:t>Latecomers: let them join at question 2.</a:t>
+              <a:t>Answers typed in the chat: 6 minutes, then call on 2 or 3 people. Answers on the next slide.</a:t>
             </a:r>
           </a:p>
           <a:p>
@@ -2023,31 +1837,13 @@
           <a:p>
             <a:r>
               <a:rPr lang="en-US" sz="1400" b="0" dirty="0"/>
-              <a:t>Instructor script: Course/Demos/s2_demo.md, Part B (Step 6), with what to click, what to say and what to do if Zotero fails. The same script is Course/Demos/s2_demo.pdf and the 'Session 2 demo' page of the course website.</a:t>
+              <a:t>Script: s2_demo.md, Part B. People repeat each step on their own computer. If Zotero fails for someone, they watch and fix it later with the second trainer.</a:t>
             </a:r>
           </a:p>
           <a:p>
             <a:r>
               <a:rPr lang="en-US" sz="1400" b="0" dirty="0"/>
-              <a:t>The words in quotation marks on the slide are Zotero's own button names in Word.</a:t>
-            </a:r>
-          </a:p>
-          <a:p>
-            <a:r>
-              <a:rPr lang="en-US" sz="1400" b="0" dirty="0"/>
-              <a:t>Preparation: Zotero desktop and its Word plug-in installed, an empty test library, a blank Word document.</a:t>
-            </a:r>
-          </a:p>
-          <a:p>
-            <a:r>
-              <a:rPr lang="en-US" sz="1400" b="0" dirty="0"/>
-              <a:t>Everyone installed Zotero as Session 1 homework, so participants can repeat each step on their own computer. Anyone whose installation fails watches now and fixes it after the session with the second trainer.</a:t>
-            </a:r>
-          </a:p>
-          <a:p>
-            <a:r>
-              <a:rPr lang="en-US" sz="1400" b="0" dirty="0"/>
-              <a:t>If Zotero fails, show the screenshots and say 'the same file works in Mendeley and EndNote'.</a:t>
+              <a:t>If Zotero fails for you, show the screenshots.</a:t>
             </a:r>
           </a:p>
           <a:p>
@@ -2134,43 +1930,19 @@
           <a:p>
             <a:r>
               <a:rPr lang="en-US" sz="1400" b="0" dirty="0"/>
-              <a:t>Left: one sentence from the conclusion of Paper 1's abstract (quoted with attribution).</a:t>
+              <a:t>Patchwriting is plagiarism even with a reference. Method: read, close the paper, write from memory, check, cite.</a:t>
             </a:r>
           </a:p>
           <a:p>
             <a:r>
               <a:rPr lang="en-US" sz="1400" b="0" dirty="0"/>
-              <a:t>Middle: 'patchwriting', the same sentence with a few words swapped. Even with a reference this is plagiarism, because the structure and most of the wording are copied. Similarity checkers used by journals detect it easily.</a:t>
+              <a:t>Ask: 'Is copying the Methods wording from your own earlier paper allowed?' Expected: it is text recycling, check the journal policy.</a:t>
             </a:r>
           </a:p>
           <a:p>
             <a:r>
               <a:rPr lang="en-US" sz="1400" b="0" dirty="0"/>
-              <a:t>Right: a real paraphrase, with a new structure, extra context from the paper (pilot, 48 patients, which fluids), and a citation.</a:t>
-            </a:r>
-          </a:p>
-          <a:p>
-            <a:r>
-              <a:rPr lang="en-US" sz="1400" b="0" dirty="0"/>
-              <a:t>Method: read, close the paper, write from memory, check the facts, cite. If you need the exact words, use quotation marks and a citation. Quotes are rare in medical writing.</a:t>
-            </a:r>
-          </a:p>
-          <a:p>
-            <a:r>
-              <a:rPr lang="en-US" sz="1400" b="0" dirty="0"/>
-              <a:t>Misconception: 'if I cite it, I can copy it'. Citation credits the idea, but it does not license copying the wording. AI rewording tools do not solve this either. You remain responsible (Session 7).</a:t>
-            </a:r>
-          </a:p>
-          <a:p>
-            <a:r>
-              <a:rPr lang="en-US" sz="1400" b="0" dirty="0"/>
-              <a:t>Ask the class (chat): 'Is copying the Methods wording from your own earlier paper allowed?' Expected: it is text recycling. Check the journal policy, and usually rewrite or cite.</a:t>
-            </a:r>
-          </a:p>
-          <a:p>
-            <a:r>
-              <a:rPr lang="en-US" sz="1400" b="0" dirty="0"/>
-              <a:t>Timing: 3 minutes. Exercise 2 on the sheet practises this at home.</a:t>
+              <a:t>Timing: 3 minutes.</a:t>
             </a:r>
           </a:p>
         </p:txBody>
@@ -2251,19 +2023,7 @@
           <a:p>
             <a:r>
               <a:rPr lang="en-US" sz="1400" b="0" dirty="0"/>
-              <a:t>Common knowledge ('sepsis is an infection-related emergency') does not need a citation. Specific facts and numbers do.</a:t>
-            </a:r>
-          </a:p>
-          <a:p>
-            <a:r>
-              <a:rPr lang="en-US" sz="1400" b="0" dirty="0"/>
-              <a:t>Citing a paper you have only seen quoted elsewhere spreads errors. Check the original.</a:t>
-            </a:r>
-          </a:p>
-          <a:p>
-            <a:r>
-              <a:rPr lang="en-US" sz="1400" b="0" dirty="0"/>
-              <a:t>AI chat tools may invent references that look real. Every reference must be found in PubMed or on the journal site.</a:t>
+              <a:t>Common knowledge needs no citation. Specific facts and numbers do. Check every AI-suggested reference in PubMed.</a:t>
             </a:r>
           </a:p>
           <a:p>
@@ -2350,7 +2110,7 @@
           <a:p>
             <a:r>
               <a:rPr lang="en-US" sz="1400" b="0" dirty="0"/>
-              <a:t>Answers: 1 Not OK: patchwriting is plagiarism even with a citation. 2 OK (but rare in medical writing). 3 Not OK: someone else's finding needs a citation. 4 Not OK: you may repeat an error, so read and cite the original.</a:t>
+              <a:t>Answers: 1 Not OK (patchwriting). 2 OK, but rare. 3 Not OK, needs a citation. 4 Not OK, read and cite the original.</a:t>
             </a:r>
           </a:p>
           <a:p>
@@ -2437,55 +2197,25 @@
           <a:p>
             <a:r>
               <a:rPr lang="en-US" sz="1400" b="0" dirty="0"/>
-              <a:t>Journal articles in PubMed are only the tip of the iceberg. Below the waterline is the grey literature: everything not published in a journal. In this course it includes trial registries (as in the course glossary), together with conference abstracts, theses, reports, guidelines and preprints.</a:t>
+              <a:t>Negative results are published less often (publication bias), so search below the waterline.</a:t>
             </a:r>
           </a:p>
           <a:p>
             <a:r>
               <a:rPr lang="en-US" sz="1400" b="0" dirty="0"/>
-              <a:t>Why it matters: studies with negative or disappointing results are less likely to be published (publication bias), so the published literature can look more positive than the truth. Searching below the waterline reduces this bias in what you find.</a:t>
+              <a:t>Compare the registered primary outcome with the paper. Paper 1 is NCT04947904, registered before the first patient.</a:t>
             </a:r>
           </a:p>
           <a:p>
             <a:r>
               <a:rPr lang="en-US" sz="1400" b="0" dirty="0"/>
-              <a:t>What a trial registry is: a public database where a clinical trial is recorded before the first patient is enrolled. The record gives the question, the design, the planned primary outcome, the planned sample size and the status (recruiting, completed, results posted). Medical journals that follow the ICMJE recommendations only publish trials that were registered.</a:t>
+              <a:t>Ask: 'Why check a registry before starting your own trial?' Expected: someone may already be running the same study.</a:t>
             </a:r>
           </a:p>
           <a:p>
             <a:r>
               <a:rPr lang="en-US" sz="1400" b="0" dirty="0"/>
-              <a:t>The main registries: ClinicalTrials.gov (run by the US National Library of Medicine) and the WHO International Clinical Trials Registry Platform (ICTRP), which searches many national registries at once. Systematic reviews are registered in the same way, in PROSPERO.</a:t>
-            </a:r>
-          </a:p>
-          <a:p>
-            <a:r>
-              <a:rPr lang="en-US" sz="1400" b="0" dirty="0"/>
-              <a:t>Use: compare the planned primary outcome with the published paper. A switched outcome is a warning sign. Registries also show trials that finished but never published their results.</a:t>
-            </a:r>
-          </a:p>
-          <a:p>
-            <a:r>
-              <a:rPr lang="en-US" sz="1400" b="0" dirty="0"/>
-              <a:t>Paper 1 is registered as NCT04947904, registered before the first patient was enrolled. A good homework habit: open the registry record and compare its planned primary outcome with the paper.</a:t>
-            </a:r>
-          </a:p>
-          <a:p>
-            <a:r>
-              <a:rPr lang="en-US" sz="1400" b="0" dirty="0"/>
-              <a:t>Preprints (e.g. medRxiv) are not peer reviewed. Read them with extra care.</a:t>
-            </a:r>
-          </a:p>
-          <a:p>
-            <a:r>
-              <a:rPr lang="en-US" sz="1400" b="0" dirty="0"/>
-              <a:t>Ask the class (chat): 'Why check a registry before starting your own trial?' Expected: someone may already be running the same study.</a:t>
-            </a:r>
-          </a:p>
-          <a:p>
-            <a:r>
-              <a:rPr lang="en-US" sz="1400" b="0" dirty="0"/>
-              <a:t>Timing: 3 minutes. Segment 2.2 ends at 1:10, then the break.</a:t>
+              <a:t>Timing: 3 minutes. 2.2 ends at 20:40.</a:t>
             </a:r>
           </a:p>
         </p:txBody>
@@ -2565,26 +2295,8 @@
           <a:lstStyle/>
           <a:p>
             <a:r>
-              <a:rPr lang="en-US" sz="1400" b="1" dirty="0"/>
-              <a:t>BREAK (1:10-1:25, 20:40-20:55).</a:t>
-            </a:r>
-          </a:p>
-          <a:p>
-            <a:r>
               <a:rPr lang="en-US" sz="1400" b="0" dirty="0"/>
-              <a:t>Say: stand up, stretch and rest your eyes. Before we restart, open Paper 1 (link in the chat).</a:t>
-            </a:r>
-          </a:p>
-          <a:p>
-            <a:r>
-              <a:rPr lang="en-US" sz="1400" b="0" dirty="0"/>
-              <a:t>During the break: post the link to Paper 1 as a clean PDF in the chat for the reading task (Course/Papers/Paper 1 - Boulet 2024 Crit Care (RCT) - original.pdf, or the DOI link on the course website page 'The two papers').</a:t>
-            </a:r>
-          </a:p>
-          <a:p>
-            <a:r>
-              <a:rPr lang="en-US" sz="1400" b="0" dirty="0"/>
-              <a:t>Say clearly in the chat what time you will begin again, and restart on time.</a:t>
+              <a:t>Break 20:40-20:55. Post the restart time and the link to the clean Paper 1 PDF in the chat.</a:t>
             </a:r>
           </a:p>
         </p:txBody>
@@ -2664,20 +2376,8 @@
           <a:lstStyle/>
           <a:p>
             <a:r>
-              <a:rPr lang="en-US" sz="1400" b="1" dirty="0"/>
-              <a:t>SEGMENT 2.3 (1:25-2:05, 20:55-21:35).</a:t>
-            </a:r>
-          </a:p>
-          <a:p>
-            <a:r>
               <a:rPr lang="en-US" sz="1400" b="0" dirty="0"/>
-              <a:t>Teaching point: busy clinicians need a reading routine. In 15 minutes you can decide whether a paper is relevant, what it found and whether to trust it.</a:t>
-            </a:r>
-          </a:p>
-          <a:p>
-            <a:r>
-              <a:rPr lang="en-US" sz="1400" b="0" dirty="0"/>
-              <a:t>Check in the chat that everyone has opened the clean abstract of Paper 1 before the task.</a:t>
+              <a:t>2.3 runs 20:55-21:35. Check that everyone has Paper 1 open.</a:t>
             </a:r>
           </a:p>
           <a:p>
@@ -2764,43 +2464,25 @@
           <a:p>
             <a:r>
               <a:rPr lang="en-US" sz="1400" b="0" dirty="0"/>
-              <a:t>IMRaD = Introduction, Methods, Results and Discussion: the standard structure of an original research paper.</a:t>
+              <a:t>The question is at the end of the Introduction, the primary outcome in the Methods, the main number in the Results.</a:t>
             </a:r>
           </a:p>
           <a:p>
             <a:r>
               <a:rPr lang="en-US" sz="1400" b="0" dirty="0"/>
-              <a:t>The title and the abstract sit on top of IMRaD and are read first. They are not one of its letters. The small 'a' in IMRaD stands for 'and', not for 'abstract'.</a:t>
+              <a:t>The Discussion is interpretation. The Results are the evidence.</a:t>
             </a:r>
           </a:p>
           <a:p>
             <a:r>
               <a:rPr lang="en-US" sz="1400" b="0" dirty="0"/>
-              <a:t>The hourglass: the Introduction narrows from the broad problem to the specific question. Methods and Results are narrow and factual. The Discussion widens again to what it means for practice.</a:t>
+              <a:t>Ask: 'Where do you find who was included?' Expected: Methods and Results (flow chart, Table 1).</a:t>
             </a:r>
           </a:p>
           <a:p>
             <a:r>
               <a:rPr lang="en-US" sz="1400" b="0" dirty="0"/>
-              <a:t>Teaching point: knowing the shape tells you where to look. The question is at the end of the Introduction, the primary outcome is in the Methods, and the main number is in the Results (and the abstract).</a:t>
-            </a:r>
-          </a:p>
-          <a:p>
-            <a:r>
-              <a:rPr lang="en-US" sz="1400" b="0" dirty="0"/>
-              <a:t>Misconception: 'the Discussion tells me what was found'. The Discussion is the authors' interpretation. The Results are the evidence.</a:t>
-            </a:r>
-          </a:p>
-          <a:p>
-            <a:r>
-              <a:rPr lang="en-US" sz="1400" b="0" dirty="0"/>
-              <a:t>Ask the class (chat): 'Where do you find who was included?' Expected: Methods (eligibility) and Results (flow chart, Table 1).</a:t>
-            </a:r>
-          </a:p>
-          <a:p>
-            <a:r>
-              <a:rPr lang="en-US" sz="1400" b="0" dirty="0"/>
-              <a:t>Timing: 4 minutes. Sessions 7 and 8 teach how to write each section.</a:t>
+              <a:t>Timing: 4 minutes.</a:t>
             </a:r>
           </a:p>
         </p:txBody>
@@ -2881,31 +2563,7 @@
           <a:p>
             <a:r>
               <a:rPr lang="en-US" sz="1400" b="0" dirty="0"/>
-              <a:t>Do not read front to back. Step 1, title (30 seconds): is it about my question? Step 2, abstract (3 minutes): PICO, design, main result. Most papers are rejected here.</a:t>
-            </a:r>
-          </a:p>
-          <a:p>
-            <a:r>
-              <a:rPr lang="en-US" sz="1400" b="0" dirty="0"/>
-              <a:t>Step 3, figures and tables (4 minutes): the flow chart (who was lost), Table 1 (were groups similar), the main results table.</a:t>
-            </a:r>
-          </a:p>
-          <a:p>
-            <a:r>
-              <a:rPr lang="en-US" sz="1400" b="0" dirty="0"/>
-              <a:t>Step 4, methods (5 minutes): who, how chosen, the primary outcome, how bias was reduced. Step 5, discussion (2-3 minutes): limitations, and do the conclusions match the data?</a:t>
-            </a:r>
-          </a:p>
-          <a:p>
-            <a:r>
-              <a:rPr lang="en-US" sz="1400" b="0" dirty="0"/>
-              <a:t>Teaching point: you read the Introduction and full Discussion only for papers you will cite or appraise in depth.</a:t>
-            </a:r>
-          </a:p>
-          <a:p>
-            <a:r>
-              <a:rPr lang="en-US" sz="1400" b="0" dirty="0"/>
-              <a:t>Misconception: 'reading only the abstract is enough'. Abstracts omit limitations and can contain spin (next slides).</a:t>
+              <a:t>Most papers are rejected at the abstract. Abstracts omit limitations and can contain spin.</a:t>
             </a:r>
           </a:p>
           <a:p>
@@ -2992,31 +2650,7 @@
           <a:p>
             <a:r>
               <a:rPr lang="en-US" sz="1400" b="0" dirty="0"/>
-              <a:t>Most clinical journals require a structured abstract: Background, Methods, Results, Conclusions (plus the trial registration number for trials).</a:t>
-            </a:r>
-          </a:p>
-          <a:p>
-            <a:r>
-              <a:rPr lang="en-US" sz="1400" b="0" dirty="0"/>
-              <a:t>Methods must name the design, setting, participants, intervention or exposure, comparison and the primary outcome.</a:t>
-            </a:r>
-          </a:p>
-          <a:p>
-            <a:r>
-              <a:rPr lang="en-US" sz="1400" b="0" dirty="0"/>
-              <a:t>Results must give the numbers screened and analysed and the primary result as an effect size with its 95% confidence interval, not only a p-value or 'significant'.</a:t>
-            </a:r>
-          </a:p>
-          <a:p>
-            <a:r>
-              <a:rPr lang="en-US" sz="1400" b="0" dirty="0"/>
-              <a:t>Conclusions answer the primary question, no more and no less. Reporting guidelines have abstract checklists (CONSORT for Abstracts, STROBE), covered in Session 8.</a:t>
-            </a:r>
-          </a:p>
-          <a:p>
-            <a:r>
-              <a:rPr lang="en-US" sz="1400" b="0" dirty="0"/>
-              <a:t>Ask the class (chat): 'An abstract says only: mortality was significantly lower (p &lt; 0.05). What is missing?' Expected: the actual rates, the effect size and the confidence interval.</a:t>
+              <a:t>Ask: 'An abstract says only: mortality was significantly lower (p &lt; 0.05). What is missing?' Expected: the rates, the effect size and the 95% CI.</a:t>
             </a:r>
           </a:p>
           <a:p>
@@ -3103,19 +2737,13 @@
           <a:p>
             <a:r>
               <a:rPr lang="en-US" sz="1400" b="0" dirty="0"/>
-              <a:t>Go through the five answers in 2 minutes. Quick poll: how many did you get right (0-3, 4 or 5)?</a:t>
+              <a:t>Poll: how many right (0-3, 4 or 5)? If many missed 4 or 5, spend one minute on measurable verbs and H0.</a:t>
             </a:r>
           </a:p>
           <a:p>
             <a:r>
               <a:rPr lang="en-US" sz="1400" b="0" dirty="0"/>
-              <a:t>If many missed question 4 or 5, spend one extra minute: objectives use measurable verbs, and H0 always says 'no difference'.</a:t>
-            </a:r>
-          </a:p>
-          <a:p>
-            <a:r>
-              <a:rPr lang="en-US" sz="1400" b="0" dirty="0"/>
-              <a:t>Timing: 2 minutes. Segment 2.1 starts at 0:10.</a:t>
+              <a:t>Timing: 2 minutes. 2.1 starts at 19:40.</a:t>
             </a:r>
           </a:p>
         </p:txBody>
@@ -3196,31 +2824,13 @@
           <a:p>
             <a:r>
               <a:rPr lang="en-US" sz="1400" b="0" dirty="0"/>
-              <a:t>Worked example (illustrative numbers, not from a real trial).</a:t>
+              <a:t>Illustrative numbers. Ask of every result: how big, how sure, by when?</a:t>
             </a:r>
           </a:p>
           <a:p>
             <a:r>
               <a:rPr lang="en-US" sz="1400" b="0" dirty="0"/>
-              <a:t>Left: 'significantly lower (p &lt; 0.05)' tells us nothing about how big the difference is, how sure we are, or when it was measured.</a:t>
-            </a:r>
-          </a:p>
-          <a:p>
-            <a:r>
-              <a:rPr lang="en-US" sz="1400" b="0" dirty="0"/>
-              <a:t>Right: rates in each group, the size of the difference (8 percentage points), the 95% confidence interval and the time point (28 days). A reader can judge whether the difference matters clinically.</a:t>
-            </a:r>
-          </a:p>
-          <a:p>
-            <a:r>
-              <a:rPr lang="en-US" sz="1400" b="0" dirty="0"/>
-              <a:t>Teaching point: ask 'how big, how sure, by when?' of every result you read. Confidence intervals are explained properly in Session 6.</a:t>
-            </a:r>
-          </a:p>
-          <a:p>
-            <a:r>
-              <a:rPr lang="en-US" sz="1400" b="0" dirty="0"/>
-              <a:t>Ask the class (poll, left or right): 'Which sentence would you trust to change practice?' Expected: the right one, because you can see the size and the uncertainty.</a:t>
+              <a:t>Poll: 'Which sentence would you trust?' Expected: the right one.</a:t>
             </a:r>
           </a:p>
           <a:p>
@@ -3307,37 +2917,13 @@
           <a:p>
             <a:r>
               <a:rPr lang="en-US" sz="1400" b="0" dirty="0"/>
-              <a:t>Spin = reporting that makes results look more favourable than the data justify. It is common in abstracts of trials with non-significant primary outcomes.</a:t>
+              <a:t>Row 1: p = 0.42 is no evidence of a difference. Row 3: Paper 2's title says 'Impact', but its abstract conclusion correctly says 'associated'.</a:t>
             </a:r>
           </a:p>
           <a:p>
             <a:r>
               <a:rPr lang="en-US" sz="1400" b="0" dirty="0"/>
-              <a:t>Row 1: Paper 1's Discussion calls p = 0.42 for the primary outcome a 'non-significant trend'. A p of 0.42 is no evidence of a difference. The correct phrase is 'no significant difference, and the confidence interval was wide'. To its credit, the conclusion of Paper 1's abstract has no spin.</a:t>
-            </a:r>
-          </a:p>
-          <a:p>
-            <a:r>
-              <a:rPr lang="en-US" sz="1400" b="0" dirty="0"/>
-              <a:t>Row 2: highlighting a positive secondary outcome when the primary outcome showed nothing.</a:t>
-            </a:r>
-          </a:p>
-          <a:p>
-            <a:r>
-              <a:rPr lang="en-US" sz="1400" b="0" dirty="0"/>
-              <a:t>Row 3: causal words for observational data. Paper 2's title says 'Impact of...' although a cohort can only show association (its abstract conclusion correctly says 'associated').</a:t>
-            </a:r>
-          </a:p>
-          <a:p>
-            <a:r>
-              <a:rPr lang="en-US" sz="1400" b="0" dirty="0"/>
-              <a:t>Row 4: claiming improvement from before-after change within one group, with no comparison between groups.</a:t>
-            </a:r>
-          </a:p>
-          <a:p>
-            <a:r>
-              <a:rPr lang="en-US" sz="1400" b="0" dirty="0"/>
-              <a:t>Misconception: 'peer review removes spin'. It reduces it, but spin is frequent in published papers.</a:t>
+              <a:t>Peer review reduces spin but does not remove it.</a:t>
             </a:r>
           </a:p>
           <a:p>
@@ -3424,13 +3010,13 @@
           <a:p>
             <a:r>
               <a:rPr lang="en-US" sz="1400" b="0" dirty="0"/>
-              <a:t>Take one item at a time. Give the class 30 seconds to think, then call on one or two participants by name to unmute and say where the spin is and how they would rewrite it. Ask the class whether anyone disagrees before you give the answer.</a:t>
+              <a:t>One item at a time. 30 seconds, then call on one or two people.</a:t>
             </a:r>
           </a:p>
           <a:p>
             <a:r>
               <a:rPr lang="en-US" sz="1400" b="0" dirty="0"/>
-              <a:t>Answers: 1 Causal word for an observational design: write 'was associated with higher mortality'. 2 p = 0.31 is no evidence of a difference: write 'no significant difference, and the CI was wide'. 3 The headline is a secondary outcome: lead with the primary result. 4 Before-after change without a comparison, and other things may have changed: write 'mortality was lower after implementation, but without a control group we cannot attribute this to the protocol'.</a:t>
+              <a:t>Answers: 1 Write 'was associated with'. 2 p = 0.31: no significant difference, wide CI. 3 Lead with the primary outcome. 4 No control group, so the change cannot be attributed to the protocol.</a:t>
             </a:r>
           </a:p>
           <a:p>
@@ -3517,31 +3103,25 @@
           <a:p>
             <a:r>
               <a:rPr lang="en-US" sz="1400" b="0" dirty="0"/>
-              <a:t>Individual work, quietly for 8 minutes (cameras may go off), then 4 minutes in which everyone types the primary outcome and main result in the chat and you comment on the answers. Beginners need the extra time. Do not rush it.</a:t>
+              <a:t>8 minutes alone, then 4 minutes: everyone types the primary outcome and main result in the chat.</a:t>
             </a:r>
           </a:p>
           <a:p>
             <a:r>
               <a:rPr lang="en-US" sz="1400" b="0" dirty="0"/>
-              <a:t>Where the paper is: Course/Papers/Paper 1 - Boulet 2024 Crit Care (RCT) - original.pdf (the clean original, without our notes). It is open access (CC BY-NC-ND), so the unchanged original may be shared. The course website page 'The two papers' links to it by DOI (10.1186/s13054-024-05155-z), and you post the link in the chat at the break. The annotated versions (English and Vietnamese, also in Course/Papers) are for after the task.</a:t>
+              <a:t>Hardest cells: the primary outcome is fluid balance at day 5, not mortality. The 95% CI (-15.2 to 41.6) crosses zero.</a:t>
             </a:r>
           </a:p>
           <a:p>
             <a:r>
               <a:rPr lang="en-US" sz="1400" b="0" dirty="0"/>
-              <a:t>Watch the chat. The hardest cells: the primary outcome (many write 'mortality', but it is cumulative fluid balance at day 5) and the main result (they should copy the difference with its 95% CI, -15.2 to 41.6, which crosses zero).</a:t>
+              <a:t>Fast finishers: find the overstating word in Paper 2's title ('Impact').</a:t>
             </a:r>
           </a:p>
           <a:p>
             <a:r>
               <a:rPr lang="en-US" sz="1400" b="0" dirty="0"/>
-              <a:t>Fast finishers: read Paper 2's abstract and spot the word in its title that overstates the design ('Impact').</a:t>
-            </a:r>
-          </a:p>
-          <a:p>
-            <a:r>
-              <a:rPr lang="en-US" sz="1400" b="0" dirty="0"/>
-              <a:t>Timing: 12 minutes. The answers are on the next slide.</a:t>
+              <a:t>Timing: 12 minutes.</a:t>
             </a:r>
           </a:p>
         </p:txBody>
@@ -3622,31 +3202,25 @@
           <a:p>
             <a:r>
               <a:rPr lang="en-US" sz="1400" b="0" dirty="0"/>
-              <a:t>Go through the grid quickly. Ask for each row in the chat before you reveal it.</a:t>
+              <a:t>Ask for each row in the chat before revealing it.</a:t>
             </a:r>
           </a:p>
           <a:p>
             <a:r>
               <a:rPr lang="en-US" sz="1400" b="0" dirty="0"/>
-              <a:t>Key points. (1) A pilot trial with 48 analysed patients. (2) The primary outcome is cumulative fluid balance at day 5, not mortality. (3) The confidence interval for the difference (-15.2 to 41.6 ml/kg) includes zero, so there is no evidence of a difference. (4) The abstract conclusion matches the result (good practice). (5) The trial was registered.</a:t>
+              <a:t>Key points: pilot, 48 patients. Outcome fluid balance, not mortality. CI includes zero. Conclusion matches the result. Registered.</a:t>
             </a:r>
           </a:p>
           <a:p>
             <a:r>
               <a:rPr lang="en-US" sz="1400" b="0" dirty="0"/>
-              <a:t>If a sharp participant asks: the medians (6.9 vs 35.0 ml/kg) differ by more than the reported difference of 13.2 because the 13.2 is a difference in means (the Methods report the mean difference with its 95% CI), not a difference in medians. The course annotations flag this mismatch. Park it for Sessions 6-8.</a:t>
+              <a:t>If asked: the 13.2 is a difference in means, not medians. Park it.</a:t>
             </a:r>
           </a:p>
           <a:p>
             <a:r>
               <a:rPr lang="en-US" sz="1400" b="0" dirty="0"/>
-              <a:t>Link to our question: this trial does not answer the 28-day mortality question. It answers a feasibility-type question about fluid balance. That is exactly the 'feasible rewrite' from the FINER slide.</a:t>
-            </a:r>
-          </a:p>
-          <a:p>
-            <a:r>
-              <a:rPr lang="en-US" sz="1400" b="0" dirty="0"/>
-              <a:t>Timing: 5 minutes, row by row. Segment 2.3 ends at 2:05.</a:t>
+              <a:t>Timing: 5 minutes. 2.3 ends at 21:35.</a:t>
             </a:r>
           </a:p>
         </p:txBody>
@@ -3726,20 +3300,8 @@
           <a:lstStyle/>
           <a:p>
             <a:r>
-              <a:rPr lang="en-US" sz="1400" b="1" dirty="0"/>
-              <a:t>SEGMENT 2.4 (2:05-2:20, 21:35-21:50).</a:t>
-            </a:r>
-          </a:p>
-          <a:p>
-            <a:r>
               <a:rPr lang="en-US" sz="1400" b="0" dirty="0"/>
-              <a:t>Teaching point: reading is not the end. The literature review worksheet turns papers into a gap, the gap into a problem statement, and the PICO into a working title.</a:t>
-            </a:r>
-          </a:p>
-          <a:p>
-            <a:r>
-              <a:rPr lang="en-US" sz="1400" b="0" dirty="0"/>
-              <a:t>Timing: 30 seconds.</a:t>
+              <a:t>2.4 runs 21:35-21:50. Timing: 30 seconds.</a:t>
             </a:r>
           </a:p>
         </p:txBody>
@@ -3820,25 +3382,7 @@
           <a:p>
             <a:r>
               <a:rPr lang="en-US" sz="1400" b="0" dirty="0"/>
-              <a:t>The worksheet is in Course/Templates (literature review worksheet). One row per paper, the same columns each time.</a:t>
-            </a:r>
-          </a:p>
-          <a:p>
-            <a:r>
-              <a:rPr lang="en-US" sz="1400" b="0" dirty="0"/>
-              <a:t>Rows 1-3 show the course papers: Paper 1 (Boulet 2024, pilot RCT: fluid balance, no significant difference), Paper 2 (Hyun 2023, matched cohort: positive balance on days 2-3 associated with higher 28-day mortality), and CLASSIC (Meyhoff 2022: no difference in 90-day mortality).</a:t>
-            </a:r>
-          </a:p>
-          <a:p>
-            <a:r>
-              <a:rPr lang="en-US" sz="1400" b="0" dirty="0"/>
-              <a:t>Notice: the three papers measure different outcomes at different times. The worksheet makes that visible at once.</a:t>
-            </a:r>
-          </a:p>
-          <a:p>
-            <a:r>
-              <a:rPr lang="en-US" sz="1400" b="0" dirty="0"/>
-              <a:t>Teaching point: the 'key limitation' column is where the gap, and your study's justification, comes from.</a:t>
+              <a:t>The three papers measure different outcomes at different times. The 'key limitation' column gives the gap.</a:t>
             </a:r>
           </a:p>
           <a:p>
@@ -3925,37 +3469,13 @@
           <a:p>
             <a:r>
               <a:rPr lang="en-US" sz="1400" b="0" dirty="0"/>
-              <a:t>The papers you read become the Introduction of your proposal (the 'problem statement'). It is the same funnel as the top of the IMRaD hourglass.</a:t>
+              <a:t>Paragraph 2 (the gap) comes from the 'key limitation' column.</a:t>
             </a:r>
           </a:p>
           <a:p>
             <a:r>
               <a:rPr lang="en-US" sz="1400" b="0" dirty="0"/>
-              <a:t>Paragraph 1, what is known: the size of the problem and current practice, with references.</a:t>
-            </a:r>
-          </a:p>
-          <a:p>
-            <a:r>
-              <a:rPr lang="en-US" sz="1400" b="0" dirty="0"/>
-              <a:t>Paragraph 2, what is not known: the gap (conflicting studies, studies too small, outcomes not measured). The 'key limitation' column of your literature worksheet feeds this paragraph.</a:t>
-            </a:r>
-          </a:p>
-          <a:p>
-            <a:r>
-              <a:rPr lang="en-US" sz="1400" b="0" dirty="0"/>
-              <a:t>Paragraph 3: the research question, the aim and the objectives, which follow from the gap.</a:t>
-            </a:r>
-          </a:p>
-          <a:p>
-            <a:r>
-              <a:rPr lang="en-US" sz="1400" b="0" dirty="0"/>
-              <a:t>Science rule: the Introduction never contains your own data or results, and never 'our audit'. Your results belong in the Results. A local figure (for example a national or regional rate) may appear only if it comes from a publication, with its reference.</a:t>
-            </a:r>
-          </a:p>
-          <a:p>
-            <a:r>
-              <a:rPr lang="en-US" sz="1400" b="0" dirty="0"/>
-              <a:t>Misconception: 'the background must review everything ever written'. Paper 1's introduction does the whole funnel in under 500 words.</a:t>
+              <a:t>Never put your own data or 'our audit' in the Introduction. A local figure only if it is published and cited.</a:t>
             </a:r>
           </a:p>
           <a:p>
@@ -4042,37 +3562,7 @@
           <a:p>
             <a:r>
               <a:rPr lang="en-US" sz="1400" b="0" dirty="0"/>
-              <a:t>The funnel as real text, for the feasible pilot version of the running example (outcome: fluid balance at day 5).</a:t>
-            </a:r>
-          </a:p>
-          <a:p>
-            <a:r>
-              <a:rPr lang="en-US" sz="1400" b="0" dirty="0"/>
-              <a:t>Paragraph 1 (known) cites Paper 2 [2]. Paragraph 2 (not known) cites CLASSIC [3], CLOVERS [4] and Paper 1 [1], and ends with the gap. Paragraph 3 states the question and the primary objective, which follow from the gap.</a:t>
-            </a:r>
-          </a:p>
-          <a:p>
-            <a:r>
-              <a:rPr lang="en-US" sz="1400" b="0" dirty="0"/>
-              <a:t>No own data and no audit results here: they are results, not background. If you want a local figure, use a published one and cite it.</a:t>
-            </a:r>
-          </a:p>
-          <a:p>
-            <a:r>
-              <a:rPr lang="en-US" sz="1400" b="0" dirty="0"/>
-              <a:t>Teaching point: every factual sentence carries a reference number.</a:t>
-            </a:r>
-          </a:p>
-          <a:p>
-            <a:r>
-              <a:rPr lang="en-US" sz="1400" b="0" dirty="0"/>
-              <a:t>Misconception: 'the problem statement should be long and impressive'. About 300 words is enough for a proposal.</a:t>
-            </a:r>
-          </a:p>
-          <a:p>
-            <a:r>
-              <a:rPr lang="en-US" sz="1400" b="0" dirty="0"/>
-              <a:t>Model text in English: participants write their proposal in English (Vietnamese allowed if English is impossible).</a:t>
+              <a:t>Every factual sentence carries a reference. About 300 words is enough. Written in English, as the proposal is.</a:t>
             </a:r>
           </a:p>
           <a:p>
@@ -4159,37 +3649,19 @@
           <a:p>
             <a:r>
               <a:rPr lang="en-US" sz="1400" b="0" dirty="0"/>
-              <a:t>A good title names the population, the intervention and comparison (or exposure), and the design, in about 10 to 16 words.</a:t>
+              <a:t>Avoid abbreviations and causal words ('impact', 'effect of'). Keywords: 3 to 6 MeSH terms not in the title.</a:t>
             </a:r>
           </a:p>
           <a:p>
             <a:r>
               <a:rPr lang="en-US" sz="1400" b="0" dirty="0"/>
-              <a:t>Example from the feasible rewrite: 'Restrictive versus usual fluids in adults with septic shock: a pilot randomised trial' (13 words).</a:t>
+              <a:t>Ask: 'Is Fluids in the ICU a good title?' Expected: no population, comparison or design.</a:t>
             </a:r>
           </a:p>
           <a:p>
             <a:r>
               <a:rPr lang="en-US" sz="1400" b="0" dirty="0"/>
-              <a:t>Avoid abbreviations and promotional or causal words ('impact', 'novel', 'effect of'), especially for observational designs (compare Paper 2's title).</a:t>
-            </a:r>
-          </a:p>
-          <a:p>
-            <a:r>
-              <a:rPr lang="en-US" sz="1400" b="0" dirty="0"/>
-              <a:t>Keywords: 3 to 6, ideally MeSH terms not already in the title, so the paper is found by more searches (the Paper 1 annotations make the same point).</a:t>
-            </a:r>
-          </a:p>
-          <a:p>
-            <a:r>
-              <a:rPr lang="en-US" sz="1400" b="0" dirty="0"/>
-              <a:t>Ask the class (chat): 'Is Fluids in the ICU a good title?' Expected: no. It has no population, no comparison and no design.</a:t>
-            </a:r>
-          </a:p>
-          <a:p>
-            <a:r>
-              <a:rPr lang="en-US" sz="1400" b="0" dirty="0"/>
-              <a:t>Timing: 4 minutes. Segment 2.4 ends at 2:20.</a:t>
+              <a:t>Timing: 4 minutes. 2.4 ends at 21:50.</a:t>
             </a:r>
           </a:p>
         </p:txBody>
@@ -4269,20 +3741,14 @@
           <a:lstStyle/>
           <a:p>
             <a:r>
-              <a:rPr lang="en-US" sz="1400" b="1" dirty="0"/>
-              <a:t>SEGMENT 2.1 (0:10-0:50, 19:40-20:20).</a:t>
-            </a:r>
-          </a:p>
-          <a:p>
-            <a:r>
               <a:rPr lang="en-US" sz="1400" b="0" dirty="0"/>
-              <a:t>Teaching point: the literature search decides whether the question is novel, gives the background for the problem statement, and shows how others measured the outcome.</a:t>
+              <a:t>2.1 runs 19:40-20:20.</a:t>
             </a:r>
           </a:p>
           <a:p>
             <a:r>
               <a:rPr lang="en-US" sz="1400" b="0" dirty="0"/>
-              <a:t>Ask the class (chat): 'What do you usually do when you need evidence quickly?' Honest answers: Google, a colleague, UpToDate, a guideline. All fine for care, but a proposal needs a documented search.</a:t>
+              <a:t>Ask: 'What do you do when you need evidence quickly?' Google, a colleague, a guideline: fine for care, but a proposal needs a documented search.</a:t>
             </a:r>
           </a:p>
           <a:p>
@@ -4369,25 +3835,7 @@
           <a:p>
             <a:r>
               <a:rPr lang="en-US" sz="1400" b="0" dirty="0"/>
-              <a:t>PROPOSAL BUILDER 2 (2:20-2:55, 21:50-22:25). The 35 minutes start with this slide.</a:t>
-            </a:r>
-          </a:p>
-          <a:p>
-            <a:r>
-              <a:rPr lang="en-US" sz="1400" b="0" dirty="0"/>
-              <a:t>Teaching point: everything taught today is applied to each participant's own question from last Saturday. Everyone works on their own proposal. Nobody works in a group.</a:t>
-            </a:r>
-          </a:p>
-          <a:p>
-            <a:r>
-              <a:rPr lang="en-US" sz="1400" b="0" dirty="0"/>
-              <a:t>By the end, each participant has a documented search, some of the 5 references in Zotero and the worksheet, and a first draft of the problem statement and working title. The rest is homework.</a:t>
-            </a:r>
-          </a:p>
-          <a:p>
-            <a:r>
-              <a:rPr lang="en-US" sz="1400" b="0" dirty="0"/>
-              <a:t>Move straight to the next slide.</a:t>
+              <a:t>Proposal builder 2 runs 21:50-22:25. Move straight to the next slide.</a:t>
             </a:r>
           </a:p>
         </p:txBody>
@@ -4468,37 +3916,31 @@
           <a:p>
             <a:r>
               <a:rPr lang="en-US" sz="1400" b="0" dirty="0"/>
-              <a:t>Minutes 0-10, whole class: re-run the running-example string from the demo, screen the first titles together (participants say 'keep' or 'drop' in the chat and suggest extra terms), save two papers to Zotero, fill one worksheet row and point to the model problem statement and title.</a:t>
+              <a:t>Minutes 0-10: re-run the demo string, screen titles together in the chat, save two papers to Zotero, fill one worksheet row.</a:t>
             </a:r>
           </a:p>
           <a:p>
             <a:r>
               <a:rPr lang="en-US" sz="1400" b="0" dirty="0"/>
-              <a:t>Minutes 10-30, everyone works alone on their own question. Cameras may go off. The trainers answer questions in the chat. Common problems: too many hits (add a block or a filter), too few (add synonyms), a comparison block, AND inside a block.</a:t>
+              <a:t>Minutes 10-30: everyone works alone. Common problems: too many hits (add a block), too few (add synonyms), a comparison block.</a:t>
             </a:r>
           </a:p>
           <a:p>
             <a:r>
               <a:rPr lang="en-US" sz="1400" b="0" dirty="0"/>
-              <a:t>Anyone who cannot finish the 5 references records the string, database and date. The remaining references become homework.</a:t>
+              <a:t>Minutes 30-35: two volunteers read their title and gap sentence.</a:t>
             </a:r>
           </a:p>
           <a:p>
             <a:r>
               <a:rPr lang="en-US" sz="1400" b="0" dirty="0"/>
-              <a:t>Minutes 30-35: two volunteers read their title and gap sentence aloud, microphone on, and the class suggests one improvement each in the chat.</a:t>
+              <a:t>Key: s2_solutions, Exercise 4.</a:t>
             </a:r>
           </a:p>
           <a:p>
             <a:r>
               <a:rPr lang="en-US" sz="1400" b="0" dirty="0"/>
-              <a:t>What good looks like: Course/Solutions/s2_solutions.md (Exercise 4).</a:t>
-            </a:r>
-          </a:p>
-          <a:p>
-            <a:r>
-              <a:rPr lang="en-US" sz="1400" b="0" dirty="0"/>
-              <a:t>Timing: 35 minutes. Wrap-up starts at 2:55 (22:25).</a:t>
+              <a:t>Timing: 35 minutes. Wrap-up at 22:25.</a:t>
             </a:r>
           </a:p>
         </p:txBody>
@@ -4578,20 +4020,8 @@
           <a:lstStyle/>
           <a:p>
             <a:r>
-              <a:rPr lang="en-US" sz="1400" b="1" dirty="0"/>
-              <a:t>WRAP-UP (2:55-3:00, 22:25-22:30).</a:t>
-            </a:r>
-          </a:p>
-          <a:p>
-            <a:r>
               <a:rPr lang="en-US" sz="1400" b="0" dirty="0"/>
-              <a:t>Read the six key words quickly. They are also in the course glossary (EN-VN).</a:t>
-            </a:r>
-          </a:p>
-          <a:p>
-            <a:r>
-              <a:rPr lang="en-US" sz="1400" b="0" dirty="0"/>
-              <a:t>Timing: 1 minute.</a:t>
+              <a:t>Read the key words quickly. Timing: 1 minute.</a:t>
             </a:r>
           </a:p>
         </p:txBody>
@@ -4672,13 +4102,7 @@
           <a:p>
             <a:r>
               <a:rPr lang="en-US" sz="1400" b="0" dirty="0"/>
-              <a:t>Read the three messages, then ask one participant: 'What is the first thing you look for in an abstract?' Expected: the primary outcome and its result with a CI.</a:t>
-            </a:r>
-          </a:p>
-          <a:p>
-            <a:r>
-              <a:rPr lang="en-US" sz="1400" b="0" dirty="0"/>
-              <a:t>Link forward: over the next two Saturdays (Sessions 3 and 4) we choose the right design to answer each question, and meet bias, confounding and measures of effect using the two fluid papers.</a:t>
+              <a:t>Ask one person: 'What do you look for first in an abstract?' Expected: the primary outcome and its result with a CI.</a:t>
             </a:r>
           </a:p>
           <a:p>
@@ -4765,13 +4189,13 @@
           <a:p>
             <a:r>
               <a:rPr lang="en-US" sz="1400" b="0" dirty="0"/>
-              <a:t>Not marked. Answers: Q1 OR (either term counts). Q2 Cumulative fluid balance at day 5 (ml/kg), not mortality.</a:t>
+              <a:t>Answers: Q1 OR. Q2 Cumulative fluid balance at day 5, not mortality.</a:t>
             </a:r>
           </a:p>
           <a:p>
             <a:r>
               <a:rPr lang="en-US" sz="1400" b="0" dirty="0"/>
-              <a:t>Save the chat and read the answers during the week. If more than a quarter get either wrong, start Session 3 with it.</a:t>
+              <a:t>If more than a quarter get either wrong, start Session 3 with it.</a:t>
             </a:r>
           </a:p>
           <a:p>
@@ -4858,31 +4282,13 @@
           <a:p>
             <a:r>
               <a:rPr lang="en-US" sz="1400" b="0" dirty="0"/>
-              <a:t>Be specific: about 60-90 minutes over the week, on your own.</a:t>
+              <a:t>About 60-90 minutes over the week. Session 3 uses both abstracts.</a:t>
             </a:r>
           </a:p>
           <a:p>
             <a:r>
               <a:rPr lang="en-US" sz="1400" b="0" dirty="0"/>
-              <a:t>The two papers are in Course/Papers (annotated versions in English and Vietnamese). Session 3 uses both abstracts to compare an RCT with a cohort.</a:t>
-            </a:r>
-          </a:p>
-          <a:p>
-            <a:r>
-              <a:rPr lang="en-US" sz="1400" b="0" dirty="0"/>
-              <a:t>Remind participants to email their Part 1 to the trainers if you offer written feedback between sessions.</a:t>
-            </a:r>
-          </a:p>
-          <a:p>
-            <a:r>
-              <a:rPr lang="en-US" sz="1400" b="0" dirty="0"/>
-              <a:t>Close on time. Thank the class.</a:t>
-            </a:r>
-          </a:p>
-          <a:p>
-            <a:r>
-              <a:rPr lang="en-US" sz="1400" b="0" dirty="0"/>
-              <a:t>Timing: 1 minute.</a:t>
+              <a:t>Timing: 1 minute. Close on time.</a:t>
             </a:r>
           </a:p>
         </p:txBody>
@@ -4963,19 +4369,7 @@
           <a:p>
             <a:r>
               <a:rPr lang="en-US" sz="1400" b="0" dirty="0"/>
-              <a:t>EXTRA SLIDES (Session 2).</a:t>
-            </a:r>
-          </a:p>
-          <a:p>
-            <a:r>
-              <a:rPr lang="en-US" sz="1400" b="0" dirty="0"/>
-              <a:t>Everything after this slide is optional. Use it if the class is fast or asks, or point participants to it for self-study.</a:t>
-            </a:r>
-          </a:p>
-          <a:p>
-            <a:r>
-              <a:rPr lang="en-US" sz="1400" b="0" dirty="0"/>
-              <a:t>The core session is complete without these slides.</a:t>
+              <a:t>Optional. Use if time allows, or for self-study.</a:t>
             </a:r>
           </a:p>
         </p:txBody>
@@ -5056,43 +4450,7 @@
           <a:p>
             <a:r>
               <a:rPr lang="en-US" sz="1400" b="0" dirty="0"/>
-              <a:t>EXTRA: other databases.</a:t>
-            </a:r>
-          </a:p>
-          <a:p>
-            <a:r>
-              <a:rPr lang="en-US" sz="1400" b="0" dirty="0"/>
-              <a:t>Key message: for a Level 1 proposal, PubMed and a registry are enough. A systematic review searches several databases.</a:t>
-            </a:r>
-          </a:p>
-          <a:p>
-            <a:r>
-              <a:rPr lang="en-US" sz="1400" b="0" dirty="0"/>
-              <a:t>Before any new study, look for an existing systematic review first (core slide 'First check'). The Cochrane Library is the place to start for treatment questions: the Cochrane Database of Systematic Reviews (CDSR) holds Cochrane's own reviews, and CENTRAL is its register of controlled trials.</a:t>
-            </a:r>
-          </a:p>
-          <a:p>
-            <a:r>
-              <a:rPr lang="en-US" sz="1400" b="0" dirty="0"/>
-              <a:t>Embase overlaps with MEDLINE but adds many drug and European journals and conference abstracts. Web of Science and Scopus cover many disciplines and are strong for following citations. CINAHL is the main nursing database. APA PsycInfo covers mental health and behaviour.</a:t>
-            </a:r>
-          </a:p>
-          <a:p>
-            <a:r>
-              <a:rPr lang="en-US" sz="1400" b="0" dirty="0"/>
-              <a:t>Epistemonikos (free) collects systematic reviews from many sources. WHO Global Index Medicus brings together regional databases, including the Western Pacific Region Index Medicus, which can matter for local-language journals.</a:t>
-            </a:r>
-          </a:p>
-          <a:p>
-            <a:r>
-              <a:rPr lang="en-US" sz="1400" b="0" dirty="0"/>
-              <a:t>Embase, Web of Science, Scopus and CINAHL usually need an institutional subscription. Ask your library.</a:t>
-            </a:r>
-          </a:p>
-          <a:p>
-            <a:r>
-              <a:rPr lang="en-US" sz="1400" b="0" dirty="0"/>
-              <a:t>A systematic review searches at least two or three of these, plus registries and grey literature. Level 3 has a dedicated module on systematic review and meta-analysis (Module A): protocol and PROSPERO registration, a multi-database search, risk of bias, pooling and PRISMA 2020 reporting.</a:t>
+              <a:t>For a Level 1 proposal, PubMed and a registry are enough. Start with the Cochrane Library for treatment questions. Most other databases need an institutional subscription.</a:t>
             </a:r>
           </a:p>
           <a:p>
@@ -5179,25 +4537,7 @@
           <a:p>
             <a:r>
               <a:rPr lang="en-US" sz="1400" b="0" dirty="0"/>
-              <a:t>EXTRA: PubMed Clinical Queries.</a:t>
-            </a:r>
-          </a:p>
-          <a:p>
-            <a:r>
-              <a:rPr lang="en-US" sz="1400" b="0" dirty="0"/>
-              <a:t>Clinical Queries applies validated search filters for study types that answer clinical questions.</a:t>
-            </a:r>
-          </a:p>
-          <a:p>
-            <a:r>
-              <a:rPr lang="en-US" sz="1400" b="0" dirty="0"/>
-              <a:t>Good for a quick look before a ward round or to check your own search did not miss an obvious trial.</a:t>
-            </a:r>
-          </a:p>
-          <a:p>
-            <a:r>
-              <a:rPr lang="en-US" sz="1400" b="0" dirty="0"/>
-              <a:t>The interface changes from time to time. Check it before showing it live.</a:t>
+              <a:t>Useful to check a search did not miss an obvious trial. The interface changes, so check it before showing it.</a:t>
             </a:r>
           </a:p>
           <a:p>
@@ -5284,25 +4624,7 @@
           <a:p>
             <a:r>
               <a:rPr lang="en-US" sz="1400" b="0" dirty="0"/>
-              <a:t>EXTRA: Google Scholar demo.</a:t>
-            </a:r>
-          </a:p>
-          <a:p>
-            <a:r>
-              <a:rPr lang="en-US" sz="1400" b="0" dirty="0"/>
-              <a:t>Course/Demos/s2_demo.md, Part C.</a:t>
-            </a:r>
-          </a:p>
-          <a:p>
-            <a:r>
-              <a:rPr lang="en-US" sz="1400" b="0" dirty="0"/>
-              <a:t>Say: 'Scholar is excellent for following citations forward and for grey literature, but there is no MeSH, few filters, and the same search may give different results next month.'</a:t>
-            </a:r>
-          </a:p>
-          <a:p>
-            <a:r>
-              <a:rPr lang="en-US" sz="1400" b="0" dirty="0"/>
-              <a:t>If Scholar shows a CAPTCHA, do not try to solve it while sharing your screen. Skip to the screenshots.</a:t>
+              <a:t>Script: s2_demo.md, Part C. If Scholar shows a CAPTCHA, skip to the screenshots.</a:t>
             </a:r>
           </a:p>
           <a:p>
@@ -5389,37 +4711,19 @@
           <a:p>
             <a:r>
               <a:rPr lang="en-US" sz="1400" b="0" dirty="0"/>
-              <a:t>Walk along the funnel from left to right: all of PubMed, one keyword, structured PICO blocks, filters, screening by people, a handful of key papers.</a:t>
+              <a:t>The last two steps are done by reading, not by the computer.</a:t>
             </a:r>
           </a:p>
           <a:p>
             <a:r>
               <a:rPr lang="en-US" sz="1400" b="0" dirty="0"/>
-              <a:t>Source for the PubMed size: the PubMed 'About' page (https://pubmed.ncbi.nlm.nih.gov/about/) says 'more than 40 million citations and abstracts'. Checked on 19 October 2026 (page last updated 11 March 2025). Check it again before teaching and update the 'as of' date if the number has changed.</a:t>
+              <a:t>Ask: 'Why write down the date and the search string?' Expected: so it can be repeated.</a:t>
             </a:r>
           </a:p>
           <a:p>
             <a:r>
               <a:rPr lang="en-US" sz="1400" b="0" dirty="0"/>
-              <a:t>The other numbers are orders of magnitude only. They change every day.</a:t>
-            </a:r>
-          </a:p>
-          <a:p>
-            <a:r>
-              <a:rPr lang="en-US" sz="1400" b="0" dirty="0"/>
-              <a:t>Teaching point: the last two steps are done by reading, not by the computer.</a:t>
-            </a:r>
-          </a:p>
-          <a:p>
-            <a:r>
-              <a:rPr lang="en-US" sz="1400" b="0" dirty="0"/>
-              <a:t>Ask the class (chat): 'Why write down the date and the search string?' Expected: so it can be repeated. Journals and reviewers ask for it.</a:t>
-            </a:r>
-          </a:p>
-          <a:p>
-            <a:r>
-              <a:rPr lang="en-US" sz="1400" b="0" dirty="0"/>
-              <a:t>This slide is built from editable shapes: change a number or add a reference directly in PowerPoint.</a:t>
+              <a:t>PubMed size: 'more than 40 million citations' (PubMed About page, checked 19 October 2026). Recheck before teaching.</a:t>
             </a:r>
           </a:p>
           <a:p>
@@ -5506,19 +4810,7 @@
           <a:p>
             <a:r>
               <a:rPr lang="en-US" sz="1400" b="0" dirty="0"/>
-              <a:t>EXTRA: text recycling, AI and similarity checks.</a:t>
-            </a:r>
-          </a:p>
-          <a:p>
-            <a:r>
-              <a:rPr lang="en-US" sz="1400" b="0" dirty="0"/>
-              <a:t>Text recycling ('self-plagiarism'): some reuse of standard Methods wording may be accepted if cited and allowed by the journal. Never reuse Results or Discussion text.</a:t>
-            </a:r>
-          </a:p>
-          <a:p>
-            <a:r>
-              <a:rPr lang="en-US" sz="1400" b="0" dirty="0"/>
-              <a:t>AI tools: journals require disclosure of AI use (Session 7 covers integrity and AI in detail).</a:t>
+              <a:t>Never reuse Results or Discussion text. AI use must be disclosed (Session 7).</a:t>
             </a:r>
           </a:p>
           <a:p>
@@ -5605,7 +4897,7 @@
           <a:p>
             <a:r>
               <a:rPr lang="en-US" sz="1400" b="0" dirty="0"/>
-              <a:t>Copyright slide. Leave it on screen while participants leave the meeting.</a:t>
+              <a:t>Leave on screen while people leave the meeting.</a:t>
             </a:r>
           </a:p>
         </p:txBody>
@@ -5686,25 +4978,7 @@
           <a:p>
             <a:r>
               <a:rPr lang="en-US" sz="1400" b="0" dirty="0"/>
-              <a:t>AND: only papers with both concepts, so fewer hits. OR: either word, so more hits. Use OR for synonyms.</a:t>
-            </a:r>
-          </a:p>
-          <a:p>
-            <a:r>
-              <a:rPr lang="en-US" sz="1400" b="0" dirty="0"/>
-              <a:t>NOT removes every paper that mentions the second term, even good papers that mention neonates once. That is why NOT is risky.</a:t>
-            </a:r>
-          </a:p>
-          <a:p>
-            <a:r>
-              <a:rPr lang="en-US" sz="1400" b="0" dirty="0"/>
-              <a:t>Tip: type the operators in capitals, and use brackets to control the order.</a:t>
-            </a:r>
-          </a:p>
-          <a:p>
-            <a:r>
-              <a:rPr lang="en-US" sz="1400" b="0" dirty="0"/>
-              <a:t>The circles are editable PowerPoint shapes: change the search words directly on the slide.</a:t>
+              <a:t>NOT removes good papers that mention the term once, so use it rarely. Type operators in capitals and use brackets.</a:t>
             </a:r>
           </a:p>
           <a:p>
@@ -5791,7 +5065,7 @@
           <a:p>
             <a:r>
               <a:rPr lang="en-US" sz="1400" b="0" dirty="0"/>
-              <a:t>Answers: 1 AND. 2 OR. 3 Fewer (AND narrows). 4 It removes every paper that mentions children anywhere, including good adult studies that mention children once.</a:t>
+              <a:t>Answers: 1 AND. 2 OR. 3 Fewer. 4 It removes every paper that mentions children, including good adult studies.</a:t>
             </a:r>
           </a:p>
           <a:p>
@@ -5878,31 +5152,13 @@
           <a:p>
             <a:r>
               <a:rPr lang="en-US" sz="1400" b="0" dirty="0"/>
-              <a:t>MeSH (Medical Subject Headings) is the controlled vocabulary of the US National Library of Medicine. Indexers tag each MEDLINE record with MeSH terms, whatever words the authors used.</a:t>
+              <a:t>Searching a MeSH term includes the narrower terms below it. New records may not be indexed yet, so add [tiab] words.</a:t>
             </a:r>
           </a:p>
           <a:p>
             <a:r>
               <a:rPr lang="en-US" sz="1400" b="0" dirty="0"/>
-              <a:t>The tree runs from broad to narrow. Searching a MeSH term also searches the narrower terms below it: Sepsis[MeSH] includes Shock, Septic.</a:t>
-            </a:r>
-          </a:p>
-          <a:p>
-            <a:r>
-              <a:rPr lang="en-US" sz="1400" b="0" dirty="0"/>
-              <a:t>The newest records may not be indexed yet, so always add free-text [tiab] words ([tiab] = title or abstract).</a:t>
-            </a:r>
-          </a:p>
-          <a:p>
-            <a:r>
-              <a:rPr lang="en-US" sz="1400" b="0" dirty="0"/>
-              <a:t>Ask the class (chat): 'Why does MeSH help a nurse searching for pressure injury?' Expected: authors write pressure ulcer, bedsore, decubitus ulcer, and MeSH collects them under one heading.</a:t>
-            </a:r>
-          </a:p>
-          <a:p>
-            <a:r>
-              <a:rPr lang="en-US" sz="1400" b="0" dirty="0"/>
-              <a:t>Next slide: how to find the right MeSH term.</a:t>
+              <a:t>Ask: 'Why does MeSH help a nurse searching for pressure injury?' Expected: one heading collects pressure ulcer, bedsore, decubitus ulcer.</a:t>
             </a:r>
           </a:p>
           <a:p>
@@ -5989,31 +5245,7 @@
           <a:p>
             <a:r>
               <a:rPr lang="en-US" sz="1400" b="0" dirty="0"/>
-              <a:t>Participants cannot know which words are MeSH terms. Show them three ways to find out.</a:t>
-            </a:r>
-          </a:p>
-          <a:p>
-            <a:r>
-              <a:rPr lang="en-US" sz="1400" b="0" dirty="0"/>
-              <a:t>Route 1, the MeSH Database: on the PubMed home page, under Explore, click 'MeSH Database' (or go to https://www.ncbi.nlm.nih.gov/mesh). Type an everyday word. The record shows the official heading, its definition, the entry terms it collects (for Pressure Ulcer: bedsore, decubitus ulcer, pressure injury and others) and its place in the tree. 'Add to search builder' sends it to PubMed.</a:t>
-            </a:r>
-          </a:p>
-          <a:p>
-            <a:r>
-              <a:rPr lang="en-US" sz="1400" b="0" dirty="0"/>
-              <a:t>Route 2, a known paper: open a paper you already know is relevant (for us, CLASSIC or Paper 1), scroll down to 'MeSH terms' and reuse the headings that match your concepts. The demo shows this.</a:t>
-            </a:r>
-          </a:p>
-          <a:p>
-            <a:r>
-              <a:rPr lang="en-US" sz="1400" b="0" dirty="0"/>
-              <a:t>Route 3, Search details: run your free-text words, then open 'Search details' on the Advanced page. PubMed's automatic term mapping shows which MeSH heading it matched.</a:t>
-            </a:r>
-          </a:p>
-          <a:p>
-            <a:r>
-              <a:rPr lang="en-US" sz="1400" b="0" dirty="0"/>
-              <a:t>Check the record before you use a heading: sometimes the heading is broader or narrower than you expect.</a:t>
+              <a:t>Show the three routes briefly. The demo uses route 2. Check the heading's definition before using it.</a:t>
             </a:r>
           </a:p>
           <a:p>
